--- a/artifacts/onboarding-deck.pptx
+++ b/artifacts/onboarding-deck.pptx
@@ -5,7 +5,7 @@
     <p:sldMasterId id="2147483648" r:id="rId1"/>
   </p:sldMasterIdLst>
   <p:notesMasterIdLst>
-    <p:notesMasterId r:id="rId22"/>
+    <p:notesMasterId r:id="rId23"/>
   </p:notesMasterIdLst>
   <p:sldIdLst>
     <p:sldId id="256" r:id="rId2"/>
@@ -21,13 +21,14 @@
     <p:sldId id="262" r:id="rId12"/>
     <p:sldId id="263" r:id="rId13"/>
     <p:sldId id="265" r:id="rId14"/>
-    <p:sldId id="266" r:id="rId15"/>
-    <p:sldId id="267" r:id="rId16"/>
-    <p:sldId id="268" r:id="rId17"/>
-    <p:sldId id="270" r:id="rId18"/>
-    <p:sldId id="271" r:id="rId19"/>
-    <p:sldId id="272" r:id="rId20"/>
-    <p:sldId id="273" r:id="rId21"/>
+    <p:sldId id="276" r:id="rId15"/>
+    <p:sldId id="266" r:id="rId16"/>
+    <p:sldId id="267" r:id="rId17"/>
+    <p:sldId id="268" r:id="rId18"/>
+    <p:sldId id="270" r:id="rId19"/>
+    <p:sldId id="271" r:id="rId20"/>
+    <p:sldId id="272" r:id="rId21"/>
+    <p:sldId id="273" r:id="rId22"/>
   </p:sldIdLst>
   <p:sldSz cx="12192000" cy="6858000"/>
   <p:notesSz cx="6858000" cy="12192000"/>
@@ -741,7 +742,7 @@
           <a:p>
             <a:fld id="{F7021451-1387-4CA6-816F-3879F97B5CBC}" type="slidenum">
               <a:rPr lang="en-US"/>
-              <a:t>14</a:t>
+              <a:t>15</a:t>
             </a:fld>
             <a:endParaRPr lang="en-US"/>
           </a:p>
@@ -825,7 +826,7 @@
           <a:p>
             <a:fld id="{F7021451-1387-4CA6-816F-3879F97B5CBC}" type="slidenum">
               <a:rPr lang="en-US"/>
-              <a:t>15</a:t>
+              <a:t>16</a:t>
             </a:fld>
             <a:endParaRPr lang="en-US"/>
           </a:p>
@@ -909,7 +910,7 @@
           <a:p>
             <a:fld id="{F7021451-1387-4CA6-816F-3879F97B5CBC}" type="slidenum">
               <a:rPr lang="en-US"/>
-              <a:t>16</a:t>
+              <a:t>17</a:t>
             </a:fld>
             <a:endParaRPr lang="en-US"/>
           </a:p>
@@ -993,7 +994,7 @@
           <a:p>
             <a:fld id="{F7021451-1387-4CA6-816F-3879F97B5CBC}" type="slidenum">
               <a:rPr lang="en-US"/>
-              <a:t>17</a:t>
+              <a:t>18</a:t>
             </a:fld>
             <a:endParaRPr lang="en-US"/>
           </a:p>
@@ -1077,7 +1078,7 @@
           <a:p>
             <a:fld id="{F7021451-1387-4CA6-816F-3879F97B5CBC}" type="slidenum">
               <a:rPr lang="en-US"/>
-              <a:t>18</a:t>
+              <a:t>19</a:t>
             </a:fld>
             <a:endParaRPr lang="en-US"/>
           </a:p>
@@ -1161,7 +1162,7 @@
           <a:p>
             <a:fld id="{F7021451-1387-4CA6-816F-3879F97B5CBC}" type="slidenum">
               <a:rPr lang="en-US"/>
-              <a:t>19</a:t>
+              <a:t>20</a:t>
             </a:fld>
             <a:endParaRPr lang="en-US"/>
           </a:p>
@@ -1329,7 +1330,7 @@
           <a:p>
             <a:fld id="{F7021451-1387-4CA6-816F-3879F97B5CBC}" type="slidenum">
               <a:rPr lang="en-US"/>
-              <a:t>20</a:t>
+              <a:t>21</a:t>
             </a:fld>
             <a:endParaRPr lang="en-US"/>
           </a:p>
@@ -3384,7 +3385,7 @@
                 <a:ea typeface="Calibri" pitchFamily="34" charset="-122"/>
                 <a:cs typeface="Calibri" pitchFamily="34" charset="-120"/>
               </a:rPr>
-              <a:t>10 / 20</a:t>
+              <a:t>10 / 21</a:t>
             </a:r>
             <a:endParaRPr lang="en-US" sz="900" dirty="0"/>
           </a:p>
@@ -5848,7 +5849,7 @@
                 <a:ea typeface="Calibri" pitchFamily="34" charset="-122"/>
                 <a:cs typeface="Calibri" pitchFamily="34" charset="-120"/>
               </a:rPr>
-              <a:t>11 / 20</a:t>
+              <a:t>11 / 21</a:t>
             </a:r>
             <a:endParaRPr lang="en-US" sz="900" dirty="0"/>
           </a:p>
@@ -7487,7 +7488,7 @@
                 <a:ea typeface="Calibri" pitchFamily="34" charset="-122"/>
                 <a:cs typeface="Calibri" pitchFamily="34" charset="-120"/>
               </a:rPr>
-              <a:t>12 / 20</a:t>
+              <a:t>12 / 21</a:t>
             </a:r>
             <a:endParaRPr lang="en-US" sz="900" dirty="0"/>
           </a:p>
@@ -7520,7 +7521,7 @@
             <a:r>
               <a:rPr lang="en-US" sz="900" b="1" kern="0" spc="300" dirty="0">
                 <a:solidFill>
-                  <a:srgbClr val="64748B"/>
+                  <a:srgbClr val="14B8A6"/>
                 </a:solidFill>
                 <a:latin typeface="Calibri" pitchFamily="34" charset="0"/>
                 <a:ea typeface="Calibri" pitchFamily="34" charset="-122"/>
@@ -7528,7 +7529,11 @@
               </a:rPr>
               <a:t>INTERACTIVE ARTIFACTS</a:t>
             </a:r>
-            <a:endParaRPr lang="en-US" sz="900" dirty="0"/>
+            <a:endParaRPr lang="en-US" sz="900" dirty="0">
+              <a:solidFill>
+                <a:srgbClr val="14B8A6"/>
+              </a:solidFill>
+            </a:endParaRPr>
           </a:p>
         </p:txBody>
       </p:sp>
@@ -7699,7 +7704,7 @@
             <a:r>
               <a:rPr lang="en-US" sz="900" i="1" dirty="0">
                 <a:solidFill>
-                  <a:schemeClr val="bg1"/>
+                  <a:srgbClr val="14B8A6"/>
                 </a:solidFill>
                 <a:latin typeface="Calibri" pitchFamily="34" charset="0"/>
                 <a:ea typeface="Calibri" pitchFamily="34" charset="-122"/>
@@ -7709,7 +7714,7 @@
             </a:r>
             <a:endParaRPr lang="en-US" sz="900" dirty="0">
               <a:solidFill>
-                <a:schemeClr val="bg1"/>
+                <a:srgbClr val="14B8A6"/>
               </a:solidFill>
             </a:endParaRPr>
           </a:p>
@@ -7811,13 +7816,13 @@
             <a:avLst/>
           </a:prstGeom>
           <a:solidFill>
-            <a:schemeClr val="bg1">
+            <a:srgbClr val="14B8A6">
               <a:alpha val="18000"/>
-            </a:schemeClr>
+            </a:srgbClr>
           </a:solidFill>
           <a:ln w="9525">
             <a:solidFill>
-              <a:schemeClr val="bg1"/>
+              <a:srgbClr val="14B8A6"/>
             </a:solidFill>
             <a:prstDash val="solid"/>
           </a:ln>
@@ -7857,7 +7862,7 @@
             <a:r>
               <a:rPr lang="en-US" sz="800" b="1" dirty="0">
                 <a:solidFill>
-                  <a:schemeClr val="bg1"/>
+                  <a:srgbClr val="14B8A6"/>
                 </a:solidFill>
                 <a:latin typeface="Calibri" pitchFamily="34" charset="0"/>
                 <a:ea typeface="Calibri" pitchFamily="34" charset="-122"/>
@@ -7867,7 +7872,7 @@
             </a:r>
             <a:endParaRPr lang="en-US" sz="800" dirty="0">
               <a:solidFill>
-                <a:schemeClr val="bg1"/>
+                <a:srgbClr val="14B8A6"/>
               </a:solidFill>
             </a:endParaRPr>
           </a:p>
@@ -7962,7 +7967,7 @@
             <a:r>
               <a:rPr lang="en-US" sz="900" i="1" dirty="0">
                 <a:solidFill>
-                  <a:schemeClr val="bg1"/>
+                  <a:srgbClr val="14B8A6"/>
                 </a:solidFill>
                 <a:latin typeface="Calibri" pitchFamily="34" charset="0"/>
                 <a:ea typeface="Calibri" pitchFamily="34" charset="-122"/>
@@ -7972,7 +7977,7 @@
             </a:r>
             <a:endParaRPr lang="en-US" sz="900" dirty="0">
               <a:solidFill>
-                <a:schemeClr val="bg1"/>
+                <a:srgbClr val="14B8A6"/>
               </a:solidFill>
             </a:endParaRPr>
           </a:p>
@@ -8074,13 +8079,13 @@
             <a:avLst/>
           </a:prstGeom>
           <a:solidFill>
-            <a:schemeClr val="bg1">
+            <a:srgbClr val="14B8A6">
               <a:alpha val="18000"/>
-            </a:schemeClr>
+            </a:srgbClr>
           </a:solidFill>
           <a:ln w="9525">
             <a:solidFill>
-              <a:schemeClr val="bg1"/>
+              <a:srgbClr val="14B8A6"/>
             </a:solidFill>
             <a:prstDash val="solid"/>
           </a:ln>
@@ -8120,7 +8125,7 @@
             <a:r>
               <a:rPr lang="en-US" sz="800" b="1" dirty="0">
                 <a:solidFill>
-                  <a:schemeClr val="bg1"/>
+                  <a:srgbClr val="14B8A6"/>
                 </a:solidFill>
                 <a:latin typeface="Calibri" pitchFamily="34" charset="0"/>
                 <a:ea typeface="Calibri" pitchFamily="34" charset="-122"/>
@@ -8130,7 +8135,7 @@
             </a:r>
             <a:endParaRPr lang="en-US" sz="800" dirty="0">
               <a:solidFill>
-                <a:schemeClr val="bg1"/>
+                <a:srgbClr val="14B8A6"/>
               </a:solidFill>
             </a:endParaRPr>
           </a:p>
@@ -8225,7 +8230,7 @@
             <a:r>
               <a:rPr lang="en-US" sz="900" i="1" dirty="0">
                 <a:solidFill>
-                  <a:schemeClr val="bg1"/>
+                  <a:srgbClr val="14B8A6"/>
                 </a:solidFill>
                 <a:latin typeface="Calibri" pitchFamily="34" charset="0"/>
                 <a:ea typeface="Calibri" pitchFamily="34" charset="-122"/>
@@ -8235,7 +8240,7 @@
             </a:r>
             <a:endParaRPr lang="en-US" sz="900" dirty="0">
               <a:solidFill>
-                <a:schemeClr val="bg1"/>
+                <a:srgbClr val="14B8A6"/>
               </a:solidFill>
             </a:endParaRPr>
           </a:p>
@@ -8337,13 +8342,13 @@
             <a:avLst/>
           </a:prstGeom>
           <a:solidFill>
-            <a:schemeClr val="bg1">
+            <a:srgbClr val="14B8A6">
               <a:alpha val="18000"/>
-            </a:schemeClr>
+            </a:srgbClr>
           </a:solidFill>
           <a:ln w="9525">
             <a:solidFill>
-              <a:schemeClr val="bg1"/>
+              <a:srgbClr val="14B8A6"/>
             </a:solidFill>
             <a:prstDash val="solid"/>
           </a:ln>
@@ -8383,7 +8388,7 @@
             <a:r>
               <a:rPr lang="en-US" sz="800" b="1" dirty="0">
                 <a:solidFill>
-                  <a:schemeClr val="bg1"/>
+                  <a:srgbClr val="14B8A6"/>
                 </a:solidFill>
                 <a:latin typeface="Calibri" pitchFamily="34" charset="0"/>
                 <a:ea typeface="Calibri" pitchFamily="34" charset="-122"/>
@@ -8393,7 +8398,7 @@
             </a:r>
             <a:endParaRPr lang="en-US" sz="800" dirty="0">
               <a:solidFill>
-                <a:schemeClr val="bg1"/>
+                <a:srgbClr val="14B8A6"/>
               </a:solidFill>
             </a:endParaRPr>
           </a:p>
@@ -8488,7 +8493,7 @@
             <a:r>
               <a:rPr lang="en-US" sz="900" i="1" dirty="0">
                 <a:solidFill>
-                  <a:schemeClr val="bg1"/>
+                  <a:srgbClr val="14B8A6"/>
                 </a:solidFill>
                 <a:latin typeface="Calibri" pitchFamily="34" charset="0"/>
                 <a:ea typeface="Calibri" pitchFamily="34" charset="-122"/>
@@ -8498,7 +8503,7 @@
             </a:r>
             <a:endParaRPr lang="en-US" sz="900" dirty="0">
               <a:solidFill>
-                <a:schemeClr val="bg1"/>
+                <a:srgbClr val="14B8A6"/>
               </a:solidFill>
             </a:endParaRPr>
           </a:p>
@@ -8600,13 +8605,13 @@
             <a:avLst/>
           </a:prstGeom>
           <a:solidFill>
-            <a:schemeClr val="bg1">
+            <a:srgbClr val="14B8A6">
               <a:alpha val="18000"/>
-            </a:schemeClr>
+            </a:srgbClr>
           </a:solidFill>
           <a:ln w="9525">
             <a:solidFill>
-              <a:schemeClr val="bg1"/>
+              <a:srgbClr val="14B8A6"/>
             </a:solidFill>
             <a:prstDash val="solid"/>
           </a:ln>
@@ -8646,7 +8651,7 @@
             <a:r>
               <a:rPr lang="en-US" sz="800" b="1" dirty="0">
                 <a:solidFill>
-                  <a:schemeClr val="bg1"/>
+                  <a:srgbClr val="14B8A6"/>
                 </a:solidFill>
                 <a:latin typeface="Calibri" pitchFamily="34" charset="0"/>
                 <a:ea typeface="Calibri" pitchFamily="34" charset="-122"/>
@@ -8656,7 +8661,7 @@
             </a:r>
             <a:endParaRPr lang="en-US" sz="800" dirty="0">
               <a:solidFill>
-                <a:schemeClr val="bg1"/>
+                <a:srgbClr val="14B8A6"/>
               </a:solidFill>
             </a:endParaRPr>
           </a:p>
@@ -8726,7 +8731,7 @@
                 <a:ea typeface="Calibri" pitchFamily="34" charset="-122"/>
                 <a:cs typeface="Calibri" pitchFamily="34" charset="-120"/>
               </a:rPr>
-              <a:t>13 / 20</a:t>
+              <a:t>13 / 21</a:t>
             </a:r>
             <a:endParaRPr lang="en-US" sz="900" dirty="0"/>
           </a:p>
@@ -8897,6 +8902,824 @@
 
 <file path=ppt/slides/slide14.xml><?xml version="1.0" encoding="utf-8"?>
 <p:sld xmlns:a="http://schemas.openxmlformats.org/drawingml/2006/main" xmlns:r="http://schemas.openxmlformats.org/officeDocument/2006/relationships" xmlns:p="http://schemas.openxmlformats.org/presentationml/2006/main">
+  <p:cSld name="Kickoff Prompt">
+    <p:bg>
+      <p:bgPr>
+        <a:solidFill>
+          <a:srgbClr val="0F172A"/>
+        </a:solidFill>
+        <a:effectLst/>
+      </p:bgPr>
+    </p:bg>
+    <p:spTree>
+      <p:nvGrpSpPr>
+        <p:cNvPr id="1" name=""/>
+        <p:cNvGrpSpPr/>
+        <p:nvPr/>
+      </p:nvGrpSpPr>
+      <p:grpSpPr>
+        <a:xfrm>
+          <a:off x="0" y="0"/>
+          <a:ext cx="0" cy="0"/>
+          <a:chOff x="0" y="0"/>
+          <a:chExt cx="0" cy="0"/>
+        </a:xfrm>
+      </p:grpSpPr>
+      <p:sp>
+        <p:nvSpPr>
+          <p:cNvPr id="2" name="Text 0"/>
+          <p:cNvSpPr/>
+          <p:nvPr/>
+        </p:nvSpPr>
+        <p:spPr>
+          <a:xfrm>
+            <a:off x="11064240" y="6510528"/>
+            <a:ext cx="914400" cy="228600"/>
+          </a:xfrm>
+          <a:prstGeom prst="rect">
+            <a:avLst/>
+          </a:prstGeom>
+          <a:noFill/>
+          <a:ln/>
+        </p:spPr>
+        <p:txBody>
+          <a:bodyPr wrap="square" lIns="0" tIns="0" rIns="0" bIns="0" rtlCol="0" anchor="ctr"/>
+          <a:lstStyle/>
+          <a:p>
+            <a:pPr algn="r"/>
+            <a:r>
+              <a:rPr lang="en-US" sz="900" dirty="0">
+                <a:solidFill>
+                  <a:srgbClr val="64748B"/>
+                </a:solidFill>
+                <a:latin typeface="Calibri" pitchFamily="34" charset="0"/>
+              </a:rPr>
+              <a:t>14 / 21</a:t>
+            </a:r>
+            <a:endParaRPr lang="en-US" sz="900" dirty="0"/>
+          </a:p>
+        </p:txBody>
+      </p:sp>
+      <p:sp>
+        <p:nvSpPr>
+          <p:cNvPr id="3" name="Label"/>
+          <p:cNvSpPr/>
+          <p:nvPr/>
+        </p:nvSpPr>
+        <p:spPr>
+          <a:xfrm>
+            <a:off x="773720" y="384048"/>
+            <a:ext cx="9144000" cy="201168"/>
+          </a:xfrm>
+          <a:prstGeom prst="rect">
+            <a:avLst/>
+          </a:prstGeom>
+          <a:noFill/>
+          <a:ln/>
+        </p:spPr>
+        <p:txBody>
+          <a:bodyPr wrap="square" lIns="0" tIns="0" rIns="0" bIns="0" rtlCol="0" anchor="ctr"/>
+          <a:lstStyle/>
+          <a:p>
+            <a:pPr marL="0" indent="0">
+              <a:buNone/>
+            </a:pPr>
+            <a:r>
+              <a:rPr lang="en-US" sz="900" b="1" kern="0" spc="300" dirty="0">
+                <a:solidFill>
+                  <a:srgbClr val="14B8A6"/>
+                </a:solidFill>
+                <a:latin typeface="Calibri" pitchFamily="34" charset="0"/>
+              </a:rPr>
+              <a:t>START HERE</a:t>
+            </a:r>
+            <a:endParaRPr lang="en-US" sz="900" dirty="0"/>
+          </a:p>
+        </p:txBody>
+      </p:sp>
+      <p:sp>
+        <p:nvSpPr>
+          <p:cNvPr id="4" name="Headline"/>
+          <p:cNvSpPr/>
+          <p:nvPr/>
+        </p:nvSpPr>
+        <p:spPr>
+          <a:xfrm>
+            <a:off x="685800" y="594360"/>
+            <a:ext cx="5486400" cy="685800"/>
+          </a:xfrm>
+          <a:prstGeom prst="rect">
+            <a:avLst/>
+          </a:prstGeom>
+          <a:noFill/>
+          <a:ln/>
+        </p:spPr>
+        <p:txBody>
+          <a:bodyPr wrap="square" rtlCol="0" anchor="ctr"/>
+          <a:lstStyle/>
+          <a:p>
+            <a:pPr marL="0" indent="0">
+              <a:buNone/>
+            </a:pPr>
+            <a:r>
+              <a:rPr lang="en-US" sz="3600" b="1" dirty="0">
+                <a:solidFill>
+                  <a:srgbClr val="FFFFFF"/>
+                </a:solidFill>
+                <a:latin typeface="Calibri" pitchFamily="34" charset="0"/>
+              </a:rPr>
+              <a:t>The Kickoff Prompt</a:t>
+            </a:r>
+            <a:endParaRPr lang="en-US" sz="3600" dirty="0"/>
+          </a:p>
+        </p:txBody>
+      </p:sp>
+      <p:sp>
+        <p:nvSpPr>
+          <p:cNvPr id="5" name="Sub"/>
+          <p:cNvSpPr/>
+          <p:nvPr/>
+        </p:nvSpPr>
+        <p:spPr>
+          <a:xfrm>
+            <a:off x="685800" y="1222720"/>
+            <a:ext cx="10049608" cy="500000"/>
+          </a:xfrm>
+          <a:prstGeom prst="rect">
+            <a:avLst/>
+          </a:prstGeom>
+          <a:noFill/>
+          <a:ln/>
+        </p:spPr>
+        <p:txBody>
+          <a:bodyPr wrap="square" rtlCol="0" anchor="t"/>
+          <a:lstStyle/>
+          <a:p>
+            <a:pPr marL="0" indent="0">
+              <a:lnSpc>
+                <a:spcPct val="140000"/>
+              </a:lnSpc>
+              <a:buNone/>
+            </a:pPr>
+            <a:r>
+              <a:rPr lang="en-US" sz="1300" dirty="0">
+                <a:solidFill>
+                  <a:srgbClr val="94A3B8"/>
+                </a:solidFill>
+                <a:latin typeface="Calibri" pitchFamily="34" charset="0"/>
+              </a:rPr>
+              <a:t>Copy this block into Claude before uploading any skill file. Claude orients itself, asks four questions, and routes you to the right starting point.</a:t>
+            </a:r>
+            <a:endParaRPr lang="en-US" sz="1300" dirty="0"/>
+          </a:p>
+        </p:txBody>
+      </p:sp>
+      <p:sp>
+        <p:nvSpPr>
+          <p:cNvPr id="6" name="Questions"/>
+          <p:cNvSpPr/>
+          <p:nvPr/>
+        </p:nvSpPr>
+        <p:spPr>
+          <a:xfrm>
+            <a:off x="501168" y="1788360"/>
+            <a:ext cx="5486400" cy="4077181"/>
+          </a:xfrm>
+          <a:prstGeom prst="rect">
+            <a:avLst/>
+          </a:prstGeom>
+          <a:solidFill>
+            <a:srgbClr val="1E293B"/>
+          </a:solidFill>
+          <a:ln w="9525">
+            <a:solidFill>
+              <a:srgbClr val="334155"/>
+            </a:solidFill>
+            <a:prstDash val="solid"/>
+          </a:ln>
+          <a:effectLst/>
+        </p:spPr>
+        <p:txBody>
+          <a:bodyPr lIns="274638" tIns="274638" rIns="274638" bIns="274638" rtlCol="0" anchor="t"/>
+          <a:lstStyle/>
+          <a:p>
+            <a:pPr marL="0" indent="0">
+              <a:lnSpc>
+                <a:spcPct val="120000"/>
+              </a:lnSpc>
+              <a:buNone/>
+            </a:pPr>
+            <a:r>
+              <a:rPr lang="en-US" sz="800" b="1" kern="0" spc="200" dirty="0">
+                <a:solidFill>
+                  <a:srgbClr val="14B8A6"/>
+                </a:solidFill>
+                <a:latin typeface="Calibri" pitchFamily="34" charset="0"/>
+              </a:rPr>
+              <a:t>FOUR QUESTIONS CLAUDE WILL ASK</a:t>
+            </a:r>
+            <a:endParaRPr lang="en-US" sz="800" dirty="0"/>
+          </a:p>
+          <a:p>
+            <a:pPr marL="0" indent="0">
+              <a:buNone/>
+            </a:pPr>
+            <a:endParaRPr lang="en-US" sz="900" dirty="0"/>
+          </a:p>
+          <a:p>
+            <a:pPr marL="0" indent="0">
+              <a:lnSpc>
+                <a:spcPct val="130000"/>
+              </a:lnSpc>
+              <a:buNone/>
+            </a:pPr>
+            <a:r>
+              <a:rPr lang="en-US" sz="1100" b="1" dirty="0">
+                <a:solidFill>
+                  <a:srgbClr val="F8FAFC"/>
+                </a:solidFill>
+                <a:latin typeface="Calibri" pitchFamily="34" charset="0"/>
+              </a:rPr>
+              <a:t>01  What type of project is this?</a:t>
+            </a:r>
+            <a:endParaRPr lang="en-US" sz="1100" dirty="0"/>
+          </a:p>
+          <a:p>
+            <a:pPr marL="0" indent="0">
+              <a:lnSpc>
+                <a:spcPct val="130000"/>
+              </a:lnSpc>
+              <a:buNone/>
+            </a:pPr>
+            <a:r>
+              <a:rPr lang="en-US" sz="1000" dirty="0">
+                <a:solidFill>
+                  <a:srgbClr val="64748B"/>
+                </a:solidFill>
+                <a:latin typeface="Calibri" pitchFamily="34" charset="0"/>
+              </a:rPr>
+              <a:t>New product, feature, redesign, internal tool, client work</a:t>
+            </a:r>
+            <a:endParaRPr lang="en-US" sz="1000" dirty="0"/>
+          </a:p>
+          <a:p>
+            <a:pPr marL="0" indent="0">
+              <a:buNone/>
+            </a:pPr>
+            <a:endParaRPr lang="en-US" sz="900" dirty="0"/>
+          </a:p>
+          <a:p>
+            <a:pPr marL="0" indent="0">
+              <a:lnSpc>
+                <a:spcPct val="130000"/>
+              </a:lnSpc>
+              <a:buNone/>
+            </a:pPr>
+            <a:r>
+              <a:rPr lang="en-US" sz="1100" b="1" dirty="0">
+                <a:solidFill>
+                  <a:srgbClr val="F8FAFC"/>
+                </a:solidFill>
+                <a:latin typeface="Calibri" pitchFamily="34" charset="0"/>
+              </a:rPr>
+              <a:t>02  What phase are you entering?</a:t>
+            </a:r>
+            <a:endParaRPr lang="en-US" sz="1100" dirty="0"/>
+          </a:p>
+          <a:p>
+            <a:pPr marL="0" indent="0">
+              <a:lnSpc>
+                <a:spcPct val="130000"/>
+              </a:lnSpc>
+              <a:buNone/>
+            </a:pPr>
+            <a:r>
+              <a:rPr lang="en-US" sz="1000" dirty="0">
+                <a:solidFill>
+                  <a:srgbClr val="64748B"/>
+                </a:solidFill>
+                <a:latin typeface="Calibri" pitchFamily="34" charset="0"/>
+              </a:rPr>
+              <a:t>Discover / Define / Ideate / Prototype / Validate / Deliver</a:t>
+            </a:r>
+            <a:endParaRPr lang="en-US" sz="1000" dirty="0"/>
+          </a:p>
+          <a:p>
+            <a:pPr marL="0" indent="0">
+              <a:buNone/>
+            </a:pPr>
+            <a:endParaRPr lang="en-US" sz="900" dirty="0"/>
+          </a:p>
+          <a:p>
+            <a:pPr marL="0" indent="0">
+              <a:lnSpc>
+                <a:spcPct val="130000"/>
+              </a:lnSpc>
+              <a:buNone/>
+            </a:pPr>
+            <a:r>
+              <a:rPr lang="en-US" sz="1100" b="1" dirty="0">
+                <a:solidFill>
+                  <a:srgbClr val="F8FAFC"/>
+                </a:solidFill>
+                <a:latin typeface="Calibri" pitchFamily="34" charset="0"/>
+              </a:rPr>
+              <a:t>03  What do you have so far?</a:t>
+            </a:r>
+            <a:endParaRPr lang="en-US" sz="1100" dirty="0"/>
+          </a:p>
+          <a:p>
+            <a:pPr marL="0" indent="0">
+              <a:lnSpc>
+                <a:spcPct val="130000"/>
+              </a:lnSpc>
+              <a:buNone/>
+            </a:pPr>
+            <a:r>
+              <a:rPr lang="en-US" sz="1000" dirty="0">
+                <a:solidFill>
+                  <a:srgbClr val="64748B"/>
+                </a:solidFill>
+                <a:latin typeface="Calibri" pitchFamily="34" charset="0"/>
+              </a:rPr>
+              <a:t>Nothing yet / a brief / brief + research / existing designs</a:t>
+            </a:r>
+            <a:endParaRPr lang="en-US" sz="1000" dirty="0"/>
+          </a:p>
+          <a:p>
+            <a:pPr marL="0" indent="0">
+              <a:buNone/>
+            </a:pPr>
+            <a:endParaRPr lang="en-US" sz="900" dirty="0"/>
+          </a:p>
+          <a:p>
+            <a:pPr marL="0" indent="0">
+              <a:lnSpc>
+                <a:spcPct val="130000"/>
+              </a:lnSpc>
+              <a:buNone/>
+            </a:pPr>
+            <a:r>
+              <a:rPr lang="en-US" sz="1100" b="1" dirty="0">
+                <a:solidFill>
+                  <a:srgbClr val="F8FAFC"/>
+                </a:solidFill>
+                <a:latin typeface="Calibri" pitchFamily="34" charset="0"/>
+              </a:rPr>
+              <a:t>04  Are you working solo or with a team?</a:t>
+            </a:r>
+            <a:endParaRPr lang="en-US" sz="1100" dirty="0"/>
+          </a:p>
+          <a:p>
+            <a:pPr marL="0" indent="0">
+              <a:buNone/>
+            </a:pPr>
+            <a:endParaRPr lang="en-US" sz="900" dirty="0"/>
+          </a:p>
+          <a:p>
+            <a:pPr marL="0" indent="0">
+              <a:lnSpc>
+                <a:spcPct val="120000"/>
+              </a:lnSpc>
+              <a:buNone/>
+            </a:pPr>
+            <a:r>
+              <a:rPr lang="en-US" sz="800" b="1" kern="0" spc="200" dirty="0">
+                <a:solidFill>
+                  <a:srgbClr val="14B8A6"/>
+                </a:solidFill>
+                <a:latin typeface="Calibri" pitchFamily="34" charset="0"/>
+              </a:rPr>
+              <a:t>CLAUDE RESPONDS WITH</a:t>
+            </a:r>
+            <a:endParaRPr lang="en-US" sz="800" dirty="0"/>
+          </a:p>
+          <a:p>
+            <a:pPr marL="0" indent="0">
+              <a:buNone/>
+            </a:pPr>
+            <a:endParaRPr lang="en-US" sz="900" dirty="0"/>
+          </a:p>
+          <a:p>
+            <a:pPr marL="0" indent="0">
+              <a:lnSpc>
+                <a:spcPct val="140000"/>
+              </a:lnSpc>
+              <a:buNone/>
+            </a:pPr>
+            <a:r>
+              <a:rPr lang="en-US" sz="1000" dirty="0">
+                <a:solidFill>
+                  <a:srgbClr val="94A3B8"/>
+                </a:solidFill>
+                <a:latin typeface="Calibri" pitchFamily="34" charset="0"/>
+              </a:rPr>
+              <a:t>→  Recommended starting phase + reason why</a:t>
+            </a:r>
+            <a:endParaRPr lang="en-US" sz="1000" dirty="0"/>
+          </a:p>
+          <a:p>
+            <a:pPr marL="0" indent="0">
+              <a:lnSpc>
+                <a:spcPct val="140000"/>
+              </a:lnSpc>
+              <a:buNone/>
+            </a:pPr>
+            <a:r>
+              <a:rPr lang="en-US" sz="1000" dirty="0">
+                <a:solidFill>
+                  <a:srgbClr val="94A3B8"/>
+                </a:solidFill>
+                <a:latin typeface="Calibri" pitchFamily="34" charset="0"/>
+              </a:rPr>
+              <a:t>→  The exact skill file to upload next</a:t>
+            </a:r>
+            <a:endParaRPr lang="en-US" sz="1000" dirty="0"/>
+          </a:p>
+          <a:p>
+            <a:pPr marL="0" indent="0">
+              <a:lnSpc>
+                <a:spcPct val="140000"/>
+              </a:lnSpc>
+              <a:buNone/>
+            </a:pPr>
+            <a:r>
+              <a:rPr lang="en-US" sz="1000" dirty="0">
+                <a:solidFill>
+                  <a:srgbClr val="94A3B8"/>
+                </a:solidFill>
+                <a:latin typeface="Calibri" pitchFamily="34" charset="0"/>
+              </a:rPr>
+              <a:t>→  A specific first deliverable</a:t>
+            </a:r>
+            <a:endParaRPr lang="en-US" sz="1000" dirty="0"/>
+          </a:p>
+          <a:p>
+            <a:pPr marL="0" indent="0">
+              <a:lnSpc>
+                <a:spcPct val="140000"/>
+              </a:lnSpc>
+              <a:buNone/>
+            </a:pPr>
+            <a:r>
+              <a:rPr lang="en-US" sz="1000" dirty="0">
+                <a:solidFill>
+                  <a:srgbClr val="94A3B8"/>
+                </a:solidFill>
+                <a:latin typeface="Calibri" pitchFamily="34" charset="0"/>
+              </a:rPr>
+              <a:t>→  One prompt you can use right now</a:t>
+            </a:r>
+            <a:endParaRPr lang="en-US" sz="1000" dirty="0"/>
+          </a:p>
+        </p:txBody>
+      </p:sp>
+      <p:sp>
+        <p:nvSpPr>
+          <p:cNvPr id="7" name="CodeBlock"/>
+          <p:cNvSpPr/>
+          <p:nvPr/>
+        </p:nvSpPr>
+        <p:spPr>
+          <a:xfrm>
+            <a:off x="6216168" y="1788360"/>
+            <a:ext cx="5486400" cy="4077181"/>
+          </a:xfrm>
+          <a:prstGeom prst="rect">
+            <a:avLst/>
+          </a:prstGeom>
+          <a:solidFill>
+            <a:srgbClr val="1E293B"/>
+          </a:solidFill>
+          <a:ln w="9525">
+            <a:solidFill>
+              <a:srgbClr val="334155"/>
+            </a:solidFill>
+            <a:prstDash val="solid"/>
+          </a:ln>
+          <a:effectLst/>
+        </p:spPr>
+        <p:txBody>
+          <a:bodyPr lIns="274638" tIns="274638" rIns="274638" bIns="274638" rtlCol="0" anchor="t"/>
+          <a:lstStyle/>
+          <a:p>
+            <a:pPr marL="0" indent="0">
+              <a:lnSpc>
+                <a:spcPct val="120000"/>
+              </a:lnSpc>
+              <a:buNone/>
+            </a:pPr>
+            <a:r>
+              <a:rPr lang="en-US" sz="800" b="1" kern="0" spc="200" dirty="0">
+                <a:solidFill>
+                  <a:srgbClr val="14B8A6"/>
+                </a:solidFill>
+                <a:latin typeface="Courier New" pitchFamily="49" charset="0"/>
+              </a:rPr>
+              <a:t>KICKOFF PROMPT  —  COPY &amp; PASTE INTO CLAUDE</a:t>
+            </a:r>
+            <a:endParaRPr lang="en-US" sz="800" dirty="0"/>
+          </a:p>
+          <a:p>
+            <a:pPr marL="0" indent="0">
+              <a:buNone/>
+            </a:pPr>
+            <a:endParaRPr lang="en-US" sz="900" dirty="0"/>
+          </a:p>
+          <a:p>
+            <a:pPr marL="0" indent="0">
+              <a:lnSpc>
+                <a:spcPct val="140000"/>
+              </a:lnSpc>
+              <a:buNone/>
+            </a:pPr>
+            <a:r>
+              <a:rPr lang="en-US" sz="900" dirty="0">
+                <a:solidFill>
+                  <a:srgbClr val="94A3B8"/>
+                </a:solidFill>
+                <a:latin typeface="Courier New" pitchFamily="49" charset="0"/>
+              </a:rPr>
+              <a:t>You are a UX design assistant trained on</a:t>
+            </a:r>
+            <a:endParaRPr lang="en-US" sz="900" dirty="0"/>
+          </a:p>
+          <a:p>
+            <a:pPr marL="0" indent="0">
+              <a:lnSpc>
+                <a:spcPct val="140000"/>
+              </a:lnSpc>
+              <a:buNone/>
+            </a:pPr>
+            <a:r>
+              <a:rPr lang="en-US" sz="900" dirty="0">
+                <a:solidFill>
+                  <a:srgbClr val="94A3B8"/>
+                </a:solidFill>
+                <a:latin typeface="Courier New" pitchFamily="49" charset="0"/>
+              </a:rPr>
+              <a:t>the AI x UX Product Design Framework</a:t>
+            </a:r>
+            <a:endParaRPr lang="en-US" sz="900" dirty="0"/>
+          </a:p>
+          <a:p>
+            <a:pPr marL="0" indent="0">
+              <a:lnSpc>
+                <a:spcPct val="140000"/>
+              </a:lnSpc>
+              <a:buNone/>
+            </a:pPr>
+            <a:r>
+              <a:rPr lang="en-US" sz="900" dirty="0">
+                <a:solidFill>
+                  <a:srgbClr val="94A3B8"/>
+                </a:solidFill>
+                <a:latin typeface="Courier New" pitchFamily="49" charset="0"/>
+              </a:rPr>
+              <a:t>— a six-phase system (Discover to Deliver)</a:t>
+            </a:r>
+            <a:endParaRPr lang="en-US" sz="900" dirty="0"/>
+          </a:p>
+          <a:p>
+            <a:pPr marL="0" indent="0">
+              <a:lnSpc>
+                <a:spcPct val="140000"/>
+              </a:lnSpc>
+              <a:buNone/>
+            </a:pPr>
+            <a:r>
+              <a:rPr lang="en-US" sz="900" dirty="0">
+                <a:solidFill>
+                  <a:srgbClr val="94A3B8"/>
+                </a:solidFill>
+                <a:latin typeface="Courier New" pitchFamily="49" charset="0"/>
+              </a:rPr>
+              <a:t>with skill files, Figma templates, and</a:t>
+            </a:r>
+            <a:endParaRPr lang="en-US" sz="900" dirty="0"/>
+          </a:p>
+          <a:p>
+            <a:pPr marL="0" indent="0">
+              <a:lnSpc>
+                <a:spcPct val="140000"/>
+              </a:lnSpc>
+              <a:buNone/>
+            </a:pPr>
+            <a:r>
+              <a:rPr lang="en-US" sz="900" dirty="0">
+                <a:solidFill>
+                  <a:srgbClr val="94A3B8"/>
+                </a:solidFill>
+                <a:latin typeface="Courier New" pitchFamily="49" charset="0"/>
+              </a:rPr>
+              <a:t>AI prompts for each phase.</a:t>
+            </a:r>
+            <a:endParaRPr lang="en-US" sz="900" dirty="0"/>
+          </a:p>
+          <a:p>
+            <a:pPr marL="0" indent="0">
+              <a:buNone/>
+            </a:pPr>
+            <a:endParaRPr lang="en-US" sz="900" dirty="0"/>
+          </a:p>
+          <a:p>
+            <a:pPr marL="0" indent="0">
+              <a:lnSpc>
+                <a:spcPct val="140000"/>
+              </a:lnSpc>
+              <a:buNone/>
+            </a:pPr>
+            <a:r>
+              <a:rPr lang="en-US" sz="900" dirty="0">
+                <a:solidFill>
+                  <a:srgbClr val="94A3B8"/>
+                </a:solidFill>
+                <a:latin typeface="Courier New" pitchFamily="49" charset="0"/>
+              </a:rPr>
+              <a:t>Ask me these four questions, then respond</a:t>
+            </a:r>
+            <a:endParaRPr lang="en-US" sz="900" dirty="0"/>
+          </a:p>
+          <a:p>
+            <a:pPr marL="0" indent="0">
+              <a:lnSpc>
+                <a:spcPct val="140000"/>
+              </a:lnSpc>
+              <a:buNone/>
+            </a:pPr>
+            <a:r>
+              <a:rPr lang="en-US" sz="900" dirty="0">
+                <a:solidFill>
+                  <a:srgbClr val="94A3B8"/>
+                </a:solidFill>
+                <a:latin typeface="Courier New" pitchFamily="49" charset="0"/>
+              </a:rPr>
+              <a:t>with: starting phase + reason, the exact</a:t>
+            </a:r>
+            <a:endParaRPr lang="en-US" sz="900" dirty="0"/>
+          </a:p>
+          <a:p>
+            <a:pPr marL="0" indent="0">
+              <a:lnSpc>
+                <a:spcPct val="140000"/>
+              </a:lnSpc>
+              <a:buNone/>
+            </a:pPr>
+            <a:r>
+              <a:rPr lang="en-US" sz="900" dirty="0">
+                <a:solidFill>
+                  <a:srgbClr val="94A3B8"/>
+                </a:solidFill>
+                <a:latin typeface="Courier New" pitchFamily="49" charset="0"/>
+              </a:rPr>
+              <a:t>skill file to upload, a specific first</a:t>
+            </a:r>
+            <a:endParaRPr lang="en-US" sz="900" dirty="0"/>
+          </a:p>
+          <a:p>
+            <a:pPr marL="0" indent="0">
+              <a:lnSpc>
+                <a:spcPct val="140000"/>
+              </a:lnSpc>
+              <a:buNone/>
+            </a:pPr>
+            <a:r>
+              <a:rPr lang="en-US" sz="900" dirty="0">
+                <a:solidFill>
+                  <a:srgbClr val="94A3B8"/>
+                </a:solidFill>
+                <a:latin typeface="Courier New" pitchFamily="49" charset="0"/>
+              </a:rPr>
+              <a:t>deliverable, and one prompt to use now.</a:t>
+            </a:r>
+            <a:endParaRPr lang="en-US" sz="900" dirty="0"/>
+          </a:p>
+          <a:p>
+            <a:pPr marL="0" indent="0">
+              <a:buNone/>
+            </a:pPr>
+            <a:endParaRPr lang="en-US" sz="900" dirty="0"/>
+          </a:p>
+          <a:p>
+            <a:pPr marL="0" indent="0">
+              <a:lnSpc>
+                <a:spcPct val="140000"/>
+              </a:lnSpc>
+              <a:buNone/>
+            </a:pPr>
+            <a:r>
+              <a:rPr lang="en-US" sz="900" dirty="0">
+                <a:solidFill>
+                  <a:srgbClr val="64748B"/>
+                </a:solidFill>
+                <a:latin typeface="Courier New" pitchFamily="49" charset="0"/>
+              </a:rPr>
+              <a:t>Full prompt in README.md (Quick Start)</a:t>
+            </a:r>
+            <a:endParaRPr lang="en-US" sz="900" dirty="0"/>
+          </a:p>
+          <a:p>
+            <a:pPr marL="0" indent="0">
+              <a:lnSpc>
+                <a:spcPct val="140000"/>
+              </a:lnSpc>
+              <a:buNone/>
+            </a:pPr>
+            <a:r>
+              <a:rPr lang="en-US" sz="900" dirty="0">
+                <a:solidFill>
+                  <a:srgbClr val="64748B"/>
+                </a:solidFill>
+                <a:latin typeface="Courier New" pitchFamily="49" charset="0"/>
+              </a:rPr>
+              <a:t>or Figma template → AI Toolkit page</a:t>
+            </a:r>
+            <a:endParaRPr lang="en-US" sz="900" dirty="0"/>
+          </a:p>
+        </p:txBody>
+      </p:sp>
+      <p:sp>
+        <p:nvSpPr>
+          <p:cNvPr id="8" name="Shape 5">
+            <a:extLst>
+              <a:ext uri="{FF2B5EF4-FFF2-40B4-BE49-F238E27FC236}">
+                <a16:creationId xmlns:a16="http://schemas.microsoft.com/office/drawing/2014/main" id="{4D73D590-D1A5-6400-5706-D5EBEAB0EC61}"/>
+              </a:ext>
+            </a:extLst>
+          </p:cNvPr>
+          <p:cNvSpPr/>
+          <p:nvPr/>
+        </p:nvSpPr>
+        <p:spPr>
+          <a:xfrm>
+            <a:off x="501166" y="1794789"/>
+            <a:ext cx="54864" cy="4077181"/>
+          </a:xfrm>
+          <a:prstGeom prst="rect">
+            <a:avLst/>
+          </a:prstGeom>
+          <a:solidFill>
+            <a:srgbClr val="334155"/>
+          </a:solidFill>
+          <a:ln w="12700">
+            <a:noFill/>
+            <a:prstDash val="solid"/>
+          </a:ln>
+        </p:spPr>
+        <p:txBody>
+          <a:bodyPr/>
+          <a:lstStyle/>
+          <a:p>
+            <a:endParaRPr lang="en-US"/>
+          </a:p>
+        </p:txBody>
+      </p:sp>
+      <p:sp>
+        <p:nvSpPr>
+          <p:cNvPr id="9" name="Shape 5">
+            <a:extLst>
+              <a:ext uri="{FF2B5EF4-FFF2-40B4-BE49-F238E27FC236}">
+                <a16:creationId xmlns:a16="http://schemas.microsoft.com/office/drawing/2014/main" id="{2E74DFE6-1509-F68A-CF3C-D18F8634E07B}"/>
+              </a:ext>
+            </a:extLst>
+          </p:cNvPr>
+          <p:cNvSpPr/>
+          <p:nvPr/>
+        </p:nvSpPr>
+        <p:spPr>
+          <a:xfrm>
+            <a:off x="6204433" y="1788360"/>
+            <a:ext cx="54864" cy="4077181"/>
+          </a:xfrm>
+          <a:prstGeom prst="rect">
+            <a:avLst/>
+          </a:prstGeom>
+          <a:solidFill>
+            <a:srgbClr val="334155"/>
+          </a:solidFill>
+          <a:ln w="12700">
+            <a:noFill/>
+            <a:prstDash val="solid"/>
+          </a:ln>
+        </p:spPr>
+        <p:txBody>
+          <a:bodyPr/>
+          <a:lstStyle/>
+          <a:p>
+            <a:endParaRPr lang="en-US"/>
+          </a:p>
+        </p:txBody>
+      </p:sp>
+    </p:spTree>
+  </p:cSld>
+  <p:clrMapOvr>
+    <a:masterClrMapping/>
+  </p:clrMapOvr>
+</p:sld>
+</file>
+
+<file path=ppt/slides/slide15.xml><?xml version="1.0" encoding="utf-8"?>
+<p:sld xmlns:a="http://schemas.openxmlformats.org/drawingml/2006/main" xmlns:r="http://schemas.openxmlformats.org/officeDocument/2006/relationships" xmlns:p="http://schemas.openxmlformats.org/presentationml/2006/main">
   <p:cSld name="Slide 11">
     <p:bg>
       <p:bgPr>
@@ -8951,7 +9774,7 @@
                 <a:ea typeface="Calibri" pitchFamily="34" charset="-122"/>
                 <a:cs typeface="Calibri" pitchFamily="34" charset="-120"/>
               </a:rPr>
-              <a:t>14 / 20</a:t>
+              <a:t>15 / 21</a:t>
             </a:r>
             <a:endParaRPr lang="en-US" sz="900" dirty="0"/>
           </a:p>
@@ -9213,7 +10036,7 @@
                 <a:ea typeface="Calibri" pitchFamily="34" charset="-122"/>
                 <a:cs typeface="Calibri" pitchFamily="34" charset="-120"/>
               </a:rPr>
-              <a:t>Create a Claude Project</a:t>
+              <a:t>Paste the Kickoff Prompt</a:t>
             </a:r>
             <a:endParaRPr lang="en-US" sz="1500" dirty="0"/>
           </a:p>
@@ -9255,7 +10078,7 @@
                 <a:ea typeface="Calibri" pitchFamily="34" charset="-122"/>
                 <a:cs typeface="Calibri" pitchFamily="34" charset="-120"/>
               </a:rPr>
-              <a:t>Set up a dedicated Project in Claude.ai. This gives Claude persistent context across all your sessions.</a:t>
+              <a:t>Copy the Kickoff Prompt from the README or Figma AI Toolkit page and paste it into a new Claude conversation. No skill file needed yet.</a:t>
             </a:r>
             <a:endParaRPr lang="en-US" sz="1200" dirty="0"/>
           </a:p>
@@ -9400,7 +10223,7 @@
                 <a:ea typeface="Calibri" pitchFamily="34" charset="-122"/>
                 <a:cs typeface="Calibri" pitchFamily="34" charset="-120"/>
               </a:rPr>
-              <a:t>Upload the skill files</a:t>
+              <a:t>Create a Claude Project</a:t>
             </a:r>
             <a:endParaRPr lang="en-US" sz="1500" dirty="0"/>
           </a:p>
@@ -9442,7 +10265,7 @@
                 <a:ea typeface="Calibri" pitchFamily="34" charset="-122"/>
                 <a:cs typeface="Calibri" pitchFamily="34" charset="-120"/>
               </a:rPr>
-              <a:t>Add phase skill files (user-research.md, problem-framing.md, etc.) to your Project knowledge base.</a:t>
+              <a:t>Set up a dedicated Project in Claude.ai and upload the skill file Claude recommended. This gives Claude persistent context across all your sessions.</a:t>
             </a:r>
             <a:endParaRPr lang="en-US" sz="1200" dirty="0"/>
           </a:p>
@@ -9587,7 +10410,7 @@
                 <a:ea typeface="Calibri" pitchFamily="34" charset="-122"/>
                 <a:cs typeface="Calibri" pitchFamily="34" charset="-120"/>
               </a:rPr>
-              <a:t>Describe your project context</a:t>
+              <a:t>Add your project context</a:t>
             </a:r>
             <a:endParaRPr lang="en-US" sz="1500" dirty="0"/>
           </a:p>
@@ -9629,7 +10452,7 @@
                 <a:ea typeface="Calibri" pitchFamily="34" charset="-122"/>
                 <a:cs typeface="Calibri" pitchFamily="34" charset="-120"/>
               </a:rPr>
-              <a:t>Tell Claude what you're building, who it's for, and which phase you're in. More context = better output.</a:t>
+              <a:t>Tell Claude what you're building, who it's for, and any constraints. Pin this as a Project instruction so Claude stays informed across every session.</a:t>
             </a:r>
             <a:endParaRPr lang="en-US" sz="1200" dirty="0"/>
           </a:p>
@@ -9830,7 +10653,7 @@
 </p:sld>
 </file>
 
-<file path=ppt/slides/slide15.xml><?xml version="1.0" encoding="utf-8"?>
+<file path=ppt/slides/slide16.xml><?xml version="1.0" encoding="utf-8"?>
 <p:sld xmlns:a="http://schemas.openxmlformats.org/drawingml/2006/main" xmlns:r="http://schemas.openxmlformats.org/officeDocument/2006/relationships" xmlns:p="http://schemas.openxmlformats.org/presentationml/2006/main">
   <p:cSld name="Slide 12">
     <p:bg>
@@ -9886,7 +10709,7 @@
                 <a:ea typeface="Calibri" pitchFamily="34" charset="-122"/>
                 <a:cs typeface="Calibri" pitchFamily="34" charset="-120"/>
               </a:rPr>
-              <a:t>15 / 20</a:t>
+              <a:t>16 / 21</a:t>
             </a:r>
             <a:endParaRPr lang="en-US" sz="900" dirty="0"/>
           </a:p>
@@ -11595,7 +12418,7 @@
 </p:sld>
 </file>
 
-<file path=ppt/slides/slide16.xml><?xml version="1.0" encoding="utf-8"?>
+<file path=ppt/slides/slide17.xml><?xml version="1.0" encoding="utf-8"?>
 <p:sld xmlns:a="http://schemas.openxmlformats.org/drawingml/2006/main" xmlns:r="http://schemas.openxmlformats.org/officeDocument/2006/relationships" xmlns:p="http://schemas.openxmlformats.org/presentationml/2006/main">
   <p:cSld name="Slide 13">
     <p:bg>
@@ -11651,7 +12474,7 @@
                 <a:ea typeface="Calibri" pitchFamily="34" charset="-122"/>
                 <a:cs typeface="Calibri" pitchFamily="34" charset="-120"/>
               </a:rPr>
-              <a:t>16 / 20</a:t>
+              <a:t>17 / 21</a:t>
             </a:r>
             <a:endParaRPr lang="en-US" sz="900" dirty="0"/>
           </a:p>
@@ -11789,13 +12612,13 @@
             <a:avLst/>
           </a:prstGeom>
           <a:solidFill>
-            <a:schemeClr val="bg1">
+            <a:srgbClr val="14B8A6">
               <a:alpha val="30000"/>
-            </a:schemeClr>
+            </a:srgbClr>
           </a:solidFill>
           <a:ln w="12700">
             <a:solidFill>
-              <a:schemeClr val="bg1"/>
+              <a:srgbClr val="14B8A6"/>
             </a:solidFill>
             <a:prstDash val="solid"/>
           </a:ln>
@@ -11970,13 +12793,13 @@
             <a:avLst/>
           </a:prstGeom>
           <a:solidFill>
-            <a:srgbClr val="F8FAFC">
+            <a:srgbClr val="14B8A6">
               <a:alpha val="30000"/>
             </a:srgbClr>
           </a:solidFill>
           <a:ln w="12700">
             <a:solidFill>
-              <a:schemeClr val="bg1"/>
+              <a:srgbClr val="14B8A6"/>
             </a:solidFill>
             <a:prstDash val="solid"/>
           </a:ln>
@@ -12151,13 +12974,13 @@
             <a:avLst/>
           </a:prstGeom>
           <a:solidFill>
-            <a:schemeClr val="bg1">
+            <a:srgbClr val="14B8A6">
               <a:alpha val="30000"/>
-            </a:schemeClr>
+            </a:srgbClr>
           </a:solidFill>
           <a:ln w="12700">
             <a:solidFill>
-              <a:schemeClr val="bg1"/>
+              <a:srgbClr val="14B8A6"/>
             </a:solidFill>
             <a:prstDash val="solid"/>
           </a:ln>
@@ -12334,13 +13157,13 @@
             <a:avLst/>
           </a:prstGeom>
           <a:solidFill>
-            <a:srgbClr val="F8FAFC">
+            <a:srgbClr val="14B8A6">
               <a:alpha val="30000"/>
             </a:srgbClr>
           </a:solidFill>
           <a:ln w="12700">
             <a:solidFill>
-              <a:schemeClr val="bg1"/>
+              <a:srgbClr val="14B8A6"/>
             </a:solidFill>
             <a:prstDash val="solid"/>
           </a:ln>
@@ -12515,13 +13338,13 @@
             <a:avLst/>
           </a:prstGeom>
           <a:solidFill>
-            <a:srgbClr val="F8FAFC">
+            <a:srgbClr val="14B8A6">
               <a:alpha val="30000"/>
             </a:srgbClr>
           </a:solidFill>
           <a:ln w="12700">
             <a:solidFill>
-              <a:schemeClr val="bg1"/>
+              <a:srgbClr val="14B8A6"/>
             </a:solidFill>
             <a:prstDash val="solid"/>
           </a:ln>
@@ -12696,13 +13519,13 @@
             <a:avLst/>
           </a:prstGeom>
           <a:solidFill>
-            <a:srgbClr val="F8FAFC">
+            <a:srgbClr val="14B8A6">
               <a:alpha val="30000"/>
             </a:srgbClr>
           </a:solidFill>
           <a:ln w="12700">
             <a:solidFill>
-              <a:schemeClr val="bg1"/>
+              <a:srgbClr val="14B8A6"/>
             </a:solidFill>
             <a:prstDash val="solid"/>
           </a:ln>
@@ -12921,7 +13744,7 @@
             <a:r>
               <a:rPr lang="en-US" sz="1000" b="1" kern="0" spc="200" dirty="0">
                 <a:solidFill>
-                  <a:schemeClr val="bg1"/>
+                  <a:srgbClr val="14B8A6"/>
                 </a:solidFill>
                 <a:latin typeface="Calibri" pitchFamily="34" charset="0"/>
                 <a:ea typeface="Calibri" pitchFamily="34" charset="-122"/>
@@ -12931,7 +13754,7 @@
             </a:r>
             <a:endParaRPr lang="en-US" sz="1000" dirty="0">
               <a:solidFill>
-                <a:schemeClr val="bg1"/>
+                <a:srgbClr val="14B8A6"/>
               </a:solidFill>
             </a:endParaRPr>
           </a:p>
@@ -13069,7 +13892,7 @@
 </p:sld>
 </file>
 
-<file path=ppt/slides/slide17.xml><?xml version="1.0" encoding="utf-8"?>
+<file path=ppt/slides/slide18.xml><?xml version="1.0" encoding="utf-8"?>
 <p:sld xmlns:a="http://schemas.openxmlformats.org/drawingml/2006/main" xmlns:r="http://schemas.openxmlformats.org/officeDocument/2006/relationships" xmlns:p="http://schemas.openxmlformats.org/presentationml/2006/main">
   <p:cSld name="Slide 15">
     <p:bg>
@@ -13125,7 +13948,7 @@
                 <a:ea typeface="Calibri" pitchFamily="34" charset="-122"/>
                 <a:cs typeface="Calibri" pitchFamily="34" charset="-120"/>
               </a:rPr>
-              <a:t>17 / 20</a:t>
+              <a:t>18 / 21</a:t>
             </a:r>
             <a:endParaRPr lang="en-US" sz="900" dirty="0"/>
           </a:p>
@@ -14378,7 +15201,7 @@
 </p:sld>
 </file>
 
-<file path=ppt/slides/slide18.xml><?xml version="1.0" encoding="utf-8"?>
+<file path=ppt/slides/slide19.xml><?xml version="1.0" encoding="utf-8"?>
 <p:sld xmlns:a="http://schemas.openxmlformats.org/drawingml/2006/main" xmlns:r="http://schemas.openxmlformats.org/officeDocument/2006/relationships" xmlns:p="http://schemas.openxmlformats.org/presentationml/2006/main">
   <p:cSld name="Slide 16">
     <p:bg>
@@ -14436,7 +15259,7 @@
                 <a:ea typeface="Calibri" pitchFamily="34" charset="-122"/>
                 <a:cs typeface="Calibri" pitchFamily="34" charset="-120"/>
               </a:rPr>
-              <a:t>18 / 20</a:t>
+              <a:t>19 / 21</a:t>
             </a:r>
             <a:endParaRPr lang="en-US" sz="900" dirty="0"/>
           </a:p>
@@ -15351,2702 +16174,6 @@
               <a:t>Match frontmatter format: name, phase, description, ai_leverage</a:t>
             </a:r>
             <a:endParaRPr lang="en-US" sz="1200" dirty="0"/>
-          </a:p>
-        </p:txBody>
-      </p:sp>
-    </p:spTree>
-  </p:cSld>
-  <p:clrMapOvr>
-    <a:masterClrMapping/>
-  </p:clrMapOvr>
-</p:sld>
-</file>
-
-<file path=ppt/slides/slide19.xml><?xml version="1.0" encoding="utf-8"?>
-<p:sld xmlns:a="http://schemas.openxmlformats.org/drawingml/2006/main" xmlns:r="http://schemas.openxmlformats.org/officeDocument/2006/relationships" xmlns:p="http://schemas.openxmlformats.org/presentationml/2006/main">
-  <p:cSld name="Slide 17">
-    <p:bg>
-      <p:bgPr>
-        <a:solidFill>
-          <a:srgbClr val="F8FAFC"/>
-        </a:solidFill>
-        <a:effectLst/>
-      </p:bgPr>
-    </p:bg>
-    <p:spTree>
-      <p:nvGrpSpPr>
-        <p:cNvPr id="1" name=""/>
-        <p:cNvGrpSpPr/>
-        <p:nvPr/>
-      </p:nvGrpSpPr>
-      <p:grpSpPr>
-        <a:xfrm>
-          <a:off x="0" y="0"/>
-          <a:ext cx="0" cy="0"/>
-          <a:chOff x="0" y="0"/>
-          <a:chExt cx="0" cy="0"/>
-        </a:xfrm>
-      </p:grpSpPr>
-      <p:sp>
-        <p:nvSpPr>
-          <p:cNvPr id="2" name="Text 0"/>
-          <p:cNvSpPr/>
-          <p:nvPr/>
-        </p:nvSpPr>
-        <p:spPr>
-          <a:xfrm>
-            <a:off x="11064240" y="6510528"/>
-            <a:ext cx="914400" cy="228600"/>
-          </a:xfrm>
-          <a:prstGeom prst="rect">
-            <a:avLst/>
-          </a:prstGeom>
-          <a:noFill/>
-          <a:ln/>
-        </p:spPr>
-        <p:txBody>
-          <a:bodyPr wrap="square" lIns="0" tIns="0" rIns="0" bIns="0" rtlCol="0" anchor="ctr"/>
-          <a:lstStyle/>
-          <a:p>
-            <a:pPr marL="0" indent="0" algn="r">
-              <a:buNone/>
-            </a:pPr>
-            <a:r>
-              <a:rPr lang="en-US" sz="900" dirty="0">
-                <a:solidFill>
-                  <a:srgbClr val="64748B"/>
-                </a:solidFill>
-                <a:latin typeface="Calibri" pitchFamily="34" charset="0"/>
-                <a:ea typeface="Calibri" pitchFamily="34" charset="-122"/>
-                <a:cs typeface="Calibri" pitchFamily="34" charset="-120"/>
-              </a:rPr>
-              <a:t>19 / 20</a:t>
-            </a:r>
-            <a:endParaRPr lang="en-US" sz="900" dirty="0"/>
-          </a:p>
-        </p:txBody>
-      </p:sp>
-      <p:sp>
-        <p:nvSpPr>
-          <p:cNvPr id="3" name="Text 1"/>
-          <p:cNvSpPr/>
-          <p:nvPr/>
-        </p:nvSpPr>
-        <p:spPr>
-          <a:xfrm>
-            <a:off x="752239" y="384048"/>
-            <a:ext cx="9144000" cy="201168"/>
-          </a:xfrm>
-          <a:prstGeom prst="rect">
-            <a:avLst/>
-          </a:prstGeom>
-          <a:noFill/>
-          <a:ln/>
-        </p:spPr>
-        <p:txBody>
-          <a:bodyPr wrap="square" lIns="0" tIns="0" rIns="0" bIns="0" rtlCol="0" anchor="ctr"/>
-          <a:lstStyle/>
-          <a:p>
-            <a:pPr marL="0" indent="0">
-              <a:buNone/>
-            </a:pPr>
-            <a:r>
-              <a:rPr lang="en-US" sz="900" b="1" kern="0" spc="300" dirty="0">
-                <a:solidFill>
-                  <a:srgbClr val="64748B"/>
-                </a:solidFill>
-                <a:latin typeface="Calibri" pitchFamily="34" charset="0"/>
-                <a:ea typeface="Calibri" pitchFamily="34" charset="-122"/>
-                <a:cs typeface="Calibri" pitchFamily="34" charset="-120"/>
-              </a:rPr>
-              <a:t>QUICK REFERENCE</a:t>
-            </a:r>
-            <a:endParaRPr lang="en-US" sz="900" dirty="0"/>
-          </a:p>
-        </p:txBody>
-      </p:sp>
-      <p:sp>
-        <p:nvSpPr>
-          <p:cNvPr id="4" name="Text 2"/>
-          <p:cNvSpPr/>
-          <p:nvPr/>
-        </p:nvSpPr>
-        <p:spPr>
-          <a:xfrm>
-            <a:off x="640080" y="594360"/>
-            <a:ext cx="9144000" cy="685800"/>
-          </a:xfrm>
-          <a:prstGeom prst="rect">
-            <a:avLst/>
-          </a:prstGeom>
-          <a:noFill/>
-          <a:ln/>
-        </p:spPr>
-        <p:txBody>
-          <a:bodyPr wrap="square" rtlCol="0" anchor="ctr"/>
-          <a:lstStyle/>
-          <a:p>
-            <a:pPr marL="0" indent="0">
-              <a:buNone/>
-            </a:pPr>
-            <a:r>
-              <a:rPr lang="en-US" sz="3200" b="1" dirty="0">
-                <a:solidFill>
-                  <a:srgbClr val="0F172A"/>
-                </a:solidFill>
-                <a:latin typeface="Calibri" pitchFamily="34" charset="0"/>
-                <a:ea typeface="Calibri" pitchFamily="34" charset="-122"/>
-                <a:cs typeface="Calibri" pitchFamily="34" charset="-120"/>
-              </a:rPr>
-              <a:t>Everything in one view</a:t>
-            </a:r>
-            <a:endParaRPr lang="en-US" sz="3200" dirty="0"/>
-          </a:p>
-        </p:txBody>
-      </p:sp>
-      <p:sp>
-        <p:nvSpPr>
-          <p:cNvPr id="5" name="Shape 3"/>
-          <p:cNvSpPr/>
-          <p:nvPr/>
-        </p:nvSpPr>
-        <p:spPr>
-          <a:xfrm>
-            <a:off x="454880" y="1371600"/>
-            <a:ext cx="5532120" cy="548640"/>
-          </a:xfrm>
-          <a:prstGeom prst="rect">
-            <a:avLst/>
-          </a:prstGeom>
-          <a:solidFill>
-            <a:srgbClr val="FFFFFF"/>
-          </a:solidFill>
-          <a:ln w="6350">
-            <a:solidFill>
-              <a:srgbClr val="E2E8F0"/>
-            </a:solidFill>
-            <a:prstDash val="solid"/>
-          </a:ln>
-        </p:spPr>
-        <p:txBody>
-          <a:bodyPr/>
-          <a:lstStyle/>
-          <a:p>
-            <a:endParaRPr lang="en-US"/>
-          </a:p>
-        </p:txBody>
-      </p:sp>
-      <p:sp>
-        <p:nvSpPr>
-          <p:cNvPr id="6" name="Shape 4"/>
-          <p:cNvSpPr/>
-          <p:nvPr/>
-        </p:nvSpPr>
-        <p:spPr>
-          <a:xfrm>
-            <a:off x="454880" y="1371600"/>
-            <a:ext cx="45720" cy="548640"/>
-          </a:xfrm>
-          <a:prstGeom prst="rect">
-            <a:avLst/>
-          </a:prstGeom>
-          <a:solidFill>
-            <a:schemeClr val="bg2"/>
-          </a:solidFill>
-          <a:ln w="12700">
-            <a:noFill/>
-            <a:prstDash val="solid"/>
-          </a:ln>
-        </p:spPr>
-        <p:txBody>
-          <a:bodyPr/>
-          <a:lstStyle/>
-          <a:p>
-            <a:endParaRPr lang="en-US"/>
-          </a:p>
-        </p:txBody>
-      </p:sp>
-      <p:sp>
-        <p:nvSpPr>
-          <p:cNvPr id="7" name="Text 5"/>
-          <p:cNvSpPr/>
-          <p:nvPr/>
-        </p:nvSpPr>
-        <p:spPr>
-          <a:xfrm>
-            <a:off x="592040" y="1426464"/>
-            <a:ext cx="1828800" cy="182880"/>
-          </a:xfrm>
-          <a:prstGeom prst="rect">
-            <a:avLst/>
-          </a:prstGeom>
-          <a:noFill/>
-          <a:ln/>
-        </p:spPr>
-        <p:txBody>
-          <a:bodyPr wrap="square" lIns="0" tIns="0" rIns="0" bIns="0" rtlCol="0" anchor="ctr"/>
-          <a:lstStyle/>
-          <a:p>
-            <a:pPr marL="0" indent="0">
-              <a:buNone/>
-            </a:pPr>
-            <a:r>
-              <a:rPr lang="en-US" sz="700" b="1" kern="0" spc="200" dirty="0">
-                <a:solidFill>
-                  <a:srgbClr val="8B5CF6"/>
-                </a:solidFill>
-                <a:latin typeface="Calibri" pitchFamily="34" charset="0"/>
-                <a:ea typeface="Calibri" pitchFamily="34" charset="-122"/>
-                <a:cs typeface="Calibri" pitchFamily="34" charset="-120"/>
-              </a:rPr>
-              <a:t>Figma File</a:t>
-            </a:r>
-            <a:endParaRPr lang="en-US" sz="700" dirty="0"/>
-          </a:p>
-        </p:txBody>
-      </p:sp>
-      <p:sp>
-        <p:nvSpPr>
-          <p:cNvPr id="8" name="Text 6"/>
-          <p:cNvSpPr/>
-          <p:nvPr/>
-        </p:nvSpPr>
-        <p:spPr>
-          <a:xfrm>
-            <a:off x="592040" y="1636776"/>
-            <a:ext cx="4114800" cy="219456"/>
-          </a:xfrm>
-          <a:prstGeom prst="rect">
-            <a:avLst/>
-          </a:prstGeom>
-          <a:noFill/>
-          <a:ln/>
-        </p:spPr>
-        <p:txBody>
-          <a:bodyPr wrap="square" lIns="0" tIns="0" rIns="0" bIns="0" rtlCol="0" anchor="ctr"/>
-          <a:lstStyle/>
-          <a:p>
-            <a:pPr marL="0" indent="0">
-              <a:buNone/>
-            </a:pPr>
-            <a:r>
-              <a:rPr lang="en-US" sz="1200" dirty="0">
-                <a:solidFill>
-                  <a:srgbClr val="0F172A"/>
-                </a:solidFill>
-                <a:latin typeface="Calibri" pitchFamily="34" charset="0"/>
-                <a:ea typeface="Calibri" pitchFamily="34" charset="-122"/>
-                <a:cs typeface="Calibri" pitchFamily="34" charset="-120"/>
-              </a:rPr>
-              <a:t>AI x UX Design Process Template</a:t>
-            </a:r>
-            <a:endParaRPr lang="en-US" sz="1200" dirty="0"/>
-          </a:p>
-        </p:txBody>
-      </p:sp>
-      <p:sp>
-        <p:nvSpPr>
-          <p:cNvPr id="9" name="Text 7"/>
-          <p:cNvSpPr/>
-          <p:nvPr/>
-        </p:nvSpPr>
-        <p:spPr>
-          <a:xfrm>
-            <a:off x="4336000" y="1636776"/>
-            <a:ext cx="1513840" cy="73152"/>
-          </a:xfrm>
-          <a:prstGeom prst="rect">
-            <a:avLst/>
-          </a:prstGeom>
-          <a:noFill/>
-          <a:ln/>
-        </p:spPr>
-        <p:txBody>
-          <a:bodyPr wrap="square" lIns="0" tIns="0" rIns="0" bIns="0" rtlCol="0" anchor="ctr"/>
-          <a:lstStyle/>
-          <a:p>
-            <a:pPr marL="0" indent="0" algn="r">
-              <a:buNone/>
-            </a:pPr>
-            <a:r>
-              <a:rPr lang="en-US" sz="1000" dirty="0">
-                <a:solidFill>
-                  <a:srgbClr val="64748B"/>
-                </a:solidFill>
-                <a:latin typeface="Calibri" pitchFamily="34" charset="0"/>
-                <a:ea typeface="Calibri" pitchFamily="34" charset="-122"/>
-                <a:cs typeface="Calibri" pitchFamily="34" charset="-120"/>
-              </a:rPr>
-              <a:t>Duplicate per project</a:t>
-            </a:r>
-            <a:endParaRPr lang="en-US" sz="1000" dirty="0"/>
-          </a:p>
-        </p:txBody>
-      </p:sp>
-      <p:sp>
-        <p:nvSpPr>
-          <p:cNvPr id="10" name="Shape 8"/>
-          <p:cNvSpPr/>
-          <p:nvPr/>
-        </p:nvSpPr>
-        <p:spPr>
-          <a:xfrm>
-            <a:off x="6215600" y="1371600"/>
-            <a:ext cx="5532120" cy="548640"/>
-          </a:xfrm>
-          <a:prstGeom prst="rect">
-            <a:avLst/>
-          </a:prstGeom>
-          <a:solidFill>
-            <a:srgbClr val="FFFFFF"/>
-          </a:solidFill>
-          <a:ln w="6350">
-            <a:solidFill>
-              <a:srgbClr val="E2E8F0"/>
-            </a:solidFill>
-            <a:prstDash val="solid"/>
-          </a:ln>
-        </p:spPr>
-        <p:txBody>
-          <a:bodyPr/>
-          <a:lstStyle/>
-          <a:p>
-            <a:endParaRPr lang="en-US"/>
-          </a:p>
-        </p:txBody>
-      </p:sp>
-      <p:sp>
-        <p:nvSpPr>
-          <p:cNvPr id="11" name="Shape 9"/>
-          <p:cNvSpPr/>
-          <p:nvPr/>
-        </p:nvSpPr>
-        <p:spPr>
-          <a:xfrm>
-            <a:off x="6215600" y="1371600"/>
-            <a:ext cx="45720" cy="548640"/>
-          </a:xfrm>
-          <a:prstGeom prst="rect">
-            <a:avLst/>
-          </a:prstGeom>
-          <a:solidFill>
-            <a:srgbClr val="22C55E"/>
-          </a:solidFill>
-          <a:ln w="12700">
-            <a:noFill/>
-            <a:prstDash val="solid"/>
-          </a:ln>
-        </p:spPr>
-        <p:txBody>
-          <a:bodyPr/>
-          <a:lstStyle/>
-          <a:p>
-            <a:endParaRPr lang="en-US"/>
-          </a:p>
-        </p:txBody>
-      </p:sp>
-      <p:sp>
-        <p:nvSpPr>
-          <p:cNvPr id="12" name="Text 10"/>
-          <p:cNvSpPr/>
-          <p:nvPr/>
-        </p:nvSpPr>
-        <p:spPr>
-          <a:xfrm>
-            <a:off x="6352760" y="1426464"/>
-            <a:ext cx="1828800" cy="182880"/>
-          </a:xfrm>
-          <a:prstGeom prst="rect">
-            <a:avLst/>
-          </a:prstGeom>
-          <a:noFill/>
-          <a:ln/>
-        </p:spPr>
-        <p:txBody>
-          <a:bodyPr wrap="square" lIns="0" tIns="0" rIns="0" bIns="0" rtlCol="0" anchor="ctr"/>
-          <a:lstStyle/>
-          <a:p>
-            <a:pPr marL="0" indent="0">
-              <a:buNone/>
-            </a:pPr>
-            <a:r>
-              <a:rPr lang="en-US" sz="700" b="1" kern="0" spc="200" dirty="0">
-                <a:solidFill>
-                  <a:srgbClr val="22C55E"/>
-                </a:solidFill>
-                <a:latin typeface="Calibri" pitchFamily="34" charset="0"/>
-                <a:ea typeface="Calibri" pitchFamily="34" charset="-122"/>
-                <a:cs typeface="Calibri" pitchFamily="34" charset="-120"/>
-              </a:rPr>
-              <a:t>Skill — 01</a:t>
-            </a:r>
-            <a:endParaRPr lang="en-US" sz="700" dirty="0"/>
-          </a:p>
-        </p:txBody>
-      </p:sp>
-      <p:sp>
-        <p:nvSpPr>
-          <p:cNvPr id="13" name="Text 11"/>
-          <p:cNvSpPr/>
-          <p:nvPr/>
-        </p:nvSpPr>
-        <p:spPr>
-          <a:xfrm>
-            <a:off x="6352760" y="1636776"/>
-            <a:ext cx="4114800" cy="219456"/>
-          </a:xfrm>
-          <a:prstGeom prst="rect">
-            <a:avLst/>
-          </a:prstGeom>
-          <a:noFill/>
-          <a:ln/>
-        </p:spPr>
-        <p:txBody>
-          <a:bodyPr wrap="square" lIns="0" tIns="0" rIns="0" bIns="0" rtlCol="0" anchor="ctr"/>
-          <a:lstStyle/>
-          <a:p>
-            <a:pPr marL="0" indent="0">
-              <a:buNone/>
-            </a:pPr>
-            <a:r>
-              <a:rPr lang="en-US" sz="1200" dirty="0">
-                <a:solidFill>
-                  <a:srgbClr val="0F172A"/>
-                </a:solidFill>
-                <a:latin typeface="Calibri" pitchFamily="34" charset="0"/>
-                <a:ea typeface="Calibri" pitchFamily="34" charset="-122"/>
-                <a:cs typeface="Calibri" pitchFamily="34" charset="-120"/>
-              </a:rPr>
-              <a:t>user-research.md</a:t>
-            </a:r>
-            <a:endParaRPr lang="en-US" sz="1200" dirty="0"/>
-          </a:p>
-        </p:txBody>
-      </p:sp>
-      <p:sp>
-        <p:nvSpPr>
-          <p:cNvPr id="14" name="Text 12"/>
-          <p:cNvSpPr/>
-          <p:nvPr/>
-        </p:nvSpPr>
-        <p:spPr>
-          <a:xfrm>
-            <a:off x="10559000" y="1636776"/>
-            <a:ext cx="1051560" cy="219456"/>
-          </a:xfrm>
-          <a:prstGeom prst="rect">
-            <a:avLst/>
-          </a:prstGeom>
-          <a:noFill/>
-          <a:ln/>
-        </p:spPr>
-        <p:txBody>
-          <a:bodyPr wrap="square" lIns="0" tIns="0" rIns="0" bIns="0" rtlCol="0" anchor="ctr"/>
-          <a:lstStyle/>
-          <a:p>
-            <a:pPr marL="0" indent="0" algn="r">
-              <a:buNone/>
-            </a:pPr>
-            <a:r>
-              <a:rPr lang="en-US" sz="1000" dirty="0">
-                <a:solidFill>
-                  <a:srgbClr val="64748B"/>
-                </a:solidFill>
-                <a:latin typeface="Calibri" pitchFamily="34" charset="0"/>
-                <a:ea typeface="Calibri" pitchFamily="34" charset="-122"/>
-                <a:cs typeface="Calibri" pitchFamily="34" charset="-120"/>
-              </a:rPr>
-              <a:t>Discover</a:t>
-            </a:r>
-            <a:endParaRPr lang="en-US" sz="1000" dirty="0"/>
-          </a:p>
-        </p:txBody>
-      </p:sp>
-      <p:sp>
-        <p:nvSpPr>
-          <p:cNvPr id="15" name="Shape 13"/>
-          <p:cNvSpPr/>
-          <p:nvPr/>
-        </p:nvSpPr>
-        <p:spPr>
-          <a:xfrm>
-            <a:off x="454880" y="2029968"/>
-            <a:ext cx="5532120" cy="548640"/>
-          </a:xfrm>
-          <a:prstGeom prst="rect">
-            <a:avLst/>
-          </a:prstGeom>
-          <a:solidFill>
-            <a:srgbClr val="FFFFFF"/>
-          </a:solidFill>
-          <a:ln w="6350">
-            <a:solidFill>
-              <a:srgbClr val="E2E8F0"/>
-            </a:solidFill>
-            <a:prstDash val="solid"/>
-          </a:ln>
-        </p:spPr>
-        <p:txBody>
-          <a:bodyPr/>
-          <a:lstStyle/>
-          <a:p>
-            <a:endParaRPr lang="en-US"/>
-          </a:p>
-        </p:txBody>
-      </p:sp>
-      <p:sp>
-        <p:nvSpPr>
-          <p:cNvPr id="16" name="Shape 14"/>
-          <p:cNvSpPr/>
-          <p:nvPr/>
-        </p:nvSpPr>
-        <p:spPr>
-          <a:xfrm>
-            <a:off x="454880" y="2029968"/>
-            <a:ext cx="45720" cy="548640"/>
-          </a:xfrm>
-          <a:prstGeom prst="rect">
-            <a:avLst/>
-          </a:prstGeom>
-          <a:solidFill>
-            <a:srgbClr val="22C55E"/>
-          </a:solidFill>
-          <a:ln w="12700">
-            <a:noFill/>
-            <a:prstDash val="solid"/>
-          </a:ln>
-        </p:spPr>
-        <p:txBody>
-          <a:bodyPr/>
-          <a:lstStyle/>
-          <a:p>
-            <a:endParaRPr lang="en-US"/>
-          </a:p>
-        </p:txBody>
-      </p:sp>
-      <p:sp>
-        <p:nvSpPr>
-          <p:cNvPr id="17" name="Text 15"/>
-          <p:cNvSpPr/>
-          <p:nvPr/>
-        </p:nvSpPr>
-        <p:spPr>
-          <a:xfrm>
-            <a:off x="592040" y="2084832"/>
-            <a:ext cx="1828800" cy="182880"/>
-          </a:xfrm>
-          <a:prstGeom prst="rect">
-            <a:avLst/>
-          </a:prstGeom>
-          <a:noFill/>
-          <a:ln/>
-        </p:spPr>
-        <p:txBody>
-          <a:bodyPr wrap="square" lIns="0" tIns="0" rIns="0" bIns="0" rtlCol="0" anchor="ctr"/>
-          <a:lstStyle/>
-          <a:p>
-            <a:pPr marL="0" indent="0">
-              <a:buNone/>
-            </a:pPr>
-            <a:r>
-              <a:rPr lang="en-US" sz="700" b="1" kern="0" spc="200" dirty="0">
-                <a:solidFill>
-                  <a:srgbClr val="22C55E"/>
-                </a:solidFill>
-                <a:latin typeface="Calibri" pitchFamily="34" charset="0"/>
-                <a:ea typeface="Calibri" pitchFamily="34" charset="-122"/>
-                <a:cs typeface="Calibri" pitchFamily="34" charset="-120"/>
-              </a:rPr>
-              <a:t>Skill — 01</a:t>
-            </a:r>
-            <a:endParaRPr lang="en-US" sz="700" dirty="0"/>
-          </a:p>
-        </p:txBody>
-      </p:sp>
-      <p:sp>
-        <p:nvSpPr>
-          <p:cNvPr id="18" name="Text 16"/>
-          <p:cNvSpPr/>
-          <p:nvPr/>
-        </p:nvSpPr>
-        <p:spPr>
-          <a:xfrm>
-            <a:off x="592040" y="2295144"/>
-            <a:ext cx="4114800" cy="219456"/>
-          </a:xfrm>
-          <a:prstGeom prst="rect">
-            <a:avLst/>
-          </a:prstGeom>
-          <a:noFill/>
-          <a:ln/>
-        </p:spPr>
-        <p:txBody>
-          <a:bodyPr wrap="square" lIns="0" tIns="0" rIns="0" bIns="0" rtlCol="0" anchor="ctr"/>
-          <a:lstStyle/>
-          <a:p>
-            <a:pPr marL="0" indent="0">
-              <a:buNone/>
-            </a:pPr>
-            <a:r>
-              <a:rPr lang="en-US" sz="1200" dirty="0">
-                <a:solidFill>
-                  <a:srgbClr val="0F172A"/>
-                </a:solidFill>
-                <a:latin typeface="Calibri" pitchFamily="34" charset="0"/>
-                <a:ea typeface="Calibri" pitchFamily="34" charset="-122"/>
-                <a:cs typeface="Calibri" pitchFamily="34" charset="-120"/>
-              </a:rPr>
-              <a:t>competitive-analysis.md</a:t>
-            </a:r>
-            <a:endParaRPr lang="en-US" sz="1200" dirty="0"/>
-          </a:p>
-        </p:txBody>
-      </p:sp>
-      <p:sp>
-        <p:nvSpPr>
-          <p:cNvPr id="19" name="Text 17"/>
-          <p:cNvSpPr/>
-          <p:nvPr/>
-        </p:nvSpPr>
-        <p:spPr>
-          <a:xfrm>
-            <a:off x="4798280" y="2295144"/>
-            <a:ext cx="1051560" cy="219456"/>
-          </a:xfrm>
-          <a:prstGeom prst="rect">
-            <a:avLst/>
-          </a:prstGeom>
-          <a:noFill/>
-          <a:ln/>
-        </p:spPr>
-        <p:txBody>
-          <a:bodyPr wrap="square" lIns="0" tIns="0" rIns="0" bIns="0" rtlCol="0" anchor="ctr"/>
-          <a:lstStyle/>
-          <a:p>
-            <a:pPr marL="0" indent="0" algn="r">
-              <a:buNone/>
-            </a:pPr>
-            <a:r>
-              <a:rPr lang="en-US" sz="1000" dirty="0">
-                <a:solidFill>
-                  <a:srgbClr val="64748B"/>
-                </a:solidFill>
-                <a:latin typeface="Calibri" pitchFamily="34" charset="0"/>
-                <a:ea typeface="Calibri" pitchFamily="34" charset="-122"/>
-                <a:cs typeface="Calibri" pitchFamily="34" charset="-120"/>
-              </a:rPr>
-              <a:t>Discover</a:t>
-            </a:r>
-            <a:endParaRPr lang="en-US" sz="1000" dirty="0"/>
-          </a:p>
-        </p:txBody>
-      </p:sp>
-      <p:sp>
-        <p:nvSpPr>
-          <p:cNvPr id="20" name="Shape 18"/>
-          <p:cNvSpPr/>
-          <p:nvPr/>
-        </p:nvSpPr>
-        <p:spPr>
-          <a:xfrm>
-            <a:off x="6215600" y="2029968"/>
-            <a:ext cx="5532120" cy="548640"/>
-          </a:xfrm>
-          <a:prstGeom prst="rect">
-            <a:avLst/>
-          </a:prstGeom>
-          <a:solidFill>
-            <a:srgbClr val="FFFFFF"/>
-          </a:solidFill>
-          <a:ln w="6350">
-            <a:solidFill>
-              <a:srgbClr val="E2E8F0"/>
-            </a:solidFill>
-            <a:prstDash val="solid"/>
-          </a:ln>
-        </p:spPr>
-        <p:txBody>
-          <a:bodyPr/>
-          <a:lstStyle/>
-          <a:p>
-            <a:endParaRPr lang="en-US"/>
-          </a:p>
-        </p:txBody>
-      </p:sp>
-      <p:sp>
-        <p:nvSpPr>
-          <p:cNvPr id="21" name="Shape 19"/>
-          <p:cNvSpPr/>
-          <p:nvPr/>
-        </p:nvSpPr>
-        <p:spPr>
-          <a:xfrm>
-            <a:off x="6215600" y="2029968"/>
-            <a:ext cx="45720" cy="548640"/>
-          </a:xfrm>
-          <a:prstGeom prst="rect">
-            <a:avLst/>
-          </a:prstGeom>
-          <a:solidFill>
-            <a:srgbClr val="8B5CF6"/>
-          </a:solidFill>
-          <a:ln w="12700">
-            <a:noFill/>
-            <a:prstDash val="solid"/>
-          </a:ln>
-        </p:spPr>
-        <p:txBody>
-          <a:bodyPr/>
-          <a:lstStyle/>
-          <a:p>
-            <a:endParaRPr lang="en-US"/>
-          </a:p>
-        </p:txBody>
-      </p:sp>
-      <p:sp>
-        <p:nvSpPr>
-          <p:cNvPr id="22" name="Text 20"/>
-          <p:cNvSpPr/>
-          <p:nvPr/>
-        </p:nvSpPr>
-        <p:spPr>
-          <a:xfrm>
-            <a:off x="6352760" y="2084832"/>
-            <a:ext cx="1828800" cy="182880"/>
-          </a:xfrm>
-          <a:prstGeom prst="rect">
-            <a:avLst/>
-          </a:prstGeom>
-          <a:noFill/>
-          <a:ln/>
-        </p:spPr>
-        <p:txBody>
-          <a:bodyPr wrap="square" lIns="0" tIns="0" rIns="0" bIns="0" rtlCol="0" anchor="ctr"/>
-          <a:lstStyle/>
-          <a:p>
-            <a:pPr marL="0" indent="0">
-              <a:buNone/>
-            </a:pPr>
-            <a:r>
-              <a:rPr lang="en-US" sz="700" b="1" kern="0" spc="200" dirty="0">
-                <a:solidFill>
-                  <a:srgbClr val="8B5CF6"/>
-                </a:solidFill>
-                <a:latin typeface="Calibri" pitchFamily="34" charset="0"/>
-                <a:ea typeface="Calibri" pitchFamily="34" charset="-122"/>
-                <a:cs typeface="Calibri" pitchFamily="34" charset="-120"/>
-              </a:rPr>
-              <a:t>Skill — 02</a:t>
-            </a:r>
-            <a:endParaRPr lang="en-US" sz="700" dirty="0"/>
-          </a:p>
-        </p:txBody>
-      </p:sp>
-      <p:sp>
-        <p:nvSpPr>
-          <p:cNvPr id="23" name="Text 21"/>
-          <p:cNvSpPr/>
-          <p:nvPr/>
-        </p:nvSpPr>
-        <p:spPr>
-          <a:xfrm>
-            <a:off x="6352760" y="2295144"/>
-            <a:ext cx="4114800" cy="219456"/>
-          </a:xfrm>
-          <a:prstGeom prst="rect">
-            <a:avLst/>
-          </a:prstGeom>
-          <a:noFill/>
-          <a:ln/>
-        </p:spPr>
-        <p:txBody>
-          <a:bodyPr wrap="square" lIns="0" tIns="0" rIns="0" bIns="0" rtlCol="0" anchor="ctr"/>
-          <a:lstStyle/>
-          <a:p>
-            <a:pPr marL="0" indent="0">
-              <a:buNone/>
-            </a:pPr>
-            <a:r>
-              <a:rPr lang="en-US" sz="1200" dirty="0">
-                <a:solidFill>
-                  <a:srgbClr val="0F172A"/>
-                </a:solidFill>
-                <a:latin typeface="Calibri" pitchFamily="34" charset="0"/>
-                <a:ea typeface="Calibri" pitchFamily="34" charset="-122"/>
-                <a:cs typeface="Calibri" pitchFamily="34" charset="-120"/>
-              </a:rPr>
-              <a:t>problem-framing.md</a:t>
-            </a:r>
-            <a:endParaRPr lang="en-US" sz="1200" dirty="0"/>
-          </a:p>
-        </p:txBody>
-      </p:sp>
-      <p:sp>
-        <p:nvSpPr>
-          <p:cNvPr id="24" name="Text 22"/>
-          <p:cNvSpPr/>
-          <p:nvPr/>
-        </p:nvSpPr>
-        <p:spPr>
-          <a:xfrm>
-            <a:off x="10559000" y="2295144"/>
-            <a:ext cx="1051560" cy="219456"/>
-          </a:xfrm>
-          <a:prstGeom prst="rect">
-            <a:avLst/>
-          </a:prstGeom>
-          <a:noFill/>
-          <a:ln/>
-        </p:spPr>
-        <p:txBody>
-          <a:bodyPr wrap="square" lIns="0" tIns="0" rIns="0" bIns="0" rtlCol="0" anchor="ctr"/>
-          <a:lstStyle/>
-          <a:p>
-            <a:pPr marL="0" indent="0" algn="r">
-              <a:buNone/>
-            </a:pPr>
-            <a:r>
-              <a:rPr lang="en-US" sz="1000" dirty="0">
-                <a:solidFill>
-                  <a:srgbClr val="64748B"/>
-                </a:solidFill>
-                <a:latin typeface="Calibri" pitchFamily="34" charset="0"/>
-                <a:ea typeface="Calibri" pitchFamily="34" charset="-122"/>
-                <a:cs typeface="Calibri" pitchFamily="34" charset="-120"/>
-              </a:rPr>
-              <a:t>Define</a:t>
-            </a:r>
-            <a:endParaRPr lang="en-US" sz="1000" dirty="0"/>
-          </a:p>
-        </p:txBody>
-      </p:sp>
-      <p:sp>
-        <p:nvSpPr>
-          <p:cNvPr id="25" name="Shape 23"/>
-          <p:cNvSpPr/>
-          <p:nvPr/>
-        </p:nvSpPr>
-        <p:spPr>
-          <a:xfrm>
-            <a:off x="454880" y="2688336"/>
-            <a:ext cx="5532120" cy="548640"/>
-          </a:xfrm>
-          <a:prstGeom prst="rect">
-            <a:avLst/>
-          </a:prstGeom>
-          <a:solidFill>
-            <a:srgbClr val="FFFFFF"/>
-          </a:solidFill>
-          <a:ln w="6350">
-            <a:solidFill>
-              <a:srgbClr val="E2E8F0"/>
-            </a:solidFill>
-            <a:prstDash val="solid"/>
-          </a:ln>
-        </p:spPr>
-        <p:txBody>
-          <a:bodyPr/>
-          <a:lstStyle/>
-          <a:p>
-            <a:endParaRPr lang="en-US"/>
-          </a:p>
-        </p:txBody>
-      </p:sp>
-      <p:sp>
-        <p:nvSpPr>
-          <p:cNvPr id="26" name="Shape 24"/>
-          <p:cNvSpPr/>
-          <p:nvPr/>
-        </p:nvSpPr>
-        <p:spPr>
-          <a:xfrm>
-            <a:off x="454880" y="2688336"/>
-            <a:ext cx="45720" cy="548640"/>
-          </a:xfrm>
-          <a:prstGeom prst="rect">
-            <a:avLst/>
-          </a:prstGeom>
-          <a:solidFill>
-            <a:srgbClr val="F59E0B"/>
-          </a:solidFill>
-          <a:ln w="12700">
-            <a:noFill/>
-            <a:prstDash val="solid"/>
-          </a:ln>
-        </p:spPr>
-        <p:txBody>
-          <a:bodyPr/>
-          <a:lstStyle/>
-          <a:p>
-            <a:endParaRPr lang="en-US"/>
-          </a:p>
-        </p:txBody>
-      </p:sp>
-      <p:sp>
-        <p:nvSpPr>
-          <p:cNvPr id="27" name="Text 25"/>
-          <p:cNvSpPr/>
-          <p:nvPr/>
-        </p:nvSpPr>
-        <p:spPr>
-          <a:xfrm>
-            <a:off x="592040" y="2743200"/>
-            <a:ext cx="1828800" cy="182880"/>
-          </a:xfrm>
-          <a:prstGeom prst="rect">
-            <a:avLst/>
-          </a:prstGeom>
-          <a:noFill/>
-          <a:ln/>
-        </p:spPr>
-        <p:txBody>
-          <a:bodyPr wrap="square" lIns="0" tIns="0" rIns="0" bIns="0" rtlCol="0" anchor="ctr"/>
-          <a:lstStyle/>
-          <a:p>
-            <a:pPr marL="0" indent="0">
-              <a:buNone/>
-            </a:pPr>
-            <a:r>
-              <a:rPr lang="en-US" sz="700" b="1" kern="0" spc="200" dirty="0">
-                <a:solidFill>
-                  <a:srgbClr val="F59E0B"/>
-                </a:solidFill>
-                <a:latin typeface="Calibri" pitchFamily="34" charset="0"/>
-                <a:ea typeface="Calibri" pitchFamily="34" charset="-122"/>
-                <a:cs typeface="Calibri" pitchFamily="34" charset="-120"/>
-              </a:rPr>
-              <a:t>Skill — 03</a:t>
-            </a:r>
-            <a:endParaRPr lang="en-US" sz="700" dirty="0"/>
-          </a:p>
-        </p:txBody>
-      </p:sp>
-      <p:sp>
-        <p:nvSpPr>
-          <p:cNvPr id="28" name="Text 26"/>
-          <p:cNvSpPr/>
-          <p:nvPr/>
-        </p:nvSpPr>
-        <p:spPr>
-          <a:xfrm>
-            <a:off x="592040" y="2953512"/>
-            <a:ext cx="4114800" cy="219456"/>
-          </a:xfrm>
-          <a:prstGeom prst="rect">
-            <a:avLst/>
-          </a:prstGeom>
-          <a:noFill/>
-          <a:ln/>
-        </p:spPr>
-        <p:txBody>
-          <a:bodyPr wrap="square" lIns="0" tIns="0" rIns="0" bIns="0" rtlCol="0" anchor="ctr"/>
-          <a:lstStyle/>
-          <a:p>
-            <a:pPr marL="0" indent="0">
-              <a:buNone/>
-            </a:pPr>
-            <a:r>
-              <a:rPr lang="en-US" sz="1200" dirty="0">
-                <a:solidFill>
-                  <a:srgbClr val="0F172A"/>
-                </a:solidFill>
-                <a:latin typeface="Calibri" pitchFamily="34" charset="0"/>
-                <a:ea typeface="Calibri" pitchFamily="34" charset="-122"/>
-                <a:cs typeface="Calibri" pitchFamily="34" charset="-120"/>
-              </a:rPr>
-              <a:t>concept-generation.md</a:t>
-            </a:r>
-            <a:endParaRPr lang="en-US" sz="1200" dirty="0"/>
-          </a:p>
-        </p:txBody>
-      </p:sp>
-      <p:sp>
-        <p:nvSpPr>
-          <p:cNvPr id="29" name="Text 27"/>
-          <p:cNvSpPr/>
-          <p:nvPr/>
-        </p:nvSpPr>
-        <p:spPr>
-          <a:xfrm>
-            <a:off x="4798280" y="2953512"/>
-            <a:ext cx="1051560" cy="219456"/>
-          </a:xfrm>
-          <a:prstGeom prst="rect">
-            <a:avLst/>
-          </a:prstGeom>
-          <a:noFill/>
-          <a:ln/>
-        </p:spPr>
-        <p:txBody>
-          <a:bodyPr wrap="square" lIns="0" tIns="0" rIns="0" bIns="0" rtlCol="0" anchor="ctr"/>
-          <a:lstStyle/>
-          <a:p>
-            <a:pPr marL="0" indent="0" algn="r">
-              <a:buNone/>
-            </a:pPr>
-            <a:r>
-              <a:rPr lang="en-US" sz="1000" dirty="0">
-                <a:solidFill>
-                  <a:srgbClr val="64748B"/>
-                </a:solidFill>
-                <a:latin typeface="Calibri" pitchFamily="34" charset="0"/>
-                <a:ea typeface="Calibri" pitchFamily="34" charset="-122"/>
-                <a:cs typeface="Calibri" pitchFamily="34" charset="-120"/>
-              </a:rPr>
-              <a:t>Ideate</a:t>
-            </a:r>
-            <a:endParaRPr lang="en-US" sz="1000" dirty="0"/>
-          </a:p>
-        </p:txBody>
-      </p:sp>
-      <p:sp>
-        <p:nvSpPr>
-          <p:cNvPr id="30" name="Shape 28"/>
-          <p:cNvSpPr/>
-          <p:nvPr/>
-        </p:nvSpPr>
-        <p:spPr>
-          <a:xfrm>
-            <a:off x="6215600" y="2688336"/>
-            <a:ext cx="5532120" cy="548640"/>
-          </a:xfrm>
-          <a:prstGeom prst="rect">
-            <a:avLst/>
-          </a:prstGeom>
-          <a:solidFill>
-            <a:srgbClr val="FFFFFF"/>
-          </a:solidFill>
-          <a:ln w="6350">
-            <a:solidFill>
-              <a:srgbClr val="E2E8F0"/>
-            </a:solidFill>
-            <a:prstDash val="solid"/>
-          </a:ln>
-        </p:spPr>
-        <p:txBody>
-          <a:bodyPr/>
-          <a:lstStyle/>
-          <a:p>
-            <a:endParaRPr lang="en-US"/>
-          </a:p>
-        </p:txBody>
-      </p:sp>
-      <p:sp>
-        <p:nvSpPr>
-          <p:cNvPr id="31" name="Shape 29"/>
-          <p:cNvSpPr/>
-          <p:nvPr/>
-        </p:nvSpPr>
-        <p:spPr>
-          <a:xfrm>
-            <a:off x="6215600" y="2688336"/>
-            <a:ext cx="45720" cy="548640"/>
-          </a:xfrm>
-          <a:prstGeom prst="rect">
-            <a:avLst/>
-          </a:prstGeom>
-          <a:solidFill>
-            <a:srgbClr val="3B82F6"/>
-          </a:solidFill>
-          <a:ln w="12700">
-            <a:noFill/>
-            <a:prstDash val="solid"/>
-          </a:ln>
-        </p:spPr>
-        <p:txBody>
-          <a:bodyPr/>
-          <a:lstStyle/>
-          <a:p>
-            <a:endParaRPr lang="en-US"/>
-          </a:p>
-        </p:txBody>
-      </p:sp>
-      <p:sp>
-        <p:nvSpPr>
-          <p:cNvPr id="32" name="Text 30"/>
-          <p:cNvSpPr/>
-          <p:nvPr/>
-        </p:nvSpPr>
-        <p:spPr>
-          <a:xfrm>
-            <a:off x="6352760" y="2743200"/>
-            <a:ext cx="1828800" cy="182880"/>
-          </a:xfrm>
-          <a:prstGeom prst="rect">
-            <a:avLst/>
-          </a:prstGeom>
-          <a:noFill/>
-          <a:ln/>
-        </p:spPr>
-        <p:txBody>
-          <a:bodyPr wrap="square" lIns="0" tIns="0" rIns="0" bIns="0" rtlCol="0" anchor="ctr"/>
-          <a:lstStyle/>
-          <a:p>
-            <a:pPr marL="0" indent="0">
-              <a:buNone/>
-            </a:pPr>
-            <a:r>
-              <a:rPr lang="en-US" sz="700" b="1" kern="0" spc="200" dirty="0">
-                <a:solidFill>
-                  <a:srgbClr val="3B82F6"/>
-                </a:solidFill>
-                <a:latin typeface="Calibri" pitchFamily="34" charset="0"/>
-                <a:ea typeface="Calibri" pitchFamily="34" charset="-122"/>
-                <a:cs typeface="Calibri" pitchFamily="34" charset="-120"/>
-              </a:rPr>
-              <a:t>Skill — 04</a:t>
-            </a:r>
-            <a:endParaRPr lang="en-US" sz="700" dirty="0"/>
-          </a:p>
-        </p:txBody>
-      </p:sp>
-      <p:sp>
-        <p:nvSpPr>
-          <p:cNvPr id="33" name="Text 31"/>
-          <p:cNvSpPr/>
-          <p:nvPr/>
-        </p:nvSpPr>
-        <p:spPr>
-          <a:xfrm>
-            <a:off x="6352760" y="2953512"/>
-            <a:ext cx="4114800" cy="219456"/>
-          </a:xfrm>
-          <a:prstGeom prst="rect">
-            <a:avLst/>
-          </a:prstGeom>
-          <a:noFill/>
-          <a:ln/>
-        </p:spPr>
-        <p:txBody>
-          <a:bodyPr wrap="square" lIns="0" tIns="0" rIns="0" bIns="0" rtlCol="0" anchor="ctr"/>
-          <a:lstStyle/>
-          <a:p>
-            <a:pPr marL="0" indent="0">
-              <a:buNone/>
-            </a:pPr>
-            <a:r>
-              <a:rPr lang="en-US" sz="1200" dirty="0">
-                <a:solidFill>
-                  <a:srgbClr val="0F172A"/>
-                </a:solidFill>
-                <a:latin typeface="Calibri" pitchFamily="34" charset="0"/>
-                <a:ea typeface="Calibri" pitchFamily="34" charset="-122"/>
-                <a:cs typeface="Calibri" pitchFamily="34" charset="-120"/>
-              </a:rPr>
-              <a:t>prototyping.md</a:t>
-            </a:r>
-            <a:endParaRPr lang="en-US" sz="1200" dirty="0"/>
-          </a:p>
-        </p:txBody>
-      </p:sp>
-      <p:sp>
-        <p:nvSpPr>
-          <p:cNvPr id="34" name="Text 32"/>
-          <p:cNvSpPr/>
-          <p:nvPr/>
-        </p:nvSpPr>
-        <p:spPr>
-          <a:xfrm>
-            <a:off x="10559000" y="2953512"/>
-            <a:ext cx="1051560" cy="219456"/>
-          </a:xfrm>
-          <a:prstGeom prst="rect">
-            <a:avLst/>
-          </a:prstGeom>
-          <a:noFill/>
-          <a:ln/>
-        </p:spPr>
-        <p:txBody>
-          <a:bodyPr wrap="square" lIns="0" tIns="0" rIns="0" bIns="0" rtlCol="0" anchor="ctr"/>
-          <a:lstStyle/>
-          <a:p>
-            <a:pPr marL="0" indent="0" algn="r">
-              <a:buNone/>
-            </a:pPr>
-            <a:r>
-              <a:rPr lang="en-US" sz="1000" dirty="0">
-                <a:solidFill>
-                  <a:srgbClr val="64748B"/>
-                </a:solidFill>
-                <a:latin typeface="Calibri" pitchFamily="34" charset="0"/>
-                <a:ea typeface="Calibri" pitchFamily="34" charset="-122"/>
-                <a:cs typeface="Calibri" pitchFamily="34" charset="-120"/>
-              </a:rPr>
-              <a:t>Prototype</a:t>
-            </a:r>
-            <a:endParaRPr lang="en-US" sz="1000" dirty="0"/>
-          </a:p>
-        </p:txBody>
-      </p:sp>
-      <p:sp>
-        <p:nvSpPr>
-          <p:cNvPr id="35" name="Shape 33"/>
-          <p:cNvSpPr/>
-          <p:nvPr/>
-        </p:nvSpPr>
-        <p:spPr>
-          <a:xfrm>
-            <a:off x="454880" y="3346704"/>
-            <a:ext cx="5532120" cy="548640"/>
-          </a:xfrm>
-          <a:prstGeom prst="rect">
-            <a:avLst/>
-          </a:prstGeom>
-          <a:solidFill>
-            <a:srgbClr val="FFFFFF"/>
-          </a:solidFill>
-          <a:ln w="6350">
-            <a:solidFill>
-              <a:srgbClr val="E2E8F0"/>
-            </a:solidFill>
-            <a:prstDash val="solid"/>
-          </a:ln>
-        </p:spPr>
-        <p:txBody>
-          <a:bodyPr/>
-          <a:lstStyle/>
-          <a:p>
-            <a:endParaRPr lang="en-US"/>
-          </a:p>
-        </p:txBody>
-      </p:sp>
-      <p:sp>
-        <p:nvSpPr>
-          <p:cNvPr id="36" name="Shape 34"/>
-          <p:cNvSpPr/>
-          <p:nvPr/>
-        </p:nvSpPr>
-        <p:spPr>
-          <a:xfrm>
-            <a:off x="454880" y="3346704"/>
-            <a:ext cx="45720" cy="548640"/>
-          </a:xfrm>
-          <a:prstGeom prst="rect">
-            <a:avLst/>
-          </a:prstGeom>
-          <a:solidFill>
-            <a:srgbClr val="EF4444"/>
-          </a:solidFill>
-          <a:ln w="12700">
-            <a:noFill/>
-            <a:prstDash val="solid"/>
-          </a:ln>
-        </p:spPr>
-        <p:txBody>
-          <a:bodyPr/>
-          <a:lstStyle/>
-          <a:p>
-            <a:endParaRPr lang="en-US"/>
-          </a:p>
-        </p:txBody>
-      </p:sp>
-      <p:sp>
-        <p:nvSpPr>
-          <p:cNvPr id="37" name="Text 35"/>
-          <p:cNvSpPr/>
-          <p:nvPr/>
-        </p:nvSpPr>
-        <p:spPr>
-          <a:xfrm>
-            <a:off x="592040" y="3401568"/>
-            <a:ext cx="1828800" cy="182880"/>
-          </a:xfrm>
-          <a:prstGeom prst="rect">
-            <a:avLst/>
-          </a:prstGeom>
-          <a:noFill/>
-          <a:ln/>
-        </p:spPr>
-        <p:txBody>
-          <a:bodyPr wrap="square" lIns="0" tIns="0" rIns="0" bIns="0" rtlCol="0" anchor="ctr"/>
-          <a:lstStyle/>
-          <a:p>
-            <a:pPr marL="0" indent="0">
-              <a:buNone/>
-            </a:pPr>
-            <a:r>
-              <a:rPr lang="en-US" sz="700" b="1" kern="0" spc="200" dirty="0">
-                <a:solidFill>
-                  <a:srgbClr val="EF4444"/>
-                </a:solidFill>
-                <a:latin typeface="Calibri" pitchFamily="34" charset="0"/>
-                <a:ea typeface="Calibri" pitchFamily="34" charset="-122"/>
-                <a:cs typeface="Calibri" pitchFamily="34" charset="-120"/>
-              </a:rPr>
-              <a:t>Skill — 05</a:t>
-            </a:r>
-            <a:endParaRPr lang="en-US" sz="700" dirty="0"/>
-          </a:p>
-        </p:txBody>
-      </p:sp>
-      <p:sp>
-        <p:nvSpPr>
-          <p:cNvPr id="38" name="Text 36"/>
-          <p:cNvSpPr/>
-          <p:nvPr/>
-        </p:nvSpPr>
-        <p:spPr>
-          <a:xfrm>
-            <a:off x="592040" y="3611880"/>
-            <a:ext cx="4114800" cy="219456"/>
-          </a:xfrm>
-          <a:prstGeom prst="rect">
-            <a:avLst/>
-          </a:prstGeom>
-          <a:noFill/>
-          <a:ln/>
-        </p:spPr>
-        <p:txBody>
-          <a:bodyPr wrap="square" lIns="0" tIns="0" rIns="0" bIns="0" rtlCol="0" anchor="ctr"/>
-          <a:lstStyle/>
-          <a:p>
-            <a:pPr marL="0" indent="0">
-              <a:buNone/>
-            </a:pPr>
-            <a:r>
-              <a:rPr lang="en-US" sz="1200" dirty="0">
-                <a:solidFill>
-                  <a:srgbClr val="0F172A"/>
-                </a:solidFill>
-                <a:latin typeface="Calibri" pitchFamily="34" charset="0"/>
-                <a:ea typeface="Calibri" pitchFamily="34" charset="-122"/>
-                <a:cs typeface="Calibri" pitchFamily="34" charset="-120"/>
-              </a:rPr>
-              <a:t>usability-testing.md</a:t>
-            </a:r>
-            <a:endParaRPr lang="en-US" sz="1200" dirty="0"/>
-          </a:p>
-        </p:txBody>
-      </p:sp>
-      <p:sp>
-        <p:nvSpPr>
-          <p:cNvPr id="39" name="Text 37"/>
-          <p:cNvSpPr/>
-          <p:nvPr/>
-        </p:nvSpPr>
-        <p:spPr>
-          <a:xfrm>
-            <a:off x="4798280" y="3611880"/>
-            <a:ext cx="1051560" cy="219456"/>
-          </a:xfrm>
-          <a:prstGeom prst="rect">
-            <a:avLst/>
-          </a:prstGeom>
-          <a:noFill/>
-          <a:ln/>
-        </p:spPr>
-        <p:txBody>
-          <a:bodyPr wrap="square" lIns="0" tIns="0" rIns="0" bIns="0" rtlCol="0" anchor="ctr"/>
-          <a:lstStyle/>
-          <a:p>
-            <a:pPr marL="0" indent="0" algn="r">
-              <a:buNone/>
-            </a:pPr>
-            <a:r>
-              <a:rPr lang="en-US" sz="1000" dirty="0">
-                <a:solidFill>
-                  <a:srgbClr val="64748B"/>
-                </a:solidFill>
-                <a:latin typeface="Calibri" pitchFamily="34" charset="0"/>
-                <a:ea typeface="Calibri" pitchFamily="34" charset="-122"/>
-                <a:cs typeface="Calibri" pitchFamily="34" charset="-120"/>
-              </a:rPr>
-              <a:t>Validate</a:t>
-            </a:r>
-            <a:endParaRPr lang="en-US" sz="1000" dirty="0"/>
-          </a:p>
-        </p:txBody>
-      </p:sp>
-      <p:sp>
-        <p:nvSpPr>
-          <p:cNvPr id="40" name="Shape 38"/>
-          <p:cNvSpPr/>
-          <p:nvPr/>
-        </p:nvSpPr>
-        <p:spPr>
-          <a:xfrm>
-            <a:off x="6215600" y="3346704"/>
-            <a:ext cx="5532120" cy="548640"/>
-          </a:xfrm>
-          <a:prstGeom prst="rect">
-            <a:avLst/>
-          </a:prstGeom>
-          <a:solidFill>
-            <a:srgbClr val="FFFFFF"/>
-          </a:solidFill>
-          <a:ln w="6350">
-            <a:solidFill>
-              <a:srgbClr val="E2E8F0"/>
-            </a:solidFill>
-            <a:prstDash val="solid"/>
-          </a:ln>
-        </p:spPr>
-        <p:txBody>
-          <a:bodyPr/>
-          <a:lstStyle/>
-          <a:p>
-            <a:endParaRPr lang="en-US"/>
-          </a:p>
-        </p:txBody>
-      </p:sp>
-      <p:sp>
-        <p:nvSpPr>
-          <p:cNvPr id="41" name="Shape 39"/>
-          <p:cNvSpPr/>
-          <p:nvPr/>
-        </p:nvSpPr>
-        <p:spPr>
-          <a:xfrm>
-            <a:off x="6215600" y="3346704"/>
-            <a:ext cx="45720" cy="548640"/>
-          </a:xfrm>
-          <a:prstGeom prst="rect">
-            <a:avLst/>
-          </a:prstGeom>
-          <a:solidFill>
-            <a:srgbClr val="14B8A6"/>
-          </a:solidFill>
-          <a:ln w="12700">
-            <a:noFill/>
-            <a:prstDash val="solid"/>
-          </a:ln>
-        </p:spPr>
-        <p:txBody>
-          <a:bodyPr/>
-          <a:lstStyle/>
-          <a:p>
-            <a:endParaRPr lang="en-US"/>
-          </a:p>
-        </p:txBody>
-      </p:sp>
-      <p:sp>
-        <p:nvSpPr>
-          <p:cNvPr id="42" name="Text 40"/>
-          <p:cNvSpPr/>
-          <p:nvPr/>
-        </p:nvSpPr>
-        <p:spPr>
-          <a:xfrm>
-            <a:off x="6352760" y="3401568"/>
-            <a:ext cx="1828800" cy="182880"/>
-          </a:xfrm>
-          <a:prstGeom prst="rect">
-            <a:avLst/>
-          </a:prstGeom>
-          <a:noFill/>
-          <a:ln/>
-        </p:spPr>
-        <p:txBody>
-          <a:bodyPr wrap="square" lIns="0" tIns="0" rIns="0" bIns="0" rtlCol="0" anchor="ctr"/>
-          <a:lstStyle/>
-          <a:p>
-            <a:pPr marL="0" indent="0">
-              <a:buNone/>
-            </a:pPr>
-            <a:r>
-              <a:rPr lang="en-US" sz="700" b="1" kern="0" spc="200" dirty="0">
-                <a:solidFill>
-                  <a:srgbClr val="14B8A6"/>
-                </a:solidFill>
-                <a:latin typeface="Calibri" pitchFamily="34" charset="0"/>
-                <a:ea typeface="Calibri" pitchFamily="34" charset="-122"/>
-                <a:cs typeface="Calibri" pitchFamily="34" charset="-120"/>
-              </a:rPr>
-              <a:t>Skill — 06</a:t>
-            </a:r>
-            <a:endParaRPr lang="en-US" sz="700" dirty="0"/>
-          </a:p>
-        </p:txBody>
-      </p:sp>
-      <p:sp>
-        <p:nvSpPr>
-          <p:cNvPr id="43" name="Text 41"/>
-          <p:cNvSpPr/>
-          <p:nvPr/>
-        </p:nvSpPr>
-        <p:spPr>
-          <a:xfrm>
-            <a:off x="6352760" y="3611880"/>
-            <a:ext cx="4114800" cy="219456"/>
-          </a:xfrm>
-          <a:prstGeom prst="rect">
-            <a:avLst/>
-          </a:prstGeom>
-          <a:noFill/>
-          <a:ln/>
-        </p:spPr>
-        <p:txBody>
-          <a:bodyPr wrap="square" lIns="0" tIns="0" rIns="0" bIns="0" rtlCol="0" anchor="ctr"/>
-          <a:lstStyle/>
-          <a:p>
-            <a:pPr marL="0" indent="0">
-              <a:buNone/>
-            </a:pPr>
-            <a:r>
-              <a:rPr lang="en-US" sz="1200" dirty="0">
-                <a:solidFill>
-                  <a:srgbClr val="0F172A"/>
-                </a:solidFill>
-                <a:latin typeface="Calibri" pitchFamily="34" charset="0"/>
-                <a:ea typeface="Calibri" pitchFamily="34" charset="-122"/>
-                <a:cs typeface="Calibri" pitchFamily="34" charset="-120"/>
-              </a:rPr>
-              <a:t>design-delivery.md</a:t>
-            </a:r>
-            <a:endParaRPr lang="en-US" sz="1200" dirty="0"/>
-          </a:p>
-        </p:txBody>
-      </p:sp>
-      <p:sp>
-        <p:nvSpPr>
-          <p:cNvPr id="44" name="Text 42"/>
-          <p:cNvSpPr/>
-          <p:nvPr/>
-        </p:nvSpPr>
-        <p:spPr>
-          <a:xfrm>
-            <a:off x="10559000" y="3611880"/>
-            <a:ext cx="1051560" cy="219456"/>
-          </a:xfrm>
-          <a:prstGeom prst="rect">
-            <a:avLst/>
-          </a:prstGeom>
-          <a:noFill/>
-          <a:ln/>
-        </p:spPr>
-        <p:txBody>
-          <a:bodyPr wrap="square" lIns="0" tIns="0" rIns="0" bIns="0" rtlCol="0" anchor="ctr"/>
-          <a:lstStyle/>
-          <a:p>
-            <a:pPr marL="0" indent="0" algn="r">
-              <a:buNone/>
-            </a:pPr>
-            <a:r>
-              <a:rPr lang="en-US" sz="1000" dirty="0">
-                <a:solidFill>
-                  <a:srgbClr val="64748B"/>
-                </a:solidFill>
-                <a:latin typeface="Calibri" pitchFamily="34" charset="0"/>
-                <a:ea typeface="Calibri" pitchFamily="34" charset="-122"/>
-                <a:cs typeface="Calibri" pitchFamily="34" charset="-120"/>
-              </a:rPr>
-              <a:t>Deliver</a:t>
-            </a:r>
-            <a:endParaRPr lang="en-US" sz="1000" dirty="0"/>
-          </a:p>
-        </p:txBody>
-      </p:sp>
-      <p:sp>
-        <p:nvSpPr>
-          <p:cNvPr id="45" name="Shape 43"/>
-          <p:cNvSpPr/>
-          <p:nvPr/>
-        </p:nvSpPr>
-        <p:spPr>
-          <a:xfrm>
-            <a:off x="454880" y="4005072"/>
-            <a:ext cx="5532120" cy="548640"/>
-          </a:xfrm>
-          <a:prstGeom prst="rect">
-            <a:avLst/>
-          </a:prstGeom>
-          <a:solidFill>
-            <a:srgbClr val="FFFFFF"/>
-          </a:solidFill>
-          <a:ln w="6350">
-            <a:solidFill>
-              <a:srgbClr val="E2E8F0"/>
-            </a:solidFill>
-            <a:prstDash val="solid"/>
-          </a:ln>
-        </p:spPr>
-        <p:txBody>
-          <a:bodyPr/>
-          <a:lstStyle/>
-          <a:p>
-            <a:endParaRPr lang="en-US"/>
-          </a:p>
-        </p:txBody>
-      </p:sp>
-      <p:sp>
-        <p:nvSpPr>
-          <p:cNvPr id="46" name="Shape 44"/>
-          <p:cNvSpPr/>
-          <p:nvPr/>
-        </p:nvSpPr>
-        <p:spPr>
-          <a:xfrm>
-            <a:off x="454880" y="4005072"/>
-            <a:ext cx="45720" cy="548640"/>
-          </a:xfrm>
-          <a:prstGeom prst="rect">
-            <a:avLst/>
-          </a:prstGeom>
-          <a:solidFill>
-            <a:srgbClr val="F69E0B"/>
-          </a:solidFill>
-          <a:ln w="12700">
-            <a:noFill/>
-            <a:prstDash val="solid"/>
-          </a:ln>
-        </p:spPr>
-        <p:txBody>
-          <a:bodyPr/>
-          <a:lstStyle/>
-          <a:p>
-            <a:endParaRPr lang="en-US"/>
-          </a:p>
-        </p:txBody>
-      </p:sp>
-      <p:sp>
-        <p:nvSpPr>
-          <p:cNvPr id="47" name="Text 45"/>
-          <p:cNvSpPr/>
-          <p:nvPr/>
-        </p:nvSpPr>
-        <p:spPr>
-          <a:xfrm>
-            <a:off x="592040" y="4059936"/>
-            <a:ext cx="1828800" cy="182880"/>
-          </a:xfrm>
-          <a:prstGeom prst="rect">
-            <a:avLst/>
-          </a:prstGeom>
-          <a:noFill/>
-          <a:ln/>
-        </p:spPr>
-        <p:txBody>
-          <a:bodyPr wrap="square" lIns="0" tIns="0" rIns="0" bIns="0" rtlCol="0" anchor="ctr"/>
-          <a:lstStyle/>
-          <a:p>
-            <a:pPr marL="0" indent="0">
-              <a:buNone/>
-            </a:pPr>
-            <a:r>
-              <a:rPr lang="en-US" sz="700" b="1" kern="0" spc="200" dirty="0">
-                <a:solidFill>
-                  <a:srgbClr val="F59E0B"/>
-                </a:solidFill>
-                <a:latin typeface="Calibri" pitchFamily="34" charset="0"/>
-                <a:ea typeface="Calibri" pitchFamily="34" charset="-122"/>
-                <a:cs typeface="Calibri" pitchFamily="34" charset="-120"/>
-              </a:rPr>
-              <a:t>Skill — 03/06</a:t>
-            </a:r>
-            <a:endParaRPr lang="en-US" sz="700" dirty="0"/>
-          </a:p>
-        </p:txBody>
-      </p:sp>
-      <p:sp>
-        <p:nvSpPr>
-          <p:cNvPr id="48" name="Text 46"/>
-          <p:cNvSpPr/>
-          <p:nvPr/>
-        </p:nvSpPr>
-        <p:spPr>
-          <a:xfrm>
-            <a:off x="592040" y="4270248"/>
-            <a:ext cx="4114800" cy="219456"/>
-          </a:xfrm>
-          <a:prstGeom prst="rect">
-            <a:avLst/>
-          </a:prstGeom>
-          <a:noFill/>
-          <a:ln/>
-        </p:spPr>
-        <p:txBody>
-          <a:bodyPr wrap="square" lIns="0" tIns="0" rIns="0" bIns="0" rtlCol="0" anchor="ctr"/>
-          <a:lstStyle/>
-          <a:p>
-            <a:pPr marL="0" indent="0">
-              <a:buNone/>
-            </a:pPr>
-            <a:r>
-              <a:rPr lang="en-US" sz="1200" dirty="0">
-                <a:solidFill>
-                  <a:srgbClr val="0F172A"/>
-                </a:solidFill>
-                <a:latin typeface="Calibri" pitchFamily="34" charset="0"/>
-                <a:ea typeface="Calibri" pitchFamily="34" charset="-122"/>
-                <a:cs typeface="Calibri" pitchFamily="34" charset="-120"/>
-              </a:rPr>
-              <a:t>design-systems.md</a:t>
-            </a:r>
-            <a:endParaRPr lang="en-US" sz="1200" dirty="0"/>
-          </a:p>
-        </p:txBody>
-      </p:sp>
-      <p:sp>
-        <p:nvSpPr>
-          <p:cNvPr id="49" name="Text 47"/>
-          <p:cNvSpPr/>
-          <p:nvPr/>
-        </p:nvSpPr>
-        <p:spPr>
-          <a:xfrm>
-            <a:off x="4798280" y="4270248"/>
-            <a:ext cx="1051560" cy="219456"/>
-          </a:xfrm>
-          <a:prstGeom prst="rect">
-            <a:avLst/>
-          </a:prstGeom>
-          <a:noFill/>
-          <a:ln/>
-        </p:spPr>
-        <p:txBody>
-          <a:bodyPr wrap="square" lIns="0" tIns="0" rIns="0" bIns="0" rtlCol="0" anchor="ctr"/>
-          <a:lstStyle/>
-          <a:p>
-            <a:pPr marL="0" indent="0" algn="r">
-              <a:buNone/>
-            </a:pPr>
-            <a:r>
-              <a:rPr lang="en-US" sz="1000" dirty="0">
-                <a:solidFill>
-                  <a:srgbClr val="64748B"/>
-                </a:solidFill>
-                <a:latin typeface="Calibri" pitchFamily="34" charset="0"/>
-                <a:ea typeface="Calibri" pitchFamily="34" charset="-122"/>
-                <a:cs typeface="Calibri" pitchFamily="34" charset="-120"/>
-              </a:rPr>
-              <a:t>Ideate + Deliver</a:t>
-            </a:r>
-            <a:endParaRPr lang="en-US" sz="1000" dirty="0"/>
-          </a:p>
-        </p:txBody>
-      </p:sp>
-      <p:sp>
-        <p:nvSpPr>
-          <p:cNvPr id="50" name="Shape 48"/>
-          <p:cNvSpPr/>
-          <p:nvPr/>
-        </p:nvSpPr>
-        <p:spPr>
-          <a:xfrm>
-            <a:off x="6215600" y="4005072"/>
-            <a:ext cx="5532120" cy="548640"/>
-          </a:xfrm>
-          <a:prstGeom prst="rect">
-            <a:avLst/>
-          </a:prstGeom>
-          <a:solidFill>
-            <a:srgbClr val="FFFFFF"/>
-          </a:solidFill>
-          <a:ln w="6350">
-            <a:solidFill>
-              <a:srgbClr val="E2E8F0"/>
-            </a:solidFill>
-            <a:prstDash val="solid"/>
-          </a:ln>
-        </p:spPr>
-        <p:txBody>
-          <a:bodyPr/>
-          <a:lstStyle/>
-          <a:p>
-            <a:endParaRPr lang="en-US"/>
-          </a:p>
-        </p:txBody>
-      </p:sp>
-      <p:sp>
-        <p:nvSpPr>
-          <p:cNvPr id="51" name="Shape 49"/>
-          <p:cNvSpPr/>
-          <p:nvPr/>
-        </p:nvSpPr>
-        <p:spPr>
-          <a:xfrm>
-            <a:off x="6215600" y="4005072"/>
-            <a:ext cx="45720" cy="548640"/>
-          </a:xfrm>
-          <a:prstGeom prst="rect">
-            <a:avLst/>
-          </a:prstGeom>
-          <a:solidFill>
-            <a:schemeClr val="bg2"/>
-          </a:solidFill>
-          <a:ln w="12700">
-            <a:noFill/>
-            <a:prstDash val="solid"/>
-          </a:ln>
-        </p:spPr>
-        <p:txBody>
-          <a:bodyPr/>
-          <a:lstStyle/>
-          <a:p>
-            <a:endParaRPr lang="en-US"/>
-          </a:p>
-        </p:txBody>
-      </p:sp>
-      <p:sp>
-        <p:nvSpPr>
-          <p:cNvPr id="52" name="Text 50"/>
-          <p:cNvSpPr/>
-          <p:nvPr/>
-        </p:nvSpPr>
-        <p:spPr>
-          <a:xfrm>
-            <a:off x="6352760" y="4059936"/>
-            <a:ext cx="1828800" cy="182880"/>
-          </a:xfrm>
-          <a:prstGeom prst="rect">
-            <a:avLst/>
-          </a:prstGeom>
-          <a:noFill/>
-          <a:ln/>
-        </p:spPr>
-        <p:txBody>
-          <a:bodyPr wrap="square" lIns="0" tIns="0" rIns="0" bIns="0" rtlCol="0" anchor="ctr"/>
-          <a:lstStyle/>
-          <a:p>
-            <a:pPr marL="0" indent="0">
-              <a:buNone/>
-            </a:pPr>
-            <a:r>
-              <a:rPr lang="en-US" sz="700" b="1" kern="0" spc="200" dirty="0">
-                <a:solidFill>
-                  <a:schemeClr val="bg1">
-                    <a:lumMod val="50000"/>
-                  </a:schemeClr>
-                </a:solidFill>
-                <a:latin typeface="Calibri" pitchFamily="34" charset="0"/>
-                <a:ea typeface="Calibri" pitchFamily="34" charset="-122"/>
-                <a:cs typeface="Calibri" pitchFamily="34" charset="-120"/>
-              </a:rPr>
-              <a:t>Skill — ALL</a:t>
-            </a:r>
-            <a:endParaRPr lang="en-US" sz="700" dirty="0">
-              <a:solidFill>
-                <a:schemeClr val="bg1">
-                  <a:lumMod val="50000"/>
-                </a:schemeClr>
-              </a:solidFill>
-            </a:endParaRPr>
-          </a:p>
-        </p:txBody>
-      </p:sp>
-      <p:sp>
-        <p:nvSpPr>
-          <p:cNvPr id="53" name="Text 51"/>
-          <p:cNvSpPr/>
-          <p:nvPr/>
-        </p:nvSpPr>
-        <p:spPr>
-          <a:xfrm>
-            <a:off x="6352760" y="4270248"/>
-            <a:ext cx="4114800" cy="219456"/>
-          </a:xfrm>
-          <a:prstGeom prst="rect">
-            <a:avLst/>
-          </a:prstGeom>
-          <a:noFill/>
-          <a:ln/>
-        </p:spPr>
-        <p:txBody>
-          <a:bodyPr wrap="square" lIns="0" tIns="0" rIns="0" bIns="0" rtlCol="0" anchor="ctr"/>
-          <a:lstStyle/>
-          <a:p>
-            <a:pPr marL="0" indent="0">
-              <a:buNone/>
-            </a:pPr>
-            <a:r>
-              <a:rPr lang="en-US" sz="1200" dirty="0">
-                <a:solidFill>
-                  <a:srgbClr val="0F172A"/>
-                </a:solidFill>
-                <a:latin typeface="Calibri" pitchFamily="34" charset="0"/>
-                <a:ea typeface="Calibri" pitchFamily="34" charset="-122"/>
-                <a:cs typeface="Calibri" pitchFamily="34" charset="-120"/>
-              </a:rPr>
-              <a:t>figma-playbook.md</a:t>
-            </a:r>
-            <a:endParaRPr lang="en-US" sz="1200" dirty="0"/>
-          </a:p>
-        </p:txBody>
-      </p:sp>
-      <p:sp>
-        <p:nvSpPr>
-          <p:cNvPr id="54" name="Text 52"/>
-          <p:cNvSpPr/>
-          <p:nvPr/>
-        </p:nvSpPr>
-        <p:spPr>
-          <a:xfrm>
-            <a:off x="10559000" y="4270248"/>
-            <a:ext cx="1051560" cy="219456"/>
-          </a:xfrm>
-          <a:prstGeom prst="rect">
-            <a:avLst/>
-          </a:prstGeom>
-          <a:noFill/>
-          <a:ln/>
-        </p:spPr>
-        <p:txBody>
-          <a:bodyPr wrap="square" lIns="0" tIns="0" rIns="0" bIns="0" rtlCol="0" anchor="ctr"/>
-          <a:lstStyle/>
-          <a:p>
-            <a:pPr marL="0" indent="0" algn="r">
-              <a:buNone/>
-            </a:pPr>
-            <a:r>
-              <a:rPr lang="en-US" sz="1000" dirty="0">
-                <a:solidFill>
-                  <a:srgbClr val="64748B"/>
-                </a:solidFill>
-                <a:latin typeface="Calibri" pitchFamily="34" charset="0"/>
-                <a:ea typeface="Calibri" pitchFamily="34" charset="-122"/>
-                <a:cs typeface="Calibri" pitchFamily="34" charset="-120"/>
-              </a:rPr>
-              <a:t>All phases</a:t>
-            </a:r>
-            <a:endParaRPr lang="en-US" sz="1000" dirty="0"/>
-          </a:p>
-        </p:txBody>
-      </p:sp>
-      <p:sp>
-        <p:nvSpPr>
-          <p:cNvPr id="55" name="Shape 53"/>
-          <p:cNvSpPr/>
-          <p:nvPr/>
-        </p:nvSpPr>
-        <p:spPr>
-          <a:xfrm>
-            <a:off x="454880" y="4663440"/>
-            <a:ext cx="5532120" cy="548640"/>
-          </a:xfrm>
-          <a:prstGeom prst="rect">
-            <a:avLst/>
-          </a:prstGeom>
-          <a:solidFill>
-            <a:srgbClr val="FFFFFF"/>
-          </a:solidFill>
-          <a:ln w="6350">
-            <a:solidFill>
-              <a:srgbClr val="E2E8F0"/>
-            </a:solidFill>
-            <a:prstDash val="solid"/>
-          </a:ln>
-        </p:spPr>
-        <p:txBody>
-          <a:bodyPr/>
-          <a:lstStyle/>
-          <a:p>
-            <a:endParaRPr lang="en-US"/>
-          </a:p>
-        </p:txBody>
-      </p:sp>
-      <p:sp>
-        <p:nvSpPr>
-          <p:cNvPr id="56" name="Shape 54"/>
-          <p:cNvSpPr/>
-          <p:nvPr/>
-        </p:nvSpPr>
-        <p:spPr>
-          <a:xfrm>
-            <a:off x="454880" y="4663440"/>
-            <a:ext cx="45720" cy="548640"/>
-          </a:xfrm>
-          <a:prstGeom prst="rect">
-            <a:avLst/>
-          </a:prstGeom>
-          <a:solidFill>
-            <a:schemeClr val="bg2"/>
-          </a:solidFill>
-          <a:ln w="12700">
-            <a:noFill/>
-            <a:prstDash val="solid"/>
-          </a:ln>
-        </p:spPr>
-        <p:txBody>
-          <a:bodyPr/>
-          <a:lstStyle/>
-          <a:p>
-            <a:endParaRPr lang="en-US"/>
-          </a:p>
-        </p:txBody>
-      </p:sp>
-      <p:sp>
-        <p:nvSpPr>
-          <p:cNvPr id="57" name="Text 55"/>
-          <p:cNvSpPr/>
-          <p:nvPr/>
-        </p:nvSpPr>
-        <p:spPr>
-          <a:xfrm>
-            <a:off x="592040" y="4718304"/>
-            <a:ext cx="1828800" cy="182880"/>
-          </a:xfrm>
-          <a:prstGeom prst="rect">
-            <a:avLst/>
-          </a:prstGeom>
-          <a:noFill/>
-          <a:ln/>
-        </p:spPr>
-        <p:txBody>
-          <a:bodyPr wrap="square" lIns="0" tIns="0" rIns="0" bIns="0" rtlCol="0" anchor="ctr"/>
-          <a:lstStyle/>
-          <a:p>
-            <a:pPr marL="0" indent="0">
-              <a:buNone/>
-            </a:pPr>
-            <a:r>
-              <a:rPr lang="en-US" sz="700" b="1" kern="0" spc="200" dirty="0">
-                <a:solidFill>
-                  <a:schemeClr val="bg1">
-                    <a:lumMod val="50000"/>
-                  </a:schemeClr>
-                </a:solidFill>
-                <a:latin typeface="Calibri" pitchFamily="34" charset="0"/>
-                <a:ea typeface="Calibri" pitchFamily="34" charset="-122"/>
-                <a:cs typeface="Calibri" pitchFamily="34" charset="-120"/>
-              </a:rPr>
-              <a:t>Artifact</a:t>
-            </a:r>
-            <a:endParaRPr lang="en-US" sz="700" dirty="0">
-              <a:solidFill>
-                <a:schemeClr val="bg1">
-                  <a:lumMod val="50000"/>
-                </a:schemeClr>
-              </a:solidFill>
-            </a:endParaRPr>
-          </a:p>
-        </p:txBody>
-      </p:sp>
-      <p:sp>
-        <p:nvSpPr>
-          <p:cNvPr id="58" name="Text 56"/>
-          <p:cNvSpPr/>
-          <p:nvPr/>
-        </p:nvSpPr>
-        <p:spPr>
-          <a:xfrm>
-            <a:off x="592040" y="4928616"/>
-            <a:ext cx="4114800" cy="219456"/>
-          </a:xfrm>
-          <a:prstGeom prst="rect">
-            <a:avLst/>
-          </a:prstGeom>
-          <a:noFill/>
-          <a:ln/>
-        </p:spPr>
-        <p:txBody>
-          <a:bodyPr wrap="square" lIns="0" tIns="0" rIns="0" bIns="0" rtlCol="0" anchor="ctr"/>
-          <a:lstStyle/>
-          <a:p>
-            <a:pPr marL="0" indent="0">
-              <a:buNone/>
-            </a:pPr>
-            <a:r>
-              <a:rPr lang="en-US" sz="1200" dirty="0">
-                <a:solidFill>
-                  <a:srgbClr val="0F172A"/>
-                </a:solidFill>
-                <a:latin typeface="Calibri" pitchFamily="34" charset="0"/>
-                <a:ea typeface="Calibri" pitchFamily="34" charset="-122"/>
-                <a:cs typeface="Calibri" pitchFamily="34" charset="-120"/>
-              </a:rPr>
-              <a:t>design-process-system.jsx</a:t>
-            </a:r>
-            <a:endParaRPr lang="en-US" sz="1200" dirty="0"/>
-          </a:p>
-        </p:txBody>
-      </p:sp>
-      <p:sp>
-        <p:nvSpPr>
-          <p:cNvPr id="59" name="Text 57"/>
-          <p:cNvSpPr/>
-          <p:nvPr/>
-        </p:nvSpPr>
-        <p:spPr>
-          <a:xfrm>
-            <a:off x="4798280" y="4928616"/>
-            <a:ext cx="1051560" cy="219456"/>
-          </a:xfrm>
-          <a:prstGeom prst="rect">
-            <a:avLst/>
-          </a:prstGeom>
-          <a:noFill/>
-          <a:ln/>
-        </p:spPr>
-        <p:txBody>
-          <a:bodyPr wrap="square" lIns="0" tIns="0" rIns="0" bIns="0" rtlCol="0" anchor="ctr"/>
-          <a:lstStyle/>
-          <a:p>
-            <a:pPr marL="0" indent="0" algn="r">
-              <a:buNone/>
-            </a:pPr>
-            <a:r>
-              <a:rPr lang="en-US" sz="1000" dirty="0">
-                <a:solidFill>
-                  <a:srgbClr val="64748B"/>
-                </a:solidFill>
-                <a:latin typeface="Calibri" pitchFamily="34" charset="0"/>
-                <a:ea typeface="Calibri" pitchFamily="34" charset="-122"/>
-                <a:cs typeface="Calibri" pitchFamily="34" charset="-120"/>
-              </a:rPr>
-              <a:t>Phase explorer</a:t>
-            </a:r>
-            <a:endParaRPr lang="en-US" sz="1000" dirty="0"/>
-          </a:p>
-        </p:txBody>
-      </p:sp>
-      <p:sp>
-        <p:nvSpPr>
-          <p:cNvPr id="60" name="Shape 58"/>
-          <p:cNvSpPr/>
-          <p:nvPr/>
-        </p:nvSpPr>
-        <p:spPr>
-          <a:xfrm>
-            <a:off x="6215600" y="4663440"/>
-            <a:ext cx="5532120" cy="548640"/>
-          </a:xfrm>
-          <a:prstGeom prst="rect">
-            <a:avLst/>
-          </a:prstGeom>
-          <a:solidFill>
-            <a:srgbClr val="FFFFFF"/>
-          </a:solidFill>
-          <a:ln w="6350">
-            <a:solidFill>
-              <a:srgbClr val="E2E8F0"/>
-            </a:solidFill>
-            <a:prstDash val="solid"/>
-          </a:ln>
-        </p:spPr>
-        <p:txBody>
-          <a:bodyPr/>
-          <a:lstStyle/>
-          <a:p>
-            <a:endParaRPr lang="en-US"/>
-          </a:p>
-        </p:txBody>
-      </p:sp>
-      <p:sp>
-        <p:nvSpPr>
-          <p:cNvPr id="61" name="Shape 59"/>
-          <p:cNvSpPr/>
-          <p:nvPr/>
-        </p:nvSpPr>
-        <p:spPr>
-          <a:xfrm>
-            <a:off x="6215600" y="4663440"/>
-            <a:ext cx="45720" cy="548640"/>
-          </a:xfrm>
-          <a:prstGeom prst="rect">
-            <a:avLst/>
-          </a:prstGeom>
-          <a:solidFill>
-            <a:schemeClr val="bg2"/>
-          </a:solidFill>
-          <a:ln w="12700">
-            <a:noFill/>
-            <a:prstDash val="solid"/>
-          </a:ln>
-        </p:spPr>
-        <p:txBody>
-          <a:bodyPr/>
-          <a:lstStyle/>
-          <a:p>
-            <a:endParaRPr lang="en-US"/>
-          </a:p>
-        </p:txBody>
-      </p:sp>
-      <p:sp>
-        <p:nvSpPr>
-          <p:cNvPr id="62" name="Text 60"/>
-          <p:cNvSpPr/>
-          <p:nvPr/>
-        </p:nvSpPr>
-        <p:spPr>
-          <a:xfrm>
-            <a:off x="6352760" y="4718304"/>
-            <a:ext cx="1828800" cy="182880"/>
-          </a:xfrm>
-          <a:prstGeom prst="rect">
-            <a:avLst/>
-          </a:prstGeom>
-          <a:noFill/>
-          <a:ln/>
-        </p:spPr>
-        <p:txBody>
-          <a:bodyPr wrap="square" lIns="0" tIns="0" rIns="0" bIns="0" rtlCol="0" anchor="ctr"/>
-          <a:lstStyle/>
-          <a:p>
-            <a:pPr marL="0" indent="0">
-              <a:buNone/>
-            </a:pPr>
-            <a:r>
-              <a:rPr lang="en-US" sz="700" b="1" kern="0" spc="200" dirty="0">
-                <a:solidFill>
-                  <a:schemeClr val="bg1">
-                    <a:lumMod val="50000"/>
-                  </a:schemeClr>
-                </a:solidFill>
-                <a:latin typeface="Calibri" pitchFamily="34" charset="0"/>
-                <a:ea typeface="Calibri" pitchFamily="34" charset="-122"/>
-                <a:cs typeface="Calibri" pitchFamily="34" charset="-120"/>
-              </a:rPr>
-              <a:t>Artifact</a:t>
-            </a:r>
-            <a:endParaRPr lang="en-US" sz="700" dirty="0">
-              <a:solidFill>
-                <a:schemeClr val="bg1">
-                  <a:lumMod val="50000"/>
-                </a:schemeClr>
-              </a:solidFill>
-            </a:endParaRPr>
-          </a:p>
-        </p:txBody>
-      </p:sp>
-      <p:sp>
-        <p:nvSpPr>
-          <p:cNvPr id="63" name="Text 61"/>
-          <p:cNvSpPr/>
-          <p:nvPr/>
-        </p:nvSpPr>
-        <p:spPr>
-          <a:xfrm>
-            <a:off x="6352760" y="4928616"/>
-            <a:ext cx="4114800" cy="219456"/>
-          </a:xfrm>
-          <a:prstGeom prst="rect">
-            <a:avLst/>
-          </a:prstGeom>
-          <a:noFill/>
-          <a:ln/>
-        </p:spPr>
-        <p:txBody>
-          <a:bodyPr wrap="square" lIns="0" tIns="0" rIns="0" bIns="0" rtlCol="0" anchor="ctr"/>
-          <a:lstStyle/>
-          <a:p>
-            <a:pPr marL="0" indent="0">
-              <a:buNone/>
-            </a:pPr>
-            <a:r>
-              <a:rPr lang="en-US" sz="1200" dirty="0">
-                <a:solidFill>
-                  <a:srgbClr val="0F172A"/>
-                </a:solidFill>
-                <a:latin typeface="Calibri" pitchFamily="34" charset="0"/>
-                <a:ea typeface="Calibri" pitchFamily="34" charset="-122"/>
-                <a:cs typeface="Calibri" pitchFamily="34" charset="-120"/>
-              </a:rPr>
-              <a:t>design-tokens-system.jsx</a:t>
-            </a:r>
-            <a:endParaRPr lang="en-US" sz="1200" dirty="0"/>
-          </a:p>
-        </p:txBody>
-      </p:sp>
-      <p:sp>
-        <p:nvSpPr>
-          <p:cNvPr id="64" name="Text 62"/>
-          <p:cNvSpPr/>
-          <p:nvPr/>
-        </p:nvSpPr>
-        <p:spPr>
-          <a:xfrm>
-            <a:off x="10559000" y="4928616"/>
-            <a:ext cx="1051560" cy="219456"/>
-          </a:xfrm>
-          <a:prstGeom prst="rect">
-            <a:avLst/>
-          </a:prstGeom>
-          <a:noFill/>
-          <a:ln/>
-        </p:spPr>
-        <p:txBody>
-          <a:bodyPr wrap="square" lIns="0" tIns="0" rIns="0" bIns="0" rtlCol="0" anchor="ctr"/>
-          <a:lstStyle/>
-          <a:p>
-            <a:pPr marL="0" indent="0" algn="r">
-              <a:buNone/>
-            </a:pPr>
-            <a:r>
-              <a:rPr lang="en-US" sz="1000" dirty="0">
-                <a:solidFill>
-                  <a:srgbClr val="64748B"/>
-                </a:solidFill>
-                <a:latin typeface="Calibri" pitchFamily="34" charset="0"/>
-                <a:ea typeface="Calibri" pitchFamily="34" charset="-122"/>
-                <a:cs typeface="Calibri" pitchFamily="34" charset="-120"/>
-              </a:rPr>
-              <a:t>Token builder</a:t>
-            </a:r>
-            <a:endParaRPr lang="en-US" sz="1000" dirty="0"/>
-          </a:p>
-        </p:txBody>
-      </p:sp>
-      <p:sp>
-        <p:nvSpPr>
-          <p:cNvPr id="65" name="Shape 63"/>
-          <p:cNvSpPr/>
-          <p:nvPr/>
-        </p:nvSpPr>
-        <p:spPr>
-          <a:xfrm>
-            <a:off x="454880" y="5321808"/>
-            <a:ext cx="5532120" cy="548640"/>
-          </a:xfrm>
-          <a:prstGeom prst="rect">
-            <a:avLst/>
-          </a:prstGeom>
-          <a:solidFill>
-            <a:srgbClr val="FFFFFF"/>
-          </a:solidFill>
-          <a:ln w="6350">
-            <a:solidFill>
-              <a:srgbClr val="E2E8F0"/>
-            </a:solidFill>
-            <a:prstDash val="solid"/>
-          </a:ln>
-        </p:spPr>
-        <p:txBody>
-          <a:bodyPr/>
-          <a:lstStyle/>
-          <a:p>
-            <a:endParaRPr lang="en-US"/>
-          </a:p>
-        </p:txBody>
-      </p:sp>
-      <p:sp>
-        <p:nvSpPr>
-          <p:cNvPr id="66" name="Shape 64"/>
-          <p:cNvSpPr/>
-          <p:nvPr/>
-        </p:nvSpPr>
-        <p:spPr>
-          <a:xfrm>
-            <a:off x="454880" y="5321808"/>
-            <a:ext cx="45720" cy="548640"/>
-          </a:xfrm>
-          <a:prstGeom prst="rect">
-            <a:avLst/>
-          </a:prstGeom>
-          <a:solidFill>
-            <a:schemeClr val="bg2"/>
-          </a:solidFill>
-          <a:ln w="12700">
-            <a:noFill/>
-            <a:prstDash val="solid"/>
-          </a:ln>
-        </p:spPr>
-        <p:txBody>
-          <a:bodyPr/>
-          <a:lstStyle/>
-          <a:p>
-            <a:endParaRPr lang="en-US"/>
-          </a:p>
-        </p:txBody>
-      </p:sp>
-      <p:sp>
-        <p:nvSpPr>
-          <p:cNvPr id="67" name="Text 65"/>
-          <p:cNvSpPr/>
-          <p:nvPr/>
-        </p:nvSpPr>
-        <p:spPr>
-          <a:xfrm>
-            <a:off x="592040" y="5376672"/>
-            <a:ext cx="1828800" cy="182880"/>
-          </a:xfrm>
-          <a:prstGeom prst="rect">
-            <a:avLst/>
-          </a:prstGeom>
-          <a:noFill/>
-          <a:ln/>
-        </p:spPr>
-        <p:txBody>
-          <a:bodyPr wrap="square" lIns="0" tIns="0" rIns="0" bIns="0" rtlCol="0" anchor="ctr"/>
-          <a:lstStyle/>
-          <a:p>
-            <a:pPr marL="0" indent="0">
-              <a:buNone/>
-            </a:pPr>
-            <a:r>
-              <a:rPr lang="en-US" sz="700" b="1" kern="0" spc="200" dirty="0">
-                <a:solidFill>
-                  <a:schemeClr val="bg1">
-                    <a:lumMod val="50000"/>
-                  </a:schemeClr>
-                </a:solidFill>
-                <a:latin typeface="Calibri" pitchFamily="34" charset="0"/>
-                <a:ea typeface="Calibri" pitchFamily="34" charset="-122"/>
-                <a:cs typeface="Calibri" pitchFamily="34" charset="-120"/>
-              </a:rPr>
-              <a:t>Artifact</a:t>
-            </a:r>
-            <a:endParaRPr lang="en-US" sz="700" dirty="0">
-              <a:solidFill>
-                <a:schemeClr val="bg1">
-                  <a:lumMod val="50000"/>
-                </a:schemeClr>
-              </a:solidFill>
-            </a:endParaRPr>
-          </a:p>
-        </p:txBody>
-      </p:sp>
-      <p:sp>
-        <p:nvSpPr>
-          <p:cNvPr id="68" name="Text 66"/>
-          <p:cNvSpPr/>
-          <p:nvPr/>
-        </p:nvSpPr>
-        <p:spPr>
-          <a:xfrm>
-            <a:off x="592040" y="5586984"/>
-            <a:ext cx="4114800" cy="219456"/>
-          </a:xfrm>
-          <a:prstGeom prst="rect">
-            <a:avLst/>
-          </a:prstGeom>
-          <a:noFill/>
-          <a:ln/>
-        </p:spPr>
-        <p:txBody>
-          <a:bodyPr wrap="square" lIns="0" tIns="0" rIns="0" bIns="0" rtlCol="0" anchor="ctr"/>
-          <a:lstStyle/>
-          <a:p>
-            <a:pPr marL="0" indent="0">
-              <a:buNone/>
-            </a:pPr>
-            <a:r>
-              <a:rPr lang="en-US" sz="1200" dirty="0">
-                <a:solidFill>
-                  <a:srgbClr val="0F172A"/>
-                </a:solidFill>
-                <a:latin typeface="Calibri" pitchFamily="34" charset="0"/>
-                <a:ea typeface="Calibri" pitchFamily="34" charset="-122"/>
-                <a:cs typeface="Calibri" pitchFamily="34" charset="-120"/>
-              </a:rPr>
-              <a:t>design-system-checklist.jsx</a:t>
-            </a:r>
-            <a:endParaRPr lang="en-US" sz="1200" dirty="0"/>
-          </a:p>
-        </p:txBody>
-      </p:sp>
-      <p:sp>
-        <p:nvSpPr>
-          <p:cNvPr id="69" name="Text 67"/>
-          <p:cNvSpPr/>
-          <p:nvPr/>
-        </p:nvSpPr>
-        <p:spPr>
-          <a:xfrm>
-            <a:off x="4798280" y="5586984"/>
-            <a:ext cx="1051560" cy="219456"/>
-          </a:xfrm>
-          <a:prstGeom prst="rect">
-            <a:avLst/>
-          </a:prstGeom>
-          <a:noFill/>
-          <a:ln/>
-        </p:spPr>
-        <p:txBody>
-          <a:bodyPr wrap="square" lIns="0" tIns="0" rIns="0" bIns="0" rtlCol="0" anchor="ctr"/>
-          <a:lstStyle/>
-          <a:p>
-            <a:pPr marL="0" indent="0" algn="r">
-              <a:buNone/>
-            </a:pPr>
-            <a:r>
-              <a:rPr lang="en-US" sz="1000" dirty="0">
-                <a:solidFill>
-                  <a:srgbClr val="64748B"/>
-                </a:solidFill>
-                <a:latin typeface="Calibri" pitchFamily="34" charset="0"/>
-                <a:ea typeface="Calibri" pitchFamily="34" charset="-122"/>
-                <a:cs typeface="Calibri" pitchFamily="34" charset="-120"/>
-              </a:rPr>
-              <a:t>Audit tool</a:t>
-            </a:r>
-            <a:endParaRPr lang="en-US" sz="1000" dirty="0"/>
-          </a:p>
-        </p:txBody>
-      </p:sp>
-      <p:sp>
-        <p:nvSpPr>
-          <p:cNvPr id="70" name="Shape 68"/>
-          <p:cNvSpPr/>
-          <p:nvPr/>
-        </p:nvSpPr>
-        <p:spPr>
-          <a:xfrm>
-            <a:off x="6215600" y="5321808"/>
-            <a:ext cx="5532120" cy="548640"/>
-          </a:xfrm>
-          <a:prstGeom prst="rect">
-            <a:avLst/>
-          </a:prstGeom>
-          <a:solidFill>
-            <a:srgbClr val="FFFFFF"/>
-          </a:solidFill>
-          <a:ln w="6350">
-            <a:solidFill>
-              <a:srgbClr val="E2E8F0"/>
-            </a:solidFill>
-            <a:prstDash val="solid"/>
-          </a:ln>
-        </p:spPr>
-        <p:txBody>
-          <a:bodyPr/>
-          <a:lstStyle/>
-          <a:p>
-            <a:endParaRPr lang="en-US"/>
-          </a:p>
-        </p:txBody>
-      </p:sp>
-      <p:sp>
-        <p:nvSpPr>
-          <p:cNvPr id="71" name="Shape 69"/>
-          <p:cNvSpPr/>
-          <p:nvPr/>
-        </p:nvSpPr>
-        <p:spPr>
-          <a:xfrm>
-            <a:off x="6215600" y="5321808"/>
-            <a:ext cx="45720" cy="548640"/>
-          </a:xfrm>
-          <a:prstGeom prst="rect">
-            <a:avLst/>
-          </a:prstGeom>
-          <a:solidFill>
-            <a:schemeClr val="bg2"/>
-          </a:solidFill>
-          <a:ln w="12700">
-            <a:noFill/>
-            <a:prstDash val="solid"/>
-          </a:ln>
-        </p:spPr>
-        <p:txBody>
-          <a:bodyPr/>
-          <a:lstStyle/>
-          <a:p>
-            <a:endParaRPr lang="en-US"/>
-          </a:p>
-        </p:txBody>
-      </p:sp>
-      <p:sp>
-        <p:nvSpPr>
-          <p:cNvPr id="72" name="Text 70"/>
-          <p:cNvSpPr/>
-          <p:nvPr/>
-        </p:nvSpPr>
-        <p:spPr>
-          <a:xfrm>
-            <a:off x="6352760" y="5376672"/>
-            <a:ext cx="1828800" cy="182880"/>
-          </a:xfrm>
-          <a:prstGeom prst="rect">
-            <a:avLst/>
-          </a:prstGeom>
-          <a:noFill/>
-          <a:ln/>
-        </p:spPr>
-        <p:txBody>
-          <a:bodyPr wrap="square" lIns="0" tIns="0" rIns="0" bIns="0" rtlCol="0" anchor="ctr"/>
-          <a:lstStyle/>
-          <a:p>
-            <a:pPr marL="0" indent="0">
-              <a:buNone/>
-            </a:pPr>
-            <a:r>
-              <a:rPr lang="en-US" sz="700" b="1" kern="0" spc="200" dirty="0">
-                <a:solidFill>
-                  <a:schemeClr val="bg1">
-                    <a:lumMod val="50000"/>
-                  </a:schemeClr>
-                </a:solidFill>
-                <a:latin typeface="Calibri" pitchFamily="34" charset="0"/>
-                <a:ea typeface="Calibri" pitchFamily="34" charset="-122"/>
-                <a:cs typeface="Calibri" pitchFamily="34" charset="-120"/>
-              </a:rPr>
-              <a:t>Artifact</a:t>
-            </a:r>
-            <a:endParaRPr lang="en-US" sz="700" dirty="0">
-              <a:solidFill>
-                <a:schemeClr val="bg1">
-                  <a:lumMod val="50000"/>
-                </a:schemeClr>
-              </a:solidFill>
-            </a:endParaRPr>
-          </a:p>
-        </p:txBody>
-      </p:sp>
-      <p:sp>
-        <p:nvSpPr>
-          <p:cNvPr id="73" name="Text 71"/>
-          <p:cNvSpPr/>
-          <p:nvPr/>
-        </p:nvSpPr>
-        <p:spPr>
-          <a:xfrm>
-            <a:off x="6352760" y="5586984"/>
-            <a:ext cx="4114800" cy="219456"/>
-          </a:xfrm>
-          <a:prstGeom prst="rect">
-            <a:avLst/>
-          </a:prstGeom>
-          <a:noFill/>
-          <a:ln/>
-        </p:spPr>
-        <p:txBody>
-          <a:bodyPr wrap="square" lIns="0" tIns="0" rIns="0" bIns="0" rtlCol="0" anchor="ctr"/>
-          <a:lstStyle/>
-          <a:p>
-            <a:pPr marL="0" indent="0">
-              <a:buNone/>
-            </a:pPr>
-            <a:r>
-              <a:rPr lang="en-US" sz="1200" dirty="0">
-                <a:solidFill>
-                  <a:srgbClr val="0F172A"/>
-                </a:solidFill>
-                <a:latin typeface="Calibri" pitchFamily="34" charset="0"/>
-                <a:ea typeface="Calibri" pitchFamily="34" charset="-122"/>
-                <a:cs typeface="Calibri" pitchFamily="34" charset="-120"/>
-              </a:rPr>
-              <a:t>m3-token-reference.jsx</a:t>
-            </a:r>
-            <a:endParaRPr lang="en-US" sz="1200" dirty="0"/>
-          </a:p>
-        </p:txBody>
-      </p:sp>
-      <p:sp>
-        <p:nvSpPr>
-          <p:cNvPr id="74" name="Text 72"/>
-          <p:cNvSpPr/>
-          <p:nvPr/>
-        </p:nvSpPr>
-        <p:spPr>
-          <a:xfrm>
-            <a:off x="10559000" y="5586984"/>
-            <a:ext cx="1051560" cy="219456"/>
-          </a:xfrm>
-          <a:prstGeom prst="rect">
-            <a:avLst/>
-          </a:prstGeom>
-          <a:noFill/>
-          <a:ln/>
-        </p:spPr>
-        <p:txBody>
-          <a:bodyPr wrap="square" lIns="0" tIns="0" rIns="0" bIns="0" rtlCol="0" anchor="ctr"/>
-          <a:lstStyle/>
-          <a:p>
-            <a:pPr marL="0" indent="0" algn="r">
-              <a:buNone/>
-            </a:pPr>
-            <a:r>
-              <a:rPr lang="en-US" sz="1000" dirty="0">
-                <a:solidFill>
-                  <a:srgbClr val="64748B"/>
-                </a:solidFill>
-                <a:latin typeface="Calibri" pitchFamily="34" charset="0"/>
-                <a:ea typeface="Calibri" pitchFamily="34" charset="-122"/>
-                <a:cs typeface="Calibri" pitchFamily="34" charset="-120"/>
-              </a:rPr>
-              <a:t>M3 reference</a:t>
-            </a:r>
-            <a:endParaRPr lang="en-US" sz="1000" dirty="0"/>
           </a:p>
         </p:txBody>
       </p:sp>
@@ -18114,7 +16241,7 @@
                 <a:ea typeface="Calibri" pitchFamily="34" charset="-122"/>
                 <a:cs typeface="Calibri" pitchFamily="34" charset="-120"/>
               </a:rPr>
-              <a:t>2 / 20</a:t>
+              <a:t>2 / 21</a:t>
             </a:r>
             <a:endParaRPr lang="en-US" sz="900" dirty="0"/>
           </a:p>
@@ -19039,6 +17166,2702 @@
 </file>
 
 <file path=ppt/slides/slide20.xml><?xml version="1.0" encoding="utf-8"?>
+<p:sld xmlns:a="http://schemas.openxmlformats.org/drawingml/2006/main" xmlns:r="http://schemas.openxmlformats.org/officeDocument/2006/relationships" xmlns:p="http://schemas.openxmlformats.org/presentationml/2006/main">
+  <p:cSld name="Slide 17">
+    <p:bg>
+      <p:bgPr>
+        <a:solidFill>
+          <a:srgbClr val="F8FAFC"/>
+        </a:solidFill>
+        <a:effectLst/>
+      </p:bgPr>
+    </p:bg>
+    <p:spTree>
+      <p:nvGrpSpPr>
+        <p:cNvPr id="1" name=""/>
+        <p:cNvGrpSpPr/>
+        <p:nvPr/>
+      </p:nvGrpSpPr>
+      <p:grpSpPr>
+        <a:xfrm>
+          <a:off x="0" y="0"/>
+          <a:ext cx="0" cy="0"/>
+          <a:chOff x="0" y="0"/>
+          <a:chExt cx="0" cy="0"/>
+        </a:xfrm>
+      </p:grpSpPr>
+      <p:sp>
+        <p:nvSpPr>
+          <p:cNvPr id="2" name="Text 0"/>
+          <p:cNvSpPr/>
+          <p:nvPr/>
+        </p:nvSpPr>
+        <p:spPr>
+          <a:xfrm>
+            <a:off x="11064240" y="6510528"/>
+            <a:ext cx="914400" cy="228600"/>
+          </a:xfrm>
+          <a:prstGeom prst="rect">
+            <a:avLst/>
+          </a:prstGeom>
+          <a:noFill/>
+          <a:ln/>
+        </p:spPr>
+        <p:txBody>
+          <a:bodyPr wrap="square" lIns="0" tIns="0" rIns="0" bIns="0" rtlCol="0" anchor="ctr"/>
+          <a:lstStyle/>
+          <a:p>
+            <a:pPr marL="0" indent="0" algn="r">
+              <a:buNone/>
+            </a:pPr>
+            <a:r>
+              <a:rPr lang="en-US" sz="900" dirty="0">
+                <a:solidFill>
+                  <a:srgbClr val="64748B"/>
+                </a:solidFill>
+                <a:latin typeface="Calibri" pitchFamily="34" charset="0"/>
+                <a:ea typeface="Calibri" pitchFamily="34" charset="-122"/>
+                <a:cs typeface="Calibri" pitchFamily="34" charset="-120"/>
+              </a:rPr>
+              <a:t>20 / 21</a:t>
+            </a:r>
+            <a:endParaRPr lang="en-US" sz="900" dirty="0"/>
+          </a:p>
+        </p:txBody>
+      </p:sp>
+      <p:sp>
+        <p:nvSpPr>
+          <p:cNvPr id="3" name="Text 1"/>
+          <p:cNvSpPr/>
+          <p:nvPr/>
+        </p:nvSpPr>
+        <p:spPr>
+          <a:xfrm>
+            <a:off x="752239" y="384048"/>
+            <a:ext cx="9144000" cy="201168"/>
+          </a:xfrm>
+          <a:prstGeom prst="rect">
+            <a:avLst/>
+          </a:prstGeom>
+          <a:noFill/>
+          <a:ln/>
+        </p:spPr>
+        <p:txBody>
+          <a:bodyPr wrap="square" lIns="0" tIns="0" rIns="0" bIns="0" rtlCol="0" anchor="ctr"/>
+          <a:lstStyle/>
+          <a:p>
+            <a:pPr marL="0" indent="0">
+              <a:buNone/>
+            </a:pPr>
+            <a:r>
+              <a:rPr lang="en-US" sz="900" b="1" kern="0" spc="300" dirty="0">
+                <a:solidFill>
+                  <a:srgbClr val="64748B"/>
+                </a:solidFill>
+                <a:latin typeface="Calibri" pitchFamily="34" charset="0"/>
+                <a:ea typeface="Calibri" pitchFamily="34" charset="-122"/>
+                <a:cs typeface="Calibri" pitchFamily="34" charset="-120"/>
+              </a:rPr>
+              <a:t>QUICK REFERENCE</a:t>
+            </a:r>
+            <a:endParaRPr lang="en-US" sz="900" dirty="0"/>
+          </a:p>
+        </p:txBody>
+      </p:sp>
+      <p:sp>
+        <p:nvSpPr>
+          <p:cNvPr id="4" name="Text 2"/>
+          <p:cNvSpPr/>
+          <p:nvPr/>
+        </p:nvSpPr>
+        <p:spPr>
+          <a:xfrm>
+            <a:off x="640080" y="594360"/>
+            <a:ext cx="9144000" cy="685800"/>
+          </a:xfrm>
+          <a:prstGeom prst="rect">
+            <a:avLst/>
+          </a:prstGeom>
+          <a:noFill/>
+          <a:ln/>
+        </p:spPr>
+        <p:txBody>
+          <a:bodyPr wrap="square" rtlCol="0" anchor="ctr"/>
+          <a:lstStyle/>
+          <a:p>
+            <a:pPr marL="0" indent="0">
+              <a:buNone/>
+            </a:pPr>
+            <a:r>
+              <a:rPr lang="en-US" sz="3200" b="1" dirty="0">
+                <a:solidFill>
+                  <a:srgbClr val="0F172A"/>
+                </a:solidFill>
+                <a:latin typeface="Calibri" pitchFamily="34" charset="0"/>
+                <a:ea typeface="Calibri" pitchFamily="34" charset="-122"/>
+                <a:cs typeface="Calibri" pitchFamily="34" charset="-120"/>
+              </a:rPr>
+              <a:t>Everything in one view</a:t>
+            </a:r>
+            <a:endParaRPr lang="en-US" sz="3200" dirty="0"/>
+          </a:p>
+        </p:txBody>
+      </p:sp>
+      <p:sp>
+        <p:nvSpPr>
+          <p:cNvPr id="5" name="Shape 3"/>
+          <p:cNvSpPr/>
+          <p:nvPr/>
+        </p:nvSpPr>
+        <p:spPr>
+          <a:xfrm>
+            <a:off x="454880" y="1371600"/>
+            <a:ext cx="5532120" cy="548640"/>
+          </a:xfrm>
+          <a:prstGeom prst="rect">
+            <a:avLst/>
+          </a:prstGeom>
+          <a:solidFill>
+            <a:srgbClr val="FFFFFF"/>
+          </a:solidFill>
+          <a:ln w="6350">
+            <a:solidFill>
+              <a:srgbClr val="E2E8F0"/>
+            </a:solidFill>
+            <a:prstDash val="solid"/>
+          </a:ln>
+        </p:spPr>
+        <p:txBody>
+          <a:bodyPr/>
+          <a:lstStyle/>
+          <a:p>
+            <a:endParaRPr lang="en-US"/>
+          </a:p>
+        </p:txBody>
+      </p:sp>
+      <p:sp>
+        <p:nvSpPr>
+          <p:cNvPr id="6" name="Shape 4"/>
+          <p:cNvSpPr/>
+          <p:nvPr/>
+        </p:nvSpPr>
+        <p:spPr>
+          <a:xfrm>
+            <a:off x="454880" y="1371600"/>
+            <a:ext cx="45720" cy="548640"/>
+          </a:xfrm>
+          <a:prstGeom prst="rect">
+            <a:avLst/>
+          </a:prstGeom>
+          <a:solidFill>
+            <a:schemeClr val="bg2"/>
+          </a:solidFill>
+          <a:ln w="12700">
+            <a:noFill/>
+            <a:prstDash val="solid"/>
+          </a:ln>
+        </p:spPr>
+        <p:txBody>
+          <a:bodyPr/>
+          <a:lstStyle/>
+          <a:p>
+            <a:endParaRPr lang="en-US"/>
+          </a:p>
+        </p:txBody>
+      </p:sp>
+      <p:sp>
+        <p:nvSpPr>
+          <p:cNvPr id="7" name="Text 5"/>
+          <p:cNvSpPr/>
+          <p:nvPr/>
+        </p:nvSpPr>
+        <p:spPr>
+          <a:xfrm>
+            <a:off x="592040" y="1426464"/>
+            <a:ext cx="1828800" cy="182880"/>
+          </a:xfrm>
+          <a:prstGeom prst="rect">
+            <a:avLst/>
+          </a:prstGeom>
+          <a:noFill/>
+          <a:ln/>
+        </p:spPr>
+        <p:txBody>
+          <a:bodyPr wrap="square" lIns="0" tIns="0" rIns="0" bIns="0" rtlCol="0" anchor="ctr"/>
+          <a:lstStyle/>
+          <a:p>
+            <a:pPr marL="0" indent="0">
+              <a:buNone/>
+            </a:pPr>
+            <a:r>
+              <a:rPr lang="en-US" sz="700" b="1" kern="0" spc="200" dirty="0">
+                <a:solidFill>
+                  <a:srgbClr val="8B5CF6"/>
+                </a:solidFill>
+                <a:latin typeface="Calibri" pitchFamily="34" charset="0"/>
+                <a:ea typeface="Calibri" pitchFamily="34" charset="-122"/>
+                <a:cs typeface="Calibri" pitchFamily="34" charset="-120"/>
+              </a:rPr>
+              <a:t>Figma File</a:t>
+            </a:r>
+            <a:endParaRPr lang="en-US" sz="700" dirty="0"/>
+          </a:p>
+        </p:txBody>
+      </p:sp>
+      <p:sp>
+        <p:nvSpPr>
+          <p:cNvPr id="8" name="Text 6"/>
+          <p:cNvSpPr/>
+          <p:nvPr/>
+        </p:nvSpPr>
+        <p:spPr>
+          <a:xfrm>
+            <a:off x="592040" y="1636776"/>
+            <a:ext cx="4114800" cy="219456"/>
+          </a:xfrm>
+          <a:prstGeom prst="rect">
+            <a:avLst/>
+          </a:prstGeom>
+          <a:noFill/>
+          <a:ln/>
+        </p:spPr>
+        <p:txBody>
+          <a:bodyPr wrap="square" lIns="0" tIns="0" rIns="0" bIns="0" rtlCol="0" anchor="ctr"/>
+          <a:lstStyle/>
+          <a:p>
+            <a:pPr marL="0" indent="0">
+              <a:buNone/>
+            </a:pPr>
+            <a:r>
+              <a:rPr lang="en-US" sz="1200" dirty="0">
+                <a:solidFill>
+                  <a:srgbClr val="0F172A"/>
+                </a:solidFill>
+                <a:latin typeface="Calibri" pitchFamily="34" charset="0"/>
+                <a:ea typeface="Calibri" pitchFamily="34" charset="-122"/>
+                <a:cs typeface="Calibri" pitchFamily="34" charset="-120"/>
+              </a:rPr>
+              <a:t>AI x UX Design Process Template</a:t>
+            </a:r>
+            <a:endParaRPr lang="en-US" sz="1200" dirty="0"/>
+          </a:p>
+        </p:txBody>
+      </p:sp>
+      <p:sp>
+        <p:nvSpPr>
+          <p:cNvPr id="9" name="Text 7"/>
+          <p:cNvSpPr/>
+          <p:nvPr/>
+        </p:nvSpPr>
+        <p:spPr>
+          <a:xfrm>
+            <a:off x="4336000" y="1636776"/>
+            <a:ext cx="1513840" cy="73152"/>
+          </a:xfrm>
+          <a:prstGeom prst="rect">
+            <a:avLst/>
+          </a:prstGeom>
+          <a:noFill/>
+          <a:ln/>
+        </p:spPr>
+        <p:txBody>
+          <a:bodyPr wrap="square" lIns="0" tIns="0" rIns="0" bIns="0" rtlCol="0" anchor="ctr"/>
+          <a:lstStyle/>
+          <a:p>
+            <a:pPr marL="0" indent="0" algn="r">
+              <a:buNone/>
+            </a:pPr>
+            <a:r>
+              <a:rPr lang="en-US" sz="1000" dirty="0">
+                <a:solidFill>
+                  <a:srgbClr val="64748B"/>
+                </a:solidFill>
+                <a:latin typeface="Calibri" pitchFamily="34" charset="0"/>
+                <a:ea typeface="Calibri" pitchFamily="34" charset="-122"/>
+                <a:cs typeface="Calibri" pitchFamily="34" charset="-120"/>
+              </a:rPr>
+              <a:t>Duplicate per project</a:t>
+            </a:r>
+            <a:endParaRPr lang="en-US" sz="1000" dirty="0"/>
+          </a:p>
+        </p:txBody>
+      </p:sp>
+      <p:sp>
+        <p:nvSpPr>
+          <p:cNvPr id="10" name="Shape 8"/>
+          <p:cNvSpPr/>
+          <p:nvPr/>
+        </p:nvSpPr>
+        <p:spPr>
+          <a:xfrm>
+            <a:off x="6215600" y="1371600"/>
+            <a:ext cx="5532120" cy="548640"/>
+          </a:xfrm>
+          <a:prstGeom prst="rect">
+            <a:avLst/>
+          </a:prstGeom>
+          <a:solidFill>
+            <a:srgbClr val="FFFFFF"/>
+          </a:solidFill>
+          <a:ln w="6350">
+            <a:solidFill>
+              <a:srgbClr val="E2E8F0"/>
+            </a:solidFill>
+            <a:prstDash val="solid"/>
+          </a:ln>
+        </p:spPr>
+        <p:txBody>
+          <a:bodyPr/>
+          <a:lstStyle/>
+          <a:p>
+            <a:endParaRPr lang="en-US"/>
+          </a:p>
+        </p:txBody>
+      </p:sp>
+      <p:sp>
+        <p:nvSpPr>
+          <p:cNvPr id="11" name="Shape 9"/>
+          <p:cNvSpPr/>
+          <p:nvPr/>
+        </p:nvSpPr>
+        <p:spPr>
+          <a:xfrm>
+            <a:off x="6215600" y="1371600"/>
+            <a:ext cx="45720" cy="548640"/>
+          </a:xfrm>
+          <a:prstGeom prst="rect">
+            <a:avLst/>
+          </a:prstGeom>
+          <a:solidFill>
+            <a:srgbClr val="22C55E"/>
+          </a:solidFill>
+          <a:ln w="12700">
+            <a:noFill/>
+            <a:prstDash val="solid"/>
+          </a:ln>
+        </p:spPr>
+        <p:txBody>
+          <a:bodyPr/>
+          <a:lstStyle/>
+          <a:p>
+            <a:endParaRPr lang="en-US"/>
+          </a:p>
+        </p:txBody>
+      </p:sp>
+      <p:sp>
+        <p:nvSpPr>
+          <p:cNvPr id="12" name="Text 10"/>
+          <p:cNvSpPr/>
+          <p:nvPr/>
+        </p:nvSpPr>
+        <p:spPr>
+          <a:xfrm>
+            <a:off x="6352760" y="1426464"/>
+            <a:ext cx="1828800" cy="182880"/>
+          </a:xfrm>
+          <a:prstGeom prst="rect">
+            <a:avLst/>
+          </a:prstGeom>
+          <a:noFill/>
+          <a:ln/>
+        </p:spPr>
+        <p:txBody>
+          <a:bodyPr wrap="square" lIns="0" tIns="0" rIns="0" bIns="0" rtlCol="0" anchor="ctr"/>
+          <a:lstStyle/>
+          <a:p>
+            <a:pPr marL="0" indent="0">
+              <a:buNone/>
+            </a:pPr>
+            <a:r>
+              <a:rPr lang="en-US" sz="700" b="1" kern="0" spc="200" dirty="0">
+                <a:solidFill>
+                  <a:srgbClr val="22C55E"/>
+                </a:solidFill>
+                <a:latin typeface="Calibri" pitchFamily="34" charset="0"/>
+                <a:ea typeface="Calibri" pitchFamily="34" charset="-122"/>
+                <a:cs typeface="Calibri" pitchFamily="34" charset="-120"/>
+              </a:rPr>
+              <a:t>Skill — 01</a:t>
+            </a:r>
+            <a:endParaRPr lang="en-US" sz="700" dirty="0"/>
+          </a:p>
+        </p:txBody>
+      </p:sp>
+      <p:sp>
+        <p:nvSpPr>
+          <p:cNvPr id="13" name="Text 11"/>
+          <p:cNvSpPr/>
+          <p:nvPr/>
+        </p:nvSpPr>
+        <p:spPr>
+          <a:xfrm>
+            <a:off x="6352760" y="1636776"/>
+            <a:ext cx="4114800" cy="219456"/>
+          </a:xfrm>
+          <a:prstGeom prst="rect">
+            <a:avLst/>
+          </a:prstGeom>
+          <a:noFill/>
+          <a:ln/>
+        </p:spPr>
+        <p:txBody>
+          <a:bodyPr wrap="square" lIns="0" tIns="0" rIns="0" bIns="0" rtlCol="0" anchor="ctr"/>
+          <a:lstStyle/>
+          <a:p>
+            <a:pPr marL="0" indent="0">
+              <a:buNone/>
+            </a:pPr>
+            <a:r>
+              <a:rPr lang="en-US" sz="1200" dirty="0">
+                <a:solidFill>
+                  <a:srgbClr val="0F172A"/>
+                </a:solidFill>
+                <a:latin typeface="Calibri" pitchFamily="34" charset="0"/>
+                <a:ea typeface="Calibri" pitchFamily="34" charset="-122"/>
+                <a:cs typeface="Calibri" pitchFamily="34" charset="-120"/>
+              </a:rPr>
+              <a:t>user-research.md</a:t>
+            </a:r>
+            <a:endParaRPr lang="en-US" sz="1200" dirty="0"/>
+          </a:p>
+        </p:txBody>
+      </p:sp>
+      <p:sp>
+        <p:nvSpPr>
+          <p:cNvPr id="14" name="Text 12"/>
+          <p:cNvSpPr/>
+          <p:nvPr/>
+        </p:nvSpPr>
+        <p:spPr>
+          <a:xfrm>
+            <a:off x="10559000" y="1636776"/>
+            <a:ext cx="1051560" cy="219456"/>
+          </a:xfrm>
+          <a:prstGeom prst="rect">
+            <a:avLst/>
+          </a:prstGeom>
+          <a:noFill/>
+          <a:ln/>
+        </p:spPr>
+        <p:txBody>
+          <a:bodyPr wrap="square" lIns="0" tIns="0" rIns="0" bIns="0" rtlCol="0" anchor="ctr"/>
+          <a:lstStyle/>
+          <a:p>
+            <a:pPr marL="0" indent="0" algn="r">
+              <a:buNone/>
+            </a:pPr>
+            <a:r>
+              <a:rPr lang="en-US" sz="1000" dirty="0">
+                <a:solidFill>
+                  <a:srgbClr val="64748B"/>
+                </a:solidFill>
+                <a:latin typeface="Calibri" pitchFamily="34" charset="0"/>
+                <a:ea typeface="Calibri" pitchFamily="34" charset="-122"/>
+                <a:cs typeface="Calibri" pitchFamily="34" charset="-120"/>
+              </a:rPr>
+              <a:t>Discover</a:t>
+            </a:r>
+            <a:endParaRPr lang="en-US" sz="1000" dirty="0"/>
+          </a:p>
+        </p:txBody>
+      </p:sp>
+      <p:sp>
+        <p:nvSpPr>
+          <p:cNvPr id="15" name="Shape 13"/>
+          <p:cNvSpPr/>
+          <p:nvPr/>
+        </p:nvSpPr>
+        <p:spPr>
+          <a:xfrm>
+            <a:off x="454880" y="2029968"/>
+            <a:ext cx="5532120" cy="548640"/>
+          </a:xfrm>
+          <a:prstGeom prst="rect">
+            <a:avLst/>
+          </a:prstGeom>
+          <a:solidFill>
+            <a:srgbClr val="FFFFFF"/>
+          </a:solidFill>
+          <a:ln w="6350">
+            <a:solidFill>
+              <a:srgbClr val="E2E8F0"/>
+            </a:solidFill>
+            <a:prstDash val="solid"/>
+          </a:ln>
+        </p:spPr>
+        <p:txBody>
+          <a:bodyPr/>
+          <a:lstStyle/>
+          <a:p>
+            <a:endParaRPr lang="en-US"/>
+          </a:p>
+        </p:txBody>
+      </p:sp>
+      <p:sp>
+        <p:nvSpPr>
+          <p:cNvPr id="16" name="Shape 14"/>
+          <p:cNvSpPr/>
+          <p:nvPr/>
+        </p:nvSpPr>
+        <p:spPr>
+          <a:xfrm>
+            <a:off x="454880" y="2029968"/>
+            <a:ext cx="45720" cy="548640"/>
+          </a:xfrm>
+          <a:prstGeom prst="rect">
+            <a:avLst/>
+          </a:prstGeom>
+          <a:solidFill>
+            <a:srgbClr val="22C55E"/>
+          </a:solidFill>
+          <a:ln w="12700">
+            <a:noFill/>
+            <a:prstDash val="solid"/>
+          </a:ln>
+        </p:spPr>
+        <p:txBody>
+          <a:bodyPr/>
+          <a:lstStyle/>
+          <a:p>
+            <a:endParaRPr lang="en-US"/>
+          </a:p>
+        </p:txBody>
+      </p:sp>
+      <p:sp>
+        <p:nvSpPr>
+          <p:cNvPr id="17" name="Text 15"/>
+          <p:cNvSpPr/>
+          <p:nvPr/>
+        </p:nvSpPr>
+        <p:spPr>
+          <a:xfrm>
+            <a:off x="592040" y="2084832"/>
+            <a:ext cx="1828800" cy="182880"/>
+          </a:xfrm>
+          <a:prstGeom prst="rect">
+            <a:avLst/>
+          </a:prstGeom>
+          <a:noFill/>
+          <a:ln/>
+        </p:spPr>
+        <p:txBody>
+          <a:bodyPr wrap="square" lIns="0" tIns="0" rIns="0" bIns="0" rtlCol="0" anchor="ctr"/>
+          <a:lstStyle/>
+          <a:p>
+            <a:pPr marL="0" indent="0">
+              <a:buNone/>
+            </a:pPr>
+            <a:r>
+              <a:rPr lang="en-US" sz="700" b="1" kern="0" spc="200" dirty="0">
+                <a:solidFill>
+                  <a:srgbClr val="22C55E"/>
+                </a:solidFill>
+                <a:latin typeface="Calibri" pitchFamily="34" charset="0"/>
+                <a:ea typeface="Calibri" pitchFamily="34" charset="-122"/>
+                <a:cs typeface="Calibri" pitchFamily="34" charset="-120"/>
+              </a:rPr>
+              <a:t>Skill — 01</a:t>
+            </a:r>
+            <a:endParaRPr lang="en-US" sz="700" dirty="0"/>
+          </a:p>
+        </p:txBody>
+      </p:sp>
+      <p:sp>
+        <p:nvSpPr>
+          <p:cNvPr id="18" name="Text 16"/>
+          <p:cNvSpPr/>
+          <p:nvPr/>
+        </p:nvSpPr>
+        <p:spPr>
+          <a:xfrm>
+            <a:off x="592040" y="2295144"/>
+            <a:ext cx="4114800" cy="219456"/>
+          </a:xfrm>
+          <a:prstGeom prst="rect">
+            <a:avLst/>
+          </a:prstGeom>
+          <a:noFill/>
+          <a:ln/>
+        </p:spPr>
+        <p:txBody>
+          <a:bodyPr wrap="square" lIns="0" tIns="0" rIns="0" bIns="0" rtlCol="0" anchor="ctr"/>
+          <a:lstStyle/>
+          <a:p>
+            <a:pPr marL="0" indent="0">
+              <a:buNone/>
+            </a:pPr>
+            <a:r>
+              <a:rPr lang="en-US" sz="1200" dirty="0">
+                <a:solidFill>
+                  <a:srgbClr val="0F172A"/>
+                </a:solidFill>
+                <a:latin typeface="Calibri" pitchFamily="34" charset="0"/>
+                <a:ea typeface="Calibri" pitchFamily="34" charset="-122"/>
+                <a:cs typeface="Calibri" pitchFamily="34" charset="-120"/>
+              </a:rPr>
+              <a:t>competitive-analysis.md</a:t>
+            </a:r>
+            <a:endParaRPr lang="en-US" sz="1200" dirty="0"/>
+          </a:p>
+        </p:txBody>
+      </p:sp>
+      <p:sp>
+        <p:nvSpPr>
+          <p:cNvPr id="19" name="Text 17"/>
+          <p:cNvSpPr/>
+          <p:nvPr/>
+        </p:nvSpPr>
+        <p:spPr>
+          <a:xfrm>
+            <a:off x="4798280" y="2295144"/>
+            <a:ext cx="1051560" cy="219456"/>
+          </a:xfrm>
+          <a:prstGeom prst="rect">
+            <a:avLst/>
+          </a:prstGeom>
+          <a:noFill/>
+          <a:ln/>
+        </p:spPr>
+        <p:txBody>
+          <a:bodyPr wrap="square" lIns="0" tIns="0" rIns="0" bIns="0" rtlCol="0" anchor="ctr"/>
+          <a:lstStyle/>
+          <a:p>
+            <a:pPr marL="0" indent="0" algn="r">
+              <a:buNone/>
+            </a:pPr>
+            <a:r>
+              <a:rPr lang="en-US" sz="1000" dirty="0">
+                <a:solidFill>
+                  <a:srgbClr val="64748B"/>
+                </a:solidFill>
+                <a:latin typeface="Calibri" pitchFamily="34" charset="0"/>
+                <a:ea typeface="Calibri" pitchFamily="34" charset="-122"/>
+                <a:cs typeface="Calibri" pitchFamily="34" charset="-120"/>
+              </a:rPr>
+              <a:t>Discover</a:t>
+            </a:r>
+            <a:endParaRPr lang="en-US" sz="1000" dirty="0"/>
+          </a:p>
+        </p:txBody>
+      </p:sp>
+      <p:sp>
+        <p:nvSpPr>
+          <p:cNvPr id="20" name="Shape 18"/>
+          <p:cNvSpPr/>
+          <p:nvPr/>
+        </p:nvSpPr>
+        <p:spPr>
+          <a:xfrm>
+            <a:off x="6215600" y="2029968"/>
+            <a:ext cx="5532120" cy="548640"/>
+          </a:xfrm>
+          <a:prstGeom prst="rect">
+            <a:avLst/>
+          </a:prstGeom>
+          <a:solidFill>
+            <a:srgbClr val="FFFFFF"/>
+          </a:solidFill>
+          <a:ln w="6350">
+            <a:solidFill>
+              <a:srgbClr val="E2E8F0"/>
+            </a:solidFill>
+            <a:prstDash val="solid"/>
+          </a:ln>
+        </p:spPr>
+        <p:txBody>
+          <a:bodyPr/>
+          <a:lstStyle/>
+          <a:p>
+            <a:endParaRPr lang="en-US"/>
+          </a:p>
+        </p:txBody>
+      </p:sp>
+      <p:sp>
+        <p:nvSpPr>
+          <p:cNvPr id="21" name="Shape 19"/>
+          <p:cNvSpPr/>
+          <p:nvPr/>
+        </p:nvSpPr>
+        <p:spPr>
+          <a:xfrm>
+            <a:off x="6215600" y="2029968"/>
+            <a:ext cx="45720" cy="548640"/>
+          </a:xfrm>
+          <a:prstGeom prst="rect">
+            <a:avLst/>
+          </a:prstGeom>
+          <a:solidFill>
+            <a:srgbClr val="8B5CF6"/>
+          </a:solidFill>
+          <a:ln w="12700">
+            <a:noFill/>
+            <a:prstDash val="solid"/>
+          </a:ln>
+        </p:spPr>
+        <p:txBody>
+          <a:bodyPr/>
+          <a:lstStyle/>
+          <a:p>
+            <a:endParaRPr lang="en-US"/>
+          </a:p>
+        </p:txBody>
+      </p:sp>
+      <p:sp>
+        <p:nvSpPr>
+          <p:cNvPr id="22" name="Text 20"/>
+          <p:cNvSpPr/>
+          <p:nvPr/>
+        </p:nvSpPr>
+        <p:spPr>
+          <a:xfrm>
+            <a:off x="6352760" y="2084832"/>
+            <a:ext cx="1828800" cy="182880"/>
+          </a:xfrm>
+          <a:prstGeom prst="rect">
+            <a:avLst/>
+          </a:prstGeom>
+          <a:noFill/>
+          <a:ln/>
+        </p:spPr>
+        <p:txBody>
+          <a:bodyPr wrap="square" lIns="0" tIns="0" rIns="0" bIns="0" rtlCol="0" anchor="ctr"/>
+          <a:lstStyle/>
+          <a:p>
+            <a:pPr marL="0" indent="0">
+              <a:buNone/>
+            </a:pPr>
+            <a:r>
+              <a:rPr lang="en-US" sz="700" b="1" kern="0" spc="200" dirty="0">
+                <a:solidFill>
+                  <a:srgbClr val="8B5CF6"/>
+                </a:solidFill>
+                <a:latin typeface="Calibri" pitchFamily="34" charset="0"/>
+                <a:ea typeface="Calibri" pitchFamily="34" charset="-122"/>
+                <a:cs typeface="Calibri" pitchFamily="34" charset="-120"/>
+              </a:rPr>
+              <a:t>Skill — 02</a:t>
+            </a:r>
+            <a:endParaRPr lang="en-US" sz="700" dirty="0"/>
+          </a:p>
+        </p:txBody>
+      </p:sp>
+      <p:sp>
+        <p:nvSpPr>
+          <p:cNvPr id="23" name="Text 21"/>
+          <p:cNvSpPr/>
+          <p:nvPr/>
+        </p:nvSpPr>
+        <p:spPr>
+          <a:xfrm>
+            <a:off x="6352760" y="2295144"/>
+            <a:ext cx="4114800" cy="219456"/>
+          </a:xfrm>
+          <a:prstGeom prst="rect">
+            <a:avLst/>
+          </a:prstGeom>
+          <a:noFill/>
+          <a:ln/>
+        </p:spPr>
+        <p:txBody>
+          <a:bodyPr wrap="square" lIns="0" tIns="0" rIns="0" bIns="0" rtlCol="0" anchor="ctr"/>
+          <a:lstStyle/>
+          <a:p>
+            <a:pPr marL="0" indent="0">
+              <a:buNone/>
+            </a:pPr>
+            <a:r>
+              <a:rPr lang="en-US" sz="1200" dirty="0">
+                <a:solidFill>
+                  <a:srgbClr val="0F172A"/>
+                </a:solidFill>
+                <a:latin typeface="Calibri" pitchFamily="34" charset="0"/>
+                <a:ea typeface="Calibri" pitchFamily="34" charset="-122"/>
+                <a:cs typeface="Calibri" pitchFamily="34" charset="-120"/>
+              </a:rPr>
+              <a:t>problem-framing.md</a:t>
+            </a:r>
+            <a:endParaRPr lang="en-US" sz="1200" dirty="0"/>
+          </a:p>
+        </p:txBody>
+      </p:sp>
+      <p:sp>
+        <p:nvSpPr>
+          <p:cNvPr id="24" name="Text 22"/>
+          <p:cNvSpPr/>
+          <p:nvPr/>
+        </p:nvSpPr>
+        <p:spPr>
+          <a:xfrm>
+            <a:off x="10559000" y="2295144"/>
+            <a:ext cx="1051560" cy="219456"/>
+          </a:xfrm>
+          <a:prstGeom prst="rect">
+            <a:avLst/>
+          </a:prstGeom>
+          <a:noFill/>
+          <a:ln/>
+        </p:spPr>
+        <p:txBody>
+          <a:bodyPr wrap="square" lIns="0" tIns="0" rIns="0" bIns="0" rtlCol="0" anchor="ctr"/>
+          <a:lstStyle/>
+          <a:p>
+            <a:pPr marL="0" indent="0" algn="r">
+              <a:buNone/>
+            </a:pPr>
+            <a:r>
+              <a:rPr lang="en-US" sz="1000" dirty="0">
+                <a:solidFill>
+                  <a:srgbClr val="64748B"/>
+                </a:solidFill>
+                <a:latin typeface="Calibri" pitchFamily="34" charset="0"/>
+                <a:ea typeface="Calibri" pitchFamily="34" charset="-122"/>
+                <a:cs typeface="Calibri" pitchFamily="34" charset="-120"/>
+              </a:rPr>
+              <a:t>Define</a:t>
+            </a:r>
+            <a:endParaRPr lang="en-US" sz="1000" dirty="0"/>
+          </a:p>
+        </p:txBody>
+      </p:sp>
+      <p:sp>
+        <p:nvSpPr>
+          <p:cNvPr id="25" name="Shape 23"/>
+          <p:cNvSpPr/>
+          <p:nvPr/>
+        </p:nvSpPr>
+        <p:spPr>
+          <a:xfrm>
+            <a:off x="454880" y="2688336"/>
+            <a:ext cx="5532120" cy="548640"/>
+          </a:xfrm>
+          <a:prstGeom prst="rect">
+            <a:avLst/>
+          </a:prstGeom>
+          <a:solidFill>
+            <a:srgbClr val="FFFFFF"/>
+          </a:solidFill>
+          <a:ln w="6350">
+            <a:solidFill>
+              <a:srgbClr val="E2E8F0"/>
+            </a:solidFill>
+            <a:prstDash val="solid"/>
+          </a:ln>
+        </p:spPr>
+        <p:txBody>
+          <a:bodyPr/>
+          <a:lstStyle/>
+          <a:p>
+            <a:endParaRPr lang="en-US"/>
+          </a:p>
+        </p:txBody>
+      </p:sp>
+      <p:sp>
+        <p:nvSpPr>
+          <p:cNvPr id="26" name="Shape 24"/>
+          <p:cNvSpPr/>
+          <p:nvPr/>
+        </p:nvSpPr>
+        <p:spPr>
+          <a:xfrm>
+            <a:off x="454880" y="2688336"/>
+            <a:ext cx="45720" cy="548640"/>
+          </a:xfrm>
+          <a:prstGeom prst="rect">
+            <a:avLst/>
+          </a:prstGeom>
+          <a:solidFill>
+            <a:srgbClr val="F59E0B"/>
+          </a:solidFill>
+          <a:ln w="12700">
+            <a:noFill/>
+            <a:prstDash val="solid"/>
+          </a:ln>
+        </p:spPr>
+        <p:txBody>
+          <a:bodyPr/>
+          <a:lstStyle/>
+          <a:p>
+            <a:endParaRPr lang="en-US"/>
+          </a:p>
+        </p:txBody>
+      </p:sp>
+      <p:sp>
+        <p:nvSpPr>
+          <p:cNvPr id="27" name="Text 25"/>
+          <p:cNvSpPr/>
+          <p:nvPr/>
+        </p:nvSpPr>
+        <p:spPr>
+          <a:xfrm>
+            <a:off x="592040" y="2743200"/>
+            <a:ext cx="1828800" cy="182880"/>
+          </a:xfrm>
+          <a:prstGeom prst="rect">
+            <a:avLst/>
+          </a:prstGeom>
+          <a:noFill/>
+          <a:ln/>
+        </p:spPr>
+        <p:txBody>
+          <a:bodyPr wrap="square" lIns="0" tIns="0" rIns="0" bIns="0" rtlCol="0" anchor="ctr"/>
+          <a:lstStyle/>
+          <a:p>
+            <a:pPr marL="0" indent="0">
+              <a:buNone/>
+            </a:pPr>
+            <a:r>
+              <a:rPr lang="en-US" sz="700" b="1" kern="0" spc="200" dirty="0">
+                <a:solidFill>
+                  <a:srgbClr val="F59E0B"/>
+                </a:solidFill>
+                <a:latin typeface="Calibri" pitchFamily="34" charset="0"/>
+                <a:ea typeface="Calibri" pitchFamily="34" charset="-122"/>
+                <a:cs typeface="Calibri" pitchFamily="34" charset="-120"/>
+              </a:rPr>
+              <a:t>Skill — 03</a:t>
+            </a:r>
+            <a:endParaRPr lang="en-US" sz="700" dirty="0"/>
+          </a:p>
+        </p:txBody>
+      </p:sp>
+      <p:sp>
+        <p:nvSpPr>
+          <p:cNvPr id="28" name="Text 26"/>
+          <p:cNvSpPr/>
+          <p:nvPr/>
+        </p:nvSpPr>
+        <p:spPr>
+          <a:xfrm>
+            <a:off x="592040" y="2953512"/>
+            <a:ext cx="4114800" cy="219456"/>
+          </a:xfrm>
+          <a:prstGeom prst="rect">
+            <a:avLst/>
+          </a:prstGeom>
+          <a:noFill/>
+          <a:ln/>
+        </p:spPr>
+        <p:txBody>
+          <a:bodyPr wrap="square" lIns="0" tIns="0" rIns="0" bIns="0" rtlCol="0" anchor="ctr"/>
+          <a:lstStyle/>
+          <a:p>
+            <a:pPr marL="0" indent="0">
+              <a:buNone/>
+            </a:pPr>
+            <a:r>
+              <a:rPr lang="en-US" sz="1200" dirty="0">
+                <a:solidFill>
+                  <a:srgbClr val="0F172A"/>
+                </a:solidFill>
+                <a:latin typeface="Calibri" pitchFamily="34" charset="0"/>
+                <a:ea typeface="Calibri" pitchFamily="34" charset="-122"/>
+                <a:cs typeface="Calibri" pitchFamily="34" charset="-120"/>
+              </a:rPr>
+              <a:t>concept-generation.md</a:t>
+            </a:r>
+            <a:endParaRPr lang="en-US" sz="1200" dirty="0"/>
+          </a:p>
+        </p:txBody>
+      </p:sp>
+      <p:sp>
+        <p:nvSpPr>
+          <p:cNvPr id="29" name="Text 27"/>
+          <p:cNvSpPr/>
+          <p:nvPr/>
+        </p:nvSpPr>
+        <p:spPr>
+          <a:xfrm>
+            <a:off x="4798280" y="2953512"/>
+            <a:ext cx="1051560" cy="219456"/>
+          </a:xfrm>
+          <a:prstGeom prst="rect">
+            <a:avLst/>
+          </a:prstGeom>
+          <a:noFill/>
+          <a:ln/>
+        </p:spPr>
+        <p:txBody>
+          <a:bodyPr wrap="square" lIns="0" tIns="0" rIns="0" bIns="0" rtlCol="0" anchor="ctr"/>
+          <a:lstStyle/>
+          <a:p>
+            <a:pPr marL="0" indent="0" algn="r">
+              <a:buNone/>
+            </a:pPr>
+            <a:r>
+              <a:rPr lang="en-US" sz="1000" dirty="0">
+                <a:solidFill>
+                  <a:srgbClr val="64748B"/>
+                </a:solidFill>
+                <a:latin typeface="Calibri" pitchFamily="34" charset="0"/>
+                <a:ea typeface="Calibri" pitchFamily="34" charset="-122"/>
+                <a:cs typeface="Calibri" pitchFamily="34" charset="-120"/>
+              </a:rPr>
+              <a:t>Ideate</a:t>
+            </a:r>
+            <a:endParaRPr lang="en-US" sz="1000" dirty="0"/>
+          </a:p>
+        </p:txBody>
+      </p:sp>
+      <p:sp>
+        <p:nvSpPr>
+          <p:cNvPr id="30" name="Shape 28"/>
+          <p:cNvSpPr/>
+          <p:nvPr/>
+        </p:nvSpPr>
+        <p:spPr>
+          <a:xfrm>
+            <a:off x="6215600" y="2688336"/>
+            <a:ext cx="5532120" cy="548640"/>
+          </a:xfrm>
+          <a:prstGeom prst="rect">
+            <a:avLst/>
+          </a:prstGeom>
+          <a:solidFill>
+            <a:srgbClr val="FFFFFF"/>
+          </a:solidFill>
+          <a:ln w="6350">
+            <a:solidFill>
+              <a:srgbClr val="E2E8F0"/>
+            </a:solidFill>
+            <a:prstDash val="solid"/>
+          </a:ln>
+        </p:spPr>
+        <p:txBody>
+          <a:bodyPr/>
+          <a:lstStyle/>
+          <a:p>
+            <a:endParaRPr lang="en-US"/>
+          </a:p>
+        </p:txBody>
+      </p:sp>
+      <p:sp>
+        <p:nvSpPr>
+          <p:cNvPr id="31" name="Shape 29"/>
+          <p:cNvSpPr/>
+          <p:nvPr/>
+        </p:nvSpPr>
+        <p:spPr>
+          <a:xfrm>
+            <a:off x="6215600" y="2688336"/>
+            <a:ext cx="45720" cy="548640"/>
+          </a:xfrm>
+          <a:prstGeom prst="rect">
+            <a:avLst/>
+          </a:prstGeom>
+          <a:solidFill>
+            <a:srgbClr val="3B82F6"/>
+          </a:solidFill>
+          <a:ln w="12700">
+            <a:noFill/>
+            <a:prstDash val="solid"/>
+          </a:ln>
+        </p:spPr>
+        <p:txBody>
+          <a:bodyPr/>
+          <a:lstStyle/>
+          <a:p>
+            <a:endParaRPr lang="en-US"/>
+          </a:p>
+        </p:txBody>
+      </p:sp>
+      <p:sp>
+        <p:nvSpPr>
+          <p:cNvPr id="32" name="Text 30"/>
+          <p:cNvSpPr/>
+          <p:nvPr/>
+        </p:nvSpPr>
+        <p:spPr>
+          <a:xfrm>
+            <a:off x="6352760" y="2743200"/>
+            <a:ext cx="1828800" cy="182880"/>
+          </a:xfrm>
+          <a:prstGeom prst="rect">
+            <a:avLst/>
+          </a:prstGeom>
+          <a:noFill/>
+          <a:ln/>
+        </p:spPr>
+        <p:txBody>
+          <a:bodyPr wrap="square" lIns="0" tIns="0" rIns="0" bIns="0" rtlCol="0" anchor="ctr"/>
+          <a:lstStyle/>
+          <a:p>
+            <a:pPr marL="0" indent="0">
+              <a:buNone/>
+            </a:pPr>
+            <a:r>
+              <a:rPr lang="en-US" sz="700" b="1" kern="0" spc="200" dirty="0">
+                <a:solidFill>
+                  <a:srgbClr val="3B82F6"/>
+                </a:solidFill>
+                <a:latin typeface="Calibri" pitchFamily="34" charset="0"/>
+                <a:ea typeface="Calibri" pitchFamily="34" charset="-122"/>
+                <a:cs typeface="Calibri" pitchFamily="34" charset="-120"/>
+              </a:rPr>
+              <a:t>Skill — 04</a:t>
+            </a:r>
+            <a:endParaRPr lang="en-US" sz="700" dirty="0"/>
+          </a:p>
+        </p:txBody>
+      </p:sp>
+      <p:sp>
+        <p:nvSpPr>
+          <p:cNvPr id="33" name="Text 31"/>
+          <p:cNvSpPr/>
+          <p:nvPr/>
+        </p:nvSpPr>
+        <p:spPr>
+          <a:xfrm>
+            <a:off x="6352760" y="2953512"/>
+            <a:ext cx="4114800" cy="219456"/>
+          </a:xfrm>
+          <a:prstGeom prst="rect">
+            <a:avLst/>
+          </a:prstGeom>
+          <a:noFill/>
+          <a:ln/>
+        </p:spPr>
+        <p:txBody>
+          <a:bodyPr wrap="square" lIns="0" tIns="0" rIns="0" bIns="0" rtlCol="0" anchor="ctr"/>
+          <a:lstStyle/>
+          <a:p>
+            <a:pPr marL="0" indent="0">
+              <a:buNone/>
+            </a:pPr>
+            <a:r>
+              <a:rPr lang="en-US" sz="1200" dirty="0">
+                <a:solidFill>
+                  <a:srgbClr val="0F172A"/>
+                </a:solidFill>
+                <a:latin typeface="Calibri" pitchFamily="34" charset="0"/>
+                <a:ea typeface="Calibri" pitchFamily="34" charset="-122"/>
+                <a:cs typeface="Calibri" pitchFamily="34" charset="-120"/>
+              </a:rPr>
+              <a:t>prototyping.md</a:t>
+            </a:r>
+            <a:endParaRPr lang="en-US" sz="1200" dirty="0"/>
+          </a:p>
+        </p:txBody>
+      </p:sp>
+      <p:sp>
+        <p:nvSpPr>
+          <p:cNvPr id="34" name="Text 32"/>
+          <p:cNvSpPr/>
+          <p:nvPr/>
+        </p:nvSpPr>
+        <p:spPr>
+          <a:xfrm>
+            <a:off x="10559000" y="2953512"/>
+            <a:ext cx="1051560" cy="219456"/>
+          </a:xfrm>
+          <a:prstGeom prst="rect">
+            <a:avLst/>
+          </a:prstGeom>
+          <a:noFill/>
+          <a:ln/>
+        </p:spPr>
+        <p:txBody>
+          <a:bodyPr wrap="square" lIns="0" tIns="0" rIns="0" bIns="0" rtlCol="0" anchor="ctr"/>
+          <a:lstStyle/>
+          <a:p>
+            <a:pPr marL="0" indent="0" algn="r">
+              <a:buNone/>
+            </a:pPr>
+            <a:r>
+              <a:rPr lang="en-US" sz="1000" dirty="0">
+                <a:solidFill>
+                  <a:srgbClr val="64748B"/>
+                </a:solidFill>
+                <a:latin typeface="Calibri" pitchFamily="34" charset="0"/>
+                <a:ea typeface="Calibri" pitchFamily="34" charset="-122"/>
+                <a:cs typeface="Calibri" pitchFamily="34" charset="-120"/>
+              </a:rPr>
+              <a:t>Prototype</a:t>
+            </a:r>
+            <a:endParaRPr lang="en-US" sz="1000" dirty="0"/>
+          </a:p>
+        </p:txBody>
+      </p:sp>
+      <p:sp>
+        <p:nvSpPr>
+          <p:cNvPr id="35" name="Shape 33"/>
+          <p:cNvSpPr/>
+          <p:nvPr/>
+        </p:nvSpPr>
+        <p:spPr>
+          <a:xfrm>
+            <a:off x="454880" y="3346704"/>
+            <a:ext cx="5532120" cy="548640"/>
+          </a:xfrm>
+          <a:prstGeom prst="rect">
+            <a:avLst/>
+          </a:prstGeom>
+          <a:solidFill>
+            <a:srgbClr val="FFFFFF"/>
+          </a:solidFill>
+          <a:ln w="6350">
+            <a:solidFill>
+              <a:srgbClr val="E2E8F0"/>
+            </a:solidFill>
+            <a:prstDash val="solid"/>
+          </a:ln>
+        </p:spPr>
+        <p:txBody>
+          <a:bodyPr/>
+          <a:lstStyle/>
+          <a:p>
+            <a:endParaRPr lang="en-US"/>
+          </a:p>
+        </p:txBody>
+      </p:sp>
+      <p:sp>
+        <p:nvSpPr>
+          <p:cNvPr id="36" name="Shape 34"/>
+          <p:cNvSpPr/>
+          <p:nvPr/>
+        </p:nvSpPr>
+        <p:spPr>
+          <a:xfrm>
+            <a:off x="454880" y="3346704"/>
+            <a:ext cx="45720" cy="548640"/>
+          </a:xfrm>
+          <a:prstGeom prst="rect">
+            <a:avLst/>
+          </a:prstGeom>
+          <a:solidFill>
+            <a:srgbClr val="EF4444"/>
+          </a:solidFill>
+          <a:ln w="12700">
+            <a:noFill/>
+            <a:prstDash val="solid"/>
+          </a:ln>
+        </p:spPr>
+        <p:txBody>
+          <a:bodyPr/>
+          <a:lstStyle/>
+          <a:p>
+            <a:endParaRPr lang="en-US"/>
+          </a:p>
+        </p:txBody>
+      </p:sp>
+      <p:sp>
+        <p:nvSpPr>
+          <p:cNvPr id="37" name="Text 35"/>
+          <p:cNvSpPr/>
+          <p:nvPr/>
+        </p:nvSpPr>
+        <p:spPr>
+          <a:xfrm>
+            <a:off x="592040" y="3401568"/>
+            <a:ext cx="1828800" cy="182880"/>
+          </a:xfrm>
+          <a:prstGeom prst="rect">
+            <a:avLst/>
+          </a:prstGeom>
+          <a:noFill/>
+          <a:ln/>
+        </p:spPr>
+        <p:txBody>
+          <a:bodyPr wrap="square" lIns="0" tIns="0" rIns="0" bIns="0" rtlCol="0" anchor="ctr"/>
+          <a:lstStyle/>
+          <a:p>
+            <a:pPr marL="0" indent="0">
+              <a:buNone/>
+            </a:pPr>
+            <a:r>
+              <a:rPr lang="en-US" sz="700" b="1" kern="0" spc="200" dirty="0">
+                <a:solidFill>
+                  <a:srgbClr val="EF4444"/>
+                </a:solidFill>
+                <a:latin typeface="Calibri" pitchFamily="34" charset="0"/>
+                <a:ea typeface="Calibri" pitchFamily="34" charset="-122"/>
+                <a:cs typeface="Calibri" pitchFamily="34" charset="-120"/>
+              </a:rPr>
+              <a:t>Skill — 05</a:t>
+            </a:r>
+            <a:endParaRPr lang="en-US" sz="700" dirty="0"/>
+          </a:p>
+        </p:txBody>
+      </p:sp>
+      <p:sp>
+        <p:nvSpPr>
+          <p:cNvPr id="38" name="Text 36"/>
+          <p:cNvSpPr/>
+          <p:nvPr/>
+        </p:nvSpPr>
+        <p:spPr>
+          <a:xfrm>
+            <a:off x="592040" y="3611880"/>
+            <a:ext cx="4114800" cy="219456"/>
+          </a:xfrm>
+          <a:prstGeom prst="rect">
+            <a:avLst/>
+          </a:prstGeom>
+          <a:noFill/>
+          <a:ln/>
+        </p:spPr>
+        <p:txBody>
+          <a:bodyPr wrap="square" lIns="0" tIns="0" rIns="0" bIns="0" rtlCol="0" anchor="ctr"/>
+          <a:lstStyle/>
+          <a:p>
+            <a:pPr marL="0" indent="0">
+              <a:buNone/>
+            </a:pPr>
+            <a:r>
+              <a:rPr lang="en-US" sz="1200" dirty="0">
+                <a:solidFill>
+                  <a:srgbClr val="0F172A"/>
+                </a:solidFill>
+                <a:latin typeface="Calibri" pitchFamily="34" charset="0"/>
+                <a:ea typeface="Calibri" pitchFamily="34" charset="-122"/>
+                <a:cs typeface="Calibri" pitchFamily="34" charset="-120"/>
+              </a:rPr>
+              <a:t>usability-testing.md</a:t>
+            </a:r>
+            <a:endParaRPr lang="en-US" sz="1200" dirty="0"/>
+          </a:p>
+        </p:txBody>
+      </p:sp>
+      <p:sp>
+        <p:nvSpPr>
+          <p:cNvPr id="39" name="Text 37"/>
+          <p:cNvSpPr/>
+          <p:nvPr/>
+        </p:nvSpPr>
+        <p:spPr>
+          <a:xfrm>
+            <a:off x="4798280" y="3611880"/>
+            <a:ext cx="1051560" cy="219456"/>
+          </a:xfrm>
+          <a:prstGeom prst="rect">
+            <a:avLst/>
+          </a:prstGeom>
+          <a:noFill/>
+          <a:ln/>
+        </p:spPr>
+        <p:txBody>
+          <a:bodyPr wrap="square" lIns="0" tIns="0" rIns="0" bIns="0" rtlCol="0" anchor="ctr"/>
+          <a:lstStyle/>
+          <a:p>
+            <a:pPr marL="0" indent="0" algn="r">
+              <a:buNone/>
+            </a:pPr>
+            <a:r>
+              <a:rPr lang="en-US" sz="1000" dirty="0">
+                <a:solidFill>
+                  <a:srgbClr val="64748B"/>
+                </a:solidFill>
+                <a:latin typeface="Calibri" pitchFamily="34" charset="0"/>
+                <a:ea typeface="Calibri" pitchFamily="34" charset="-122"/>
+                <a:cs typeface="Calibri" pitchFamily="34" charset="-120"/>
+              </a:rPr>
+              <a:t>Validate</a:t>
+            </a:r>
+            <a:endParaRPr lang="en-US" sz="1000" dirty="0"/>
+          </a:p>
+        </p:txBody>
+      </p:sp>
+      <p:sp>
+        <p:nvSpPr>
+          <p:cNvPr id="40" name="Shape 38"/>
+          <p:cNvSpPr/>
+          <p:nvPr/>
+        </p:nvSpPr>
+        <p:spPr>
+          <a:xfrm>
+            <a:off x="6215600" y="3346704"/>
+            <a:ext cx="5532120" cy="548640"/>
+          </a:xfrm>
+          <a:prstGeom prst="rect">
+            <a:avLst/>
+          </a:prstGeom>
+          <a:solidFill>
+            <a:srgbClr val="FFFFFF"/>
+          </a:solidFill>
+          <a:ln w="6350">
+            <a:solidFill>
+              <a:srgbClr val="E2E8F0"/>
+            </a:solidFill>
+            <a:prstDash val="solid"/>
+          </a:ln>
+        </p:spPr>
+        <p:txBody>
+          <a:bodyPr/>
+          <a:lstStyle/>
+          <a:p>
+            <a:endParaRPr lang="en-US"/>
+          </a:p>
+        </p:txBody>
+      </p:sp>
+      <p:sp>
+        <p:nvSpPr>
+          <p:cNvPr id="41" name="Shape 39"/>
+          <p:cNvSpPr/>
+          <p:nvPr/>
+        </p:nvSpPr>
+        <p:spPr>
+          <a:xfrm>
+            <a:off x="6215600" y="3346704"/>
+            <a:ext cx="45720" cy="548640"/>
+          </a:xfrm>
+          <a:prstGeom prst="rect">
+            <a:avLst/>
+          </a:prstGeom>
+          <a:solidFill>
+            <a:srgbClr val="14B8A6"/>
+          </a:solidFill>
+          <a:ln w="12700">
+            <a:noFill/>
+            <a:prstDash val="solid"/>
+          </a:ln>
+        </p:spPr>
+        <p:txBody>
+          <a:bodyPr/>
+          <a:lstStyle/>
+          <a:p>
+            <a:endParaRPr lang="en-US"/>
+          </a:p>
+        </p:txBody>
+      </p:sp>
+      <p:sp>
+        <p:nvSpPr>
+          <p:cNvPr id="42" name="Text 40"/>
+          <p:cNvSpPr/>
+          <p:nvPr/>
+        </p:nvSpPr>
+        <p:spPr>
+          <a:xfrm>
+            <a:off x="6352760" y="3401568"/>
+            <a:ext cx="1828800" cy="182880"/>
+          </a:xfrm>
+          <a:prstGeom prst="rect">
+            <a:avLst/>
+          </a:prstGeom>
+          <a:noFill/>
+          <a:ln/>
+        </p:spPr>
+        <p:txBody>
+          <a:bodyPr wrap="square" lIns="0" tIns="0" rIns="0" bIns="0" rtlCol="0" anchor="ctr"/>
+          <a:lstStyle/>
+          <a:p>
+            <a:pPr marL="0" indent="0">
+              <a:buNone/>
+            </a:pPr>
+            <a:r>
+              <a:rPr lang="en-US" sz="700" b="1" kern="0" spc="200" dirty="0">
+                <a:solidFill>
+                  <a:srgbClr val="14B8A6"/>
+                </a:solidFill>
+                <a:latin typeface="Calibri" pitchFamily="34" charset="0"/>
+                <a:ea typeface="Calibri" pitchFamily="34" charset="-122"/>
+                <a:cs typeface="Calibri" pitchFamily="34" charset="-120"/>
+              </a:rPr>
+              <a:t>Skill — 06</a:t>
+            </a:r>
+            <a:endParaRPr lang="en-US" sz="700" dirty="0"/>
+          </a:p>
+        </p:txBody>
+      </p:sp>
+      <p:sp>
+        <p:nvSpPr>
+          <p:cNvPr id="43" name="Text 41"/>
+          <p:cNvSpPr/>
+          <p:nvPr/>
+        </p:nvSpPr>
+        <p:spPr>
+          <a:xfrm>
+            <a:off x="6352760" y="3611880"/>
+            <a:ext cx="4114800" cy="219456"/>
+          </a:xfrm>
+          <a:prstGeom prst="rect">
+            <a:avLst/>
+          </a:prstGeom>
+          <a:noFill/>
+          <a:ln/>
+        </p:spPr>
+        <p:txBody>
+          <a:bodyPr wrap="square" lIns="0" tIns="0" rIns="0" bIns="0" rtlCol="0" anchor="ctr"/>
+          <a:lstStyle/>
+          <a:p>
+            <a:pPr marL="0" indent="0">
+              <a:buNone/>
+            </a:pPr>
+            <a:r>
+              <a:rPr lang="en-US" sz="1200" dirty="0">
+                <a:solidFill>
+                  <a:srgbClr val="0F172A"/>
+                </a:solidFill>
+                <a:latin typeface="Calibri" pitchFamily="34" charset="0"/>
+                <a:ea typeface="Calibri" pitchFamily="34" charset="-122"/>
+                <a:cs typeface="Calibri" pitchFamily="34" charset="-120"/>
+              </a:rPr>
+              <a:t>design-delivery.md</a:t>
+            </a:r>
+            <a:endParaRPr lang="en-US" sz="1200" dirty="0"/>
+          </a:p>
+        </p:txBody>
+      </p:sp>
+      <p:sp>
+        <p:nvSpPr>
+          <p:cNvPr id="44" name="Text 42"/>
+          <p:cNvSpPr/>
+          <p:nvPr/>
+        </p:nvSpPr>
+        <p:spPr>
+          <a:xfrm>
+            <a:off x="10559000" y="3611880"/>
+            <a:ext cx="1051560" cy="219456"/>
+          </a:xfrm>
+          <a:prstGeom prst="rect">
+            <a:avLst/>
+          </a:prstGeom>
+          <a:noFill/>
+          <a:ln/>
+        </p:spPr>
+        <p:txBody>
+          <a:bodyPr wrap="square" lIns="0" tIns="0" rIns="0" bIns="0" rtlCol="0" anchor="ctr"/>
+          <a:lstStyle/>
+          <a:p>
+            <a:pPr marL="0" indent="0" algn="r">
+              <a:buNone/>
+            </a:pPr>
+            <a:r>
+              <a:rPr lang="en-US" sz="1000" dirty="0">
+                <a:solidFill>
+                  <a:srgbClr val="64748B"/>
+                </a:solidFill>
+                <a:latin typeface="Calibri" pitchFamily="34" charset="0"/>
+                <a:ea typeface="Calibri" pitchFamily="34" charset="-122"/>
+                <a:cs typeface="Calibri" pitchFamily="34" charset="-120"/>
+              </a:rPr>
+              <a:t>Deliver</a:t>
+            </a:r>
+            <a:endParaRPr lang="en-US" sz="1000" dirty="0"/>
+          </a:p>
+        </p:txBody>
+      </p:sp>
+      <p:sp>
+        <p:nvSpPr>
+          <p:cNvPr id="45" name="Shape 43"/>
+          <p:cNvSpPr/>
+          <p:nvPr/>
+        </p:nvSpPr>
+        <p:spPr>
+          <a:xfrm>
+            <a:off x="454880" y="4005072"/>
+            <a:ext cx="5532120" cy="548640"/>
+          </a:xfrm>
+          <a:prstGeom prst="rect">
+            <a:avLst/>
+          </a:prstGeom>
+          <a:solidFill>
+            <a:srgbClr val="FFFFFF"/>
+          </a:solidFill>
+          <a:ln w="6350">
+            <a:solidFill>
+              <a:srgbClr val="E2E8F0"/>
+            </a:solidFill>
+            <a:prstDash val="solid"/>
+          </a:ln>
+        </p:spPr>
+        <p:txBody>
+          <a:bodyPr/>
+          <a:lstStyle/>
+          <a:p>
+            <a:endParaRPr lang="en-US"/>
+          </a:p>
+        </p:txBody>
+      </p:sp>
+      <p:sp>
+        <p:nvSpPr>
+          <p:cNvPr id="46" name="Shape 44"/>
+          <p:cNvSpPr/>
+          <p:nvPr/>
+        </p:nvSpPr>
+        <p:spPr>
+          <a:xfrm>
+            <a:off x="454880" y="4005072"/>
+            <a:ext cx="45720" cy="548640"/>
+          </a:xfrm>
+          <a:prstGeom prst="rect">
+            <a:avLst/>
+          </a:prstGeom>
+          <a:solidFill>
+            <a:srgbClr val="F69E0B"/>
+          </a:solidFill>
+          <a:ln w="12700">
+            <a:noFill/>
+            <a:prstDash val="solid"/>
+          </a:ln>
+        </p:spPr>
+        <p:txBody>
+          <a:bodyPr/>
+          <a:lstStyle/>
+          <a:p>
+            <a:endParaRPr lang="en-US"/>
+          </a:p>
+        </p:txBody>
+      </p:sp>
+      <p:sp>
+        <p:nvSpPr>
+          <p:cNvPr id="47" name="Text 45"/>
+          <p:cNvSpPr/>
+          <p:nvPr/>
+        </p:nvSpPr>
+        <p:spPr>
+          <a:xfrm>
+            <a:off x="592040" y="4059936"/>
+            <a:ext cx="1828800" cy="182880"/>
+          </a:xfrm>
+          <a:prstGeom prst="rect">
+            <a:avLst/>
+          </a:prstGeom>
+          <a:noFill/>
+          <a:ln/>
+        </p:spPr>
+        <p:txBody>
+          <a:bodyPr wrap="square" lIns="0" tIns="0" rIns="0" bIns="0" rtlCol="0" anchor="ctr"/>
+          <a:lstStyle/>
+          <a:p>
+            <a:pPr marL="0" indent="0">
+              <a:buNone/>
+            </a:pPr>
+            <a:r>
+              <a:rPr lang="en-US" sz="700" b="1" kern="0" spc="200" dirty="0">
+                <a:solidFill>
+                  <a:srgbClr val="F59E0B"/>
+                </a:solidFill>
+                <a:latin typeface="Calibri" pitchFamily="34" charset="0"/>
+                <a:ea typeface="Calibri" pitchFamily="34" charset="-122"/>
+                <a:cs typeface="Calibri" pitchFamily="34" charset="-120"/>
+              </a:rPr>
+              <a:t>Skill — 03/06</a:t>
+            </a:r>
+            <a:endParaRPr lang="en-US" sz="700" dirty="0"/>
+          </a:p>
+        </p:txBody>
+      </p:sp>
+      <p:sp>
+        <p:nvSpPr>
+          <p:cNvPr id="48" name="Text 46"/>
+          <p:cNvSpPr/>
+          <p:nvPr/>
+        </p:nvSpPr>
+        <p:spPr>
+          <a:xfrm>
+            <a:off x="592040" y="4270248"/>
+            <a:ext cx="4114800" cy="219456"/>
+          </a:xfrm>
+          <a:prstGeom prst="rect">
+            <a:avLst/>
+          </a:prstGeom>
+          <a:noFill/>
+          <a:ln/>
+        </p:spPr>
+        <p:txBody>
+          <a:bodyPr wrap="square" lIns="0" tIns="0" rIns="0" bIns="0" rtlCol="0" anchor="ctr"/>
+          <a:lstStyle/>
+          <a:p>
+            <a:pPr marL="0" indent="0">
+              <a:buNone/>
+            </a:pPr>
+            <a:r>
+              <a:rPr lang="en-US" sz="1200" dirty="0">
+                <a:solidFill>
+                  <a:srgbClr val="0F172A"/>
+                </a:solidFill>
+                <a:latin typeface="Calibri" pitchFamily="34" charset="0"/>
+                <a:ea typeface="Calibri" pitchFamily="34" charset="-122"/>
+                <a:cs typeface="Calibri" pitchFamily="34" charset="-120"/>
+              </a:rPr>
+              <a:t>design-systems.md</a:t>
+            </a:r>
+            <a:endParaRPr lang="en-US" sz="1200" dirty="0"/>
+          </a:p>
+        </p:txBody>
+      </p:sp>
+      <p:sp>
+        <p:nvSpPr>
+          <p:cNvPr id="49" name="Text 47"/>
+          <p:cNvSpPr/>
+          <p:nvPr/>
+        </p:nvSpPr>
+        <p:spPr>
+          <a:xfrm>
+            <a:off x="4798280" y="4270248"/>
+            <a:ext cx="1051560" cy="219456"/>
+          </a:xfrm>
+          <a:prstGeom prst="rect">
+            <a:avLst/>
+          </a:prstGeom>
+          <a:noFill/>
+          <a:ln/>
+        </p:spPr>
+        <p:txBody>
+          <a:bodyPr wrap="square" lIns="0" tIns="0" rIns="0" bIns="0" rtlCol="0" anchor="ctr"/>
+          <a:lstStyle/>
+          <a:p>
+            <a:pPr marL="0" indent="0" algn="r">
+              <a:buNone/>
+            </a:pPr>
+            <a:r>
+              <a:rPr lang="en-US" sz="1000" dirty="0">
+                <a:solidFill>
+                  <a:srgbClr val="64748B"/>
+                </a:solidFill>
+                <a:latin typeface="Calibri" pitchFamily="34" charset="0"/>
+                <a:ea typeface="Calibri" pitchFamily="34" charset="-122"/>
+                <a:cs typeface="Calibri" pitchFamily="34" charset="-120"/>
+              </a:rPr>
+              <a:t>Ideate + Deliver</a:t>
+            </a:r>
+            <a:endParaRPr lang="en-US" sz="1000" dirty="0"/>
+          </a:p>
+        </p:txBody>
+      </p:sp>
+      <p:sp>
+        <p:nvSpPr>
+          <p:cNvPr id="50" name="Shape 48"/>
+          <p:cNvSpPr/>
+          <p:nvPr/>
+        </p:nvSpPr>
+        <p:spPr>
+          <a:xfrm>
+            <a:off x="6215600" y="4005072"/>
+            <a:ext cx="5532120" cy="548640"/>
+          </a:xfrm>
+          <a:prstGeom prst="rect">
+            <a:avLst/>
+          </a:prstGeom>
+          <a:solidFill>
+            <a:srgbClr val="FFFFFF"/>
+          </a:solidFill>
+          <a:ln w="6350">
+            <a:solidFill>
+              <a:srgbClr val="E2E8F0"/>
+            </a:solidFill>
+            <a:prstDash val="solid"/>
+          </a:ln>
+        </p:spPr>
+        <p:txBody>
+          <a:bodyPr/>
+          <a:lstStyle/>
+          <a:p>
+            <a:endParaRPr lang="en-US"/>
+          </a:p>
+        </p:txBody>
+      </p:sp>
+      <p:sp>
+        <p:nvSpPr>
+          <p:cNvPr id="51" name="Shape 49"/>
+          <p:cNvSpPr/>
+          <p:nvPr/>
+        </p:nvSpPr>
+        <p:spPr>
+          <a:xfrm>
+            <a:off x="6215600" y="4005072"/>
+            <a:ext cx="45720" cy="548640"/>
+          </a:xfrm>
+          <a:prstGeom prst="rect">
+            <a:avLst/>
+          </a:prstGeom>
+          <a:solidFill>
+            <a:schemeClr val="bg2"/>
+          </a:solidFill>
+          <a:ln w="12700">
+            <a:noFill/>
+            <a:prstDash val="solid"/>
+          </a:ln>
+        </p:spPr>
+        <p:txBody>
+          <a:bodyPr/>
+          <a:lstStyle/>
+          <a:p>
+            <a:endParaRPr lang="en-US"/>
+          </a:p>
+        </p:txBody>
+      </p:sp>
+      <p:sp>
+        <p:nvSpPr>
+          <p:cNvPr id="52" name="Text 50"/>
+          <p:cNvSpPr/>
+          <p:nvPr/>
+        </p:nvSpPr>
+        <p:spPr>
+          <a:xfrm>
+            <a:off x="6352760" y="4059936"/>
+            <a:ext cx="1828800" cy="182880"/>
+          </a:xfrm>
+          <a:prstGeom prst="rect">
+            <a:avLst/>
+          </a:prstGeom>
+          <a:noFill/>
+          <a:ln/>
+        </p:spPr>
+        <p:txBody>
+          <a:bodyPr wrap="square" lIns="0" tIns="0" rIns="0" bIns="0" rtlCol="0" anchor="ctr"/>
+          <a:lstStyle/>
+          <a:p>
+            <a:pPr marL="0" indent="0">
+              <a:buNone/>
+            </a:pPr>
+            <a:r>
+              <a:rPr lang="en-US" sz="700" b="1" kern="0" spc="200" dirty="0">
+                <a:solidFill>
+                  <a:schemeClr val="bg1">
+                    <a:lumMod val="50000"/>
+                  </a:schemeClr>
+                </a:solidFill>
+                <a:latin typeface="Calibri" pitchFamily="34" charset="0"/>
+                <a:ea typeface="Calibri" pitchFamily="34" charset="-122"/>
+                <a:cs typeface="Calibri" pitchFamily="34" charset="-120"/>
+              </a:rPr>
+              <a:t>Skill — ALL</a:t>
+            </a:r>
+            <a:endParaRPr lang="en-US" sz="700" dirty="0">
+              <a:solidFill>
+                <a:schemeClr val="bg1">
+                  <a:lumMod val="50000"/>
+                </a:schemeClr>
+              </a:solidFill>
+            </a:endParaRPr>
+          </a:p>
+        </p:txBody>
+      </p:sp>
+      <p:sp>
+        <p:nvSpPr>
+          <p:cNvPr id="53" name="Text 51"/>
+          <p:cNvSpPr/>
+          <p:nvPr/>
+        </p:nvSpPr>
+        <p:spPr>
+          <a:xfrm>
+            <a:off x="6352760" y="4270248"/>
+            <a:ext cx="4114800" cy="219456"/>
+          </a:xfrm>
+          <a:prstGeom prst="rect">
+            <a:avLst/>
+          </a:prstGeom>
+          <a:noFill/>
+          <a:ln/>
+        </p:spPr>
+        <p:txBody>
+          <a:bodyPr wrap="square" lIns="0" tIns="0" rIns="0" bIns="0" rtlCol="0" anchor="ctr"/>
+          <a:lstStyle/>
+          <a:p>
+            <a:pPr marL="0" indent="0">
+              <a:buNone/>
+            </a:pPr>
+            <a:r>
+              <a:rPr lang="en-US" sz="1200" dirty="0">
+                <a:solidFill>
+                  <a:srgbClr val="0F172A"/>
+                </a:solidFill>
+                <a:latin typeface="Calibri" pitchFamily="34" charset="0"/>
+                <a:ea typeface="Calibri" pitchFamily="34" charset="-122"/>
+                <a:cs typeface="Calibri" pitchFamily="34" charset="-120"/>
+              </a:rPr>
+              <a:t>figma-playbook.md</a:t>
+            </a:r>
+            <a:endParaRPr lang="en-US" sz="1200" dirty="0"/>
+          </a:p>
+        </p:txBody>
+      </p:sp>
+      <p:sp>
+        <p:nvSpPr>
+          <p:cNvPr id="54" name="Text 52"/>
+          <p:cNvSpPr/>
+          <p:nvPr/>
+        </p:nvSpPr>
+        <p:spPr>
+          <a:xfrm>
+            <a:off x="10559000" y="4270248"/>
+            <a:ext cx="1051560" cy="219456"/>
+          </a:xfrm>
+          <a:prstGeom prst="rect">
+            <a:avLst/>
+          </a:prstGeom>
+          <a:noFill/>
+          <a:ln/>
+        </p:spPr>
+        <p:txBody>
+          <a:bodyPr wrap="square" lIns="0" tIns="0" rIns="0" bIns="0" rtlCol="0" anchor="ctr"/>
+          <a:lstStyle/>
+          <a:p>
+            <a:pPr marL="0" indent="0" algn="r">
+              <a:buNone/>
+            </a:pPr>
+            <a:r>
+              <a:rPr lang="en-US" sz="1000" dirty="0">
+                <a:solidFill>
+                  <a:srgbClr val="64748B"/>
+                </a:solidFill>
+                <a:latin typeface="Calibri" pitchFamily="34" charset="0"/>
+                <a:ea typeface="Calibri" pitchFamily="34" charset="-122"/>
+                <a:cs typeface="Calibri" pitchFamily="34" charset="-120"/>
+              </a:rPr>
+              <a:t>All phases</a:t>
+            </a:r>
+            <a:endParaRPr lang="en-US" sz="1000" dirty="0"/>
+          </a:p>
+        </p:txBody>
+      </p:sp>
+      <p:sp>
+        <p:nvSpPr>
+          <p:cNvPr id="55" name="Shape 53"/>
+          <p:cNvSpPr/>
+          <p:nvPr/>
+        </p:nvSpPr>
+        <p:spPr>
+          <a:xfrm>
+            <a:off x="454880" y="4663440"/>
+            <a:ext cx="5532120" cy="548640"/>
+          </a:xfrm>
+          <a:prstGeom prst="rect">
+            <a:avLst/>
+          </a:prstGeom>
+          <a:solidFill>
+            <a:srgbClr val="FFFFFF"/>
+          </a:solidFill>
+          <a:ln w="6350">
+            <a:solidFill>
+              <a:srgbClr val="E2E8F0"/>
+            </a:solidFill>
+            <a:prstDash val="solid"/>
+          </a:ln>
+        </p:spPr>
+        <p:txBody>
+          <a:bodyPr/>
+          <a:lstStyle/>
+          <a:p>
+            <a:endParaRPr lang="en-US"/>
+          </a:p>
+        </p:txBody>
+      </p:sp>
+      <p:sp>
+        <p:nvSpPr>
+          <p:cNvPr id="56" name="Shape 54"/>
+          <p:cNvSpPr/>
+          <p:nvPr/>
+        </p:nvSpPr>
+        <p:spPr>
+          <a:xfrm>
+            <a:off x="454880" y="4663440"/>
+            <a:ext cx="45720" cy="548640"/>
+          </a:xfrm>
+          <a:prstGeom prst="rect">
+            <a:avLst/>
+          </a:prstGeom>
+          <a:solidFill>
+            <a:schemeClr val="bg2"/>
+          </a:solidFill>
+          <a:ln w="12700">
+            <a:noFill/>
+            <a:prstDash val="solid"/>
+          </a:ln>
+        </p:spPr>
+        <p:txBody>
+          <a:bodyPr/>
+          <a:lstStyle/>
+          <a:p>
+            <a:endParaRPr lang="en-US"/>
+          </a:p>
+        </p:txBody>
+      </p:sp>
+      <p:sp>
+        <p:nvSpPr>
+          <p:cNvPr id="57" name="Text 55"/>
+          <p:cNvSpPr/>
+          <p:nvPr/>
+        </p:nvSpPr>
+        <p:spPr>
+          <a:xfrm>
+            <a:off x="592040" y="4718304"/>
+            <a:ext cx="1828800" cy="182880"/>
+          </a:xfrm>
+          <a:prstGeom prst="rect">
+            <a:avLst/>
+          </a:prstGeom>
+          <a:noFill/>
+          <a:ln/>
+        </p:spPr>
+        <p:txBody>
+          <a:bodyPr wrap="square" lIns="0" tIns="0" rIns="0" bIns="0" rtlCol="0" anchor="ctr"/>
+          <a:lstStyle/>
+          <a:p>
+            <a:pPr marL="0" indent="0">
+              <a:buNone/>
+            </a:pPr>
+            <a:r>
+              <a:rPr lang="en-US" sz="700" b="1" kern="0" spc="200" dirty="0">
+                <a:solidFill>
+                  <a:schemeClr val="bg1">
+                    <a:lumMod val="50000"/>
+                  </a:schemeClr>
+                </a:solidFill>
+                <a:latin typeface="Calibri" pitchFamily="34" charset="0"/>
+                <a:ea typeface="Calibri" pitchFamily="34" charset="-122"/>
+                <a:cs typeface="Calibri" pitchFamily="34" charset="-120"/>
+              </a:rPr>
+              <a:t>Artifact</a:t>
+            </a:r>
+            <a:endParaRPr lang="en-US" sz="700" dirty="0">
+              <a:solidFill>
+                <a:schemeClr val="bg1">
+                  <a:lumMod val="50000"/>
+                </a:schemeClr>
+              </a:solidFill>
+            </a:endParaRPr>
+          </a:p>
+        </p:txBody>
+      </p:sp>
+      <p:sp>
+        <p:nvSpPr>
+          <p:cNvPr id="58" name="Text 56"/>
+          <p:cNvSpPr/>
+          <p:nvPr/>
+        </p:nvSpPr>
+        <p:spPr>
+          <a:xfrm>
+            <a:off x="592040" y="4928616"/>
+            <a:ext cx="4114800" cy="219456"/>
+          </a:xfrm>
+          <a:prstGeom prst="rect">
+            <a:avLst/>
+          </a:prstGeom>
+          <a:noFill/>
+          <a:ln/>
+        </p:spPr>
+        <p:txBody>
+          <a:bodyPr wrap="square" lIns="0" tIns="0" rIns="0" bIns="0" rtlCol="0" anchor="ctr"/>
+          <a:lstStyle/>
+          <a:p>
+            <a:pPr marL="0" indent="0">
+              <a:buNone/>
+            </a:pPr>
+            <a:r>
+              <a:rPr lang="en-US" sz="1200" dirty="0">
+                <a:solidFill>
+                  <a:srgbClr val="0F172A"/>
+                </a:solidFill>
+                <a:latin typeface="Calibri" pitchFamily="34" charset="0"/>
+                <a:ea typeface="Calibri" pitchFamily="34" charset="-122"/>
+                <a:cs typeface="Calibri" pitchFamily="34" charset="-120"/>
+              </a:rPr>
+              <a:t>design-process-system.jsx</a:t>
+            </a:r>
+            <a:endParaRPr lang="en-US" sz="1200" dirty="0"/>
+          </a:p>
+        </p:txBody>
+      </p:sp>
+      <p:sp>
+        <p:nvSpPr>
+          <p:cNvPr id="59" name="Text 57"/>
+          <p:cNvSpPr/>
+          <p:nvPr/>
+        </p:nvSpPr>
+        <p:spPr>
+          <a:xfrm>
+            <a:off x="4798280" y="4928616"/>
+            <a:ext cx="1051560" cy="219456"/>
+          </a:xfrm>
+          <a:prstGeom prst="rect">
+            <a:avLst/>
+          </a:prstGeom>
+          <a:noFill/>
+          <a:ln/>
+        </p:spPr>
+        <p:txBody>
+          <a:bodyPr wrap="square" lIns="0" tIns="0" rIns="0" bIns="0" rtlCol="0" anchor="ctr"/>
+          <a:lstStyle/>
+          <a:p>
+            <a:pPr marL="0" indent="0" algn="r">
+              <a:buNone/>
+            </a:pPr>
+            <a:r>
+              <a:rPr lang="en-US" sz="1000" dirty="0">
+                <a:solidFill>
+                  <a:srgbClr val="64748B"/>
+                </a:solidFill>
+                <a:latin typeface="Calibri" pitchFamily="34" charset="0"/>
+                <a:ea typeface="Calibri" pitchFamily="34" charset="-122"/>
+                <a:cs typeface="Calibri" pitchFamily="34" charset="-120"/>
+              </a:rPr>
+              <a:t>Phase explorer</a:t>
+            </a:r>
+            <a:endParaRPr lang="en-US" sz="1000" dirty="0"/>
+          </a:p>
+        </p:txBody>
+      </p:sp>
+      <p:sp>
+        <p:nvSpPr>
+          <p:cNvPr id="60" name="Shape 58"/>
+          <p:cNvSpPr/>
+          <p:nvPr/>
+        </p:nvSpPr>
+        <p:spPr>
+          <a:xfrm>
+            <a:off x="6215600" y="4663440"/>
+            <a:ext cx="5532120" cy="548640"/>
+          </a:xfrm>
+          <a:prstGeom prst="rect">
+            <a:avLst/>
+          </a:prstGeom>
+          <a:solidFill>
+            <a:srgbClr val="FFFFFF"/>
+          </a:solidFill>
+          <a:ln w="6350">
+            <a:solidFill>
+              <a:srgbClr val="E2E8F0"/>
+            </a:solidFill>
+            <a:prstDash val="solid"/>
+          </a:ln>
+        </p:spPr>
+        <p:txBody>
+          <a:bodyPr/>
+          <a:lstStyle/>
+          <a:p>
+            <a:endParaRPr lang="en-US"/>
+          </a:p>
+        </p:txBody>
+      </p:sp>
+      <p:sp>
+        <p:nvSpPr>
+          <p:cNvPr id="61" name="Shape 59"/>
+          <p:cNvSpPr/>
+          <p:nvPr/>
+        </p:nvSpPr>
+        <p:spPr>
+          <a:xfrm>
+            <a:off x="6215600" y="4663440"/>
+            <a:ext cx="45720" cy="548640"/>
+          </a:xfrm>
+          <a:prstGeom prst="rect">
+            <a:avLst/>
+          </a:prstGeom>
+          <a:solidFill>
+            <a:schemeClr val="bg2"/>
+          </a:solidFill>
+          <a:ln w="12700">
+            <a:noFill/>
+            <a:prstDash val="solid"/>
+          </a:ln>
+        </p:spPr>
+        <p:txBody>
+          <a:bodyPr/>
+          <a:lstStyle/>
+          <a:p>
+            <a:endParaRPr lang="en-US"/>
+          </a:p>
+        </p:txBody>
+      </p:sp>
+      <p:sp>
+        <p:nvSpPr>
+          <p:cNvPr id="62" name="Text 60"/>
+          <p:cNvSpPr/>
+          <p:nvPr/>
+        </p:nvSpPr>
+        <p:spPr>
+          <a:xfrm>
+            <a:off x="6352760" y="4718304"/>
+            <a:ext cx="1828800" cy="182880"/>
+          </a:xfrm>
+          <a:prstGeom prst="rect">
+            <a:avLst/>
+          </a:prstGeom>
+          <a:noFill/>
+          <a:ln/>
+        </p:spPr>
+        <p:txBody>
+          <a:bodyPr wrap="square" lIns="0" tIns="0" rIns="0" bIns="0" rtlCol="0" anchor="ctr"/>
+          <a:lstStyle/>
+          <a:p>
+            <a:pPr marL="0" indent="0">
+              <a:buNone/>
+            </a:pPr>
+            <a:r>
+              <a:rPr lang="en-US" sz="700" b="1" kern="0" spc="200" dirty="0">
+                <a:solidFill>
+                  <a:schemeClr val="bg1">
+                    <a:lumMod val="50000"/>
+                  </a:schemeClr>
+                </a:solidFill>
+                <a:latin typeface="Calibri" pitchFamily="34" charset="0"/>
+                <a:ea typeface="Calibri" pitchFamily="34" charset="-122"/>
+                <a:cs typeface="Calibri" pitchFamily="34" charset="-120"/>
+              </a:rPr>
+              <a:t>Artifact</a:t>
+            </a:r>
+            <a:endParaRPr lang="en-US" sz="700" dirty="0">
+              <a:solidFill>
+                <a:schemeClr val="bg1">
+                  <a:lumMod val="50000"/>
+                </a:schemeClr>
+              </a:solidFill>
+            </a:endParaRPr>
+          </a:p>
+        </p:txBody>
+      </p:sp>
+      <p:sp>
+        <p:nvSpPr>
+          <p:cNvPr id="63" name="Text 61"/>
+          <p:cNvSpPr/>
+          <p:nvPr/>
+        </p:nvSpPr>
+        <p:spPr>
+          <a:xfrm>
+            <a:off x="6352760" y="4928616"/>
+            <a:ext cx="4114800" cy="219456"/>
+          </a:xfrm>
+          <a:prstGeom prst="rect">
+            <a:avLst/>
+          </a:prstGeom>
+          <a:noFill/>
+          <a:ln/>
+        </p:spPr>
+        <p:txBody>
+          <a:bodyPr wrap="square" lIns="0" tIns="0" rIns="0" bIns="0" rtlCol="0" anchor="ctr"/>
+          <a:lstStyle/>
+          <a:p>
+            <a:pPr marL="0" indent="0">
+              <a:buNone/>
+            </a:pPr>
+            <a:r>
+              <a:rPr lang="en-US" sz="1200" dirty="0">
+                <a:solidFill>
+                  <a:srgbClr val="0F172A"/>
+                </a:solidFill>
+                <a:latin typeface="Calibri" pitchFamily="34" charset="0"/>
+                <a:ea typeface="Calibri" pitchFamily="34" charset="-122"/>
+                <a:cs typeface="Calibri" pitchFamily="34" charset="-120"/>
+              </a:rPr>
+              <a:t>design-tokens-system.jsx</a:t>
+            </a:r>
+            <a:endParaRPr lang="en-US" sz="1200" dirty="0"/>
+          </a:p>
+        </p:txBody>
+      </p:sp>
+      <p:sp>
+        <p:nvSpPr>
+          <p:cNvPr id="64" name="Text 62"/>
+          <p:cNvSpPr/>
+          <p:nvPr/>
+        </p:nvSpPr>
+        <p:spPr>
+          <a:xfrm>
+            <a:off x="10559000" y="4928616"/>
+            <a:ext cx="1051560" cy="219456"/>
+          </a:xfrm>
+          <a:prstGeom prst="rect">
+            <a:avLst/>
+          </a:prstGeom>
+          <a:noFill/>
+          <a:ln/>
+        </p:spPr>
+        <p:txBody>
+          <a:bodyPr wrap="square" lIns="0" tIns="0" rIns="0" bIns="0" rtlCol="0" anchor="ctr"/>
+          <a:lstStyle/>
+          <a:p>
+            <a:pPr marL="0" indent="0" algn="r">
+              <a:buNone/>
+            </a:pPr>
+            <a:r>
+              <a:rPr lang="en-US" sz="1000" dirty="0">
+                <a:solidFill>
+                  <a:srgbClr val="64748B"/>
+                </a:solidFill>
+                <a:latin typeface="Calibri" pitchFamily="34" charset="0"/>
+                <a:ea typeface="Calibri" pitchFamily="34" charset="-122"/>
+                <a:cs typeface="Calibri" pitchFamily="34" charset="-120"/>
+              </a:rPr>
+              <a:t>Token builder</a:t>
+            </a:r>
+            <a:endParaRPr lang="en-US" sz="1000" dirty="0"/>
+          </a:p>
+        </p:txBody>
+      </p:sp>
+      <p:sp>
+        <p:nvSpPr>
+          <p:cNvPr id="65" name="Shape 63"/>
+          <p:cNvSpPr/>
+          <p:nvPr/>
+        </p:nvSpPr>
+        <p:spPr>
+          <a:xfrm>
+            <a:off x="454880" y="5321808"/>
+            <a:ext cx="5532120" cy="548640"/>
+          </a:xfrm>
+          <a:prstGeom prst="rect">
+            <a:avLst/>
+          </a:prstGeom>
+          <a:solidFill>
+            <a:srgbClr val="FFFFFF"/>
+          </a:solidFill>
+          <a:ln w="6350">
+            <a:solidFill>
+              <a:srgbClr val="E2E8F0"/>
+            </a:solidFill>
+            <a:prstDash val="solid"/>
+          </a:ln>
+        </p:spPr>
+        <p:txBody>
+          <a:bodyPr/>
+          <a:lstStyle/>
+          <a:p>
+            <a:endParaRPr lang="en-US"/>
+          </a:p>
+        </p:txBody>
+      </p:sp>
+      <p:sp>
+        <p:nvSpPr>
+          <p:cNvPr id="66" name="Shape 64"/>
+          <p:cNvSpPr/>
+          <p:nvPr/>
+        </p:nvSpPr>
+        <p:spPr>
+          <a:xfrm>
+            <a:off x="454880" y="5321808"/>
+            <a:ext cx="45720" cy="548640"/>
+          </a:xfrm>
+          <a:prstGeom prst="rect">
+            <a:avLst/>
+          </a:prstGeom>
+          <a:solidFill>
+            <a:schemeClr val="bg2"/>
+          </a:solidFill>
+          <a:ln w="12700">
+            <a:noFill/>
+            <a:prstDash val="solid"/>
+          </a:ln>
+        </p:spPr>
+        <p:txBody>
+          <a:bodyPr/>
+          <a:lstStyle/>
+          <a:p>
+            <a:endParaRPr lang="en-US"/>
+          </a:p>
+        </p:txBody>
+      </p:sp>
+      <p:sp>
+        <p:nvSpPr>
+          <p:cNvPr id="67" name="Text 65"/>
+          <p:cNvSpPr/>
+          <p:nvPr/>
+        </p:nvSpPr>
+        <p:spPr>
+          <a:xfrm>
+            <a:off x="592040" y="5376672"/>
+            <a:ext cx="1828800" cy="182880"/>
+          </a:xfrm>
+          <a:prstGeom prst="rect">
+            <a:avLst/>
+          </a:prstGeom>
+          <a:noFill/>
+          <a:ln/>
+        </p:spPr>
+        <p:txBody>
+          <a:bodyPr wrap="square" lIns="0" tIns="0" rIns="0" bIns="0" rtlCol="0" anchor="ctr"/>
+          <a:lstStyle/>
+          <a:p>
+            <a:pPr marL="0" indent="0">
+              <a:buNone/>
+            </a:pPr>
+            <a:r>
+              <a:rPr lang="en-US" sz="700" b="1" kern="0" spc="200" dirty="0">
+                <a:solidFill>
+                  <a:schemeClr val="bg1">
+                    <a:lumMod val="50000"/>
+                  </a:schemeClr>
+                </a:solidFill>
+                <a:latin typeface="Calibri" pitchFamily="34" charset="0"/>
+                <a:ea typeface="Calibri" pitchFamily="34" charset="-122"/>
+                <a:cs typeface="Calibri" pitchFamily="34" charset="-120"/>
+              </a:rPr>
+              <a:t>Artifact</a:t>
+            </a:r>
+            <a:endParaRPr lang="en-US" sz="700" dirty="0">
+              <a:solidFill>
+                <a:schemeClr val="bg1">
+                  <a:lumMod val="50000"/>
+                </a:schemeClr>
+              </a:solidFill>
+            </a:endParaRPr>
+          </a:p>
+        </p:txBody>
+      </p:sp>
+      <p:sp>
+        <p:nvSpPr>
+          <p:cNvPr id="68" name="Text 66"/>
+          <p:cNvSpPr/>
+          <p:nvPr/>
+        </p:nvSpPr>
+        <p:spPr>
+          <a:xfrm>
+            <a:off x="592040" y="5586984"/>
+            <a:ext cx="4114800" cy="219456"/>
+          </a:xfrm>
+          <a:prstGeom prst="rect">
+            <a:avLst/>
+          </a:prstGeom>
+          <a:noFill/>
+          <a:ln/>
+        </p:spPr>
+        <p:txBody>
+          <a:bodyPr wrap="square" lIns="0" tIns="0" rIns="0" bIns="0" rtlCol="0" anchor="ctr"/>
+          <a:lstStyle/>
+          <a:p>
+            <a:pPr marL="0" indent="0">
+              <a:buNone/>
+            </a:pPr>
+            <a:r>
+              <a:rPr lang="en-US" sz="1200" dirty="0">
+                <a:solidFill>
+                  <a:srgbClr val="0F172A"/>
+                </a:solidFill>
+                <a:latin typeface="Calibri" pitchFamily="34" charset="0"/>
+                <a:ea typeface="Calibri" pitchFamily="34" charset="-122"/>
+                <a:cs typeface="Calibri" pitchFamily="34" charset="-120"/>
+              </a:rPr>
+              <a:t>design-system-checklist.jsx</a:t>
+            </a:r>
+            <a:endParaRPr lang="en-US" sz="1200" dirty="0"/>
+          </a:p>
+        </p:txBody>
+      </p:sp>
+      <p:sp>
+        <p:nvSpPr>
+          <p:cNvPr id="69" name="Text 67"/>
+          <p:cNvSpPr/>
+          <p:nvPr/>
+        </p:nvSpPr>
+        <p:spPr>
+          <a:xfrm>
+            <a:off x="4798280" y="5586984"/>
+            <a:ext cx="1051560" cy="219456"/>
+          </a:xfrm>
+          <a:prstGeom prst="rect">
+            <a:avLst/>
+          </a:prstGeom>
+          <a:noFill/>
+          <a:ln/>
+        </p:spPr>
+        <p:txBody>
+          <a:bodyPr wrap="square" lIns="0" tIns="0" rIns="0" bIns="0" rtlCol="0" anchor="ctr"/>
+          <a:lstStyle/>
+          <a:p>
+            <a:pPr marL="0" indent="0" algn="r">
+              <a:buNone/>
+            </a:pPr>
+            <a:r>
+              <a:rPr lang="en-US" sz="1000" dirty="0">
+                <a:solidFill>
+                  <a:srgbClr val="64748B"/>
+                </a:solidFill>
+                <a:latin typeface="Calibri" pitchFamily="34" charset="0"/>
+                <a:ea typeface="Calibri" pitchFamily="34" charset="-122"/>
+                <a:cs typeface="Calibri" pitchFamily="34" charset="-120"/>
+              </a:rPr>
+              <a:t>Audit tool</a:t>
+            </a:r>
+            <a:endParaRPr lang="en-US" sz="1000" dirty="0"/>
+          </a:p>
+        </p:txBody>
+      </p:sp>
+      <p:sp>
+        <p:nvSpPr>
+          <p:cNvPr id="70" name="Shape 68"/>
+          <p:cNvSpPr/>
+          <p:nvPr/>
+        </p:nvSpPr>
+        <p:spPr>
+          <a:xfrm>
+            <a:off x="6215600" y="5321808"/>
+            <a:ext cx="5532120" cy="548640"/>
+          </a:xfrm>
+          <a:prstGeom prst="rect">
+            <a:avLst/>
+          </a:prstGeom>
+          <a:solidFill>
+            <a:srgbClr val="FFFFFF"/>
+          </a:solidFill>
+          <a:ln w="6350">
+            <a:solidFill>
+              <a:srgbClr val="E2E8F0"/>
+            </a:solidFill>
+            <a:prstDash val="solid"/>
+          </a:ln>
+        </p:spPr>
+        <p:txBody>
+          <a:bodyPr/>
+          <a:lstStyle/>
+          <a:p>
+            <a:endParaRPr lang="en-US"/>
+          </a:p>
+        </p:txBody>
+      </p:sp>
+      <p:sp>
+        <p:nvSpPr>
+          <p:cNvPr id="71" name="Shape 69"/>
+          <p:cNvSpPr/>
+          <p:nvPr/>
+        </p:nvSpPr>
+        <p:spPr>
+          <a:xfrm>
+            <a:off x="6215600" y="5321808"/>
+            <a:ext cx="45720" cy="548640"/>
+          </a:xfrm>
+          <a:prstGeom prst="rect">
+            <a:avLst/>
+          </a:prstGeom>
+          <a:solidFill>
+            <a:schemeClr val="bg2"/>
+          </a:solidFill>
+          <a:ln w="12700">
+            <a:noFill/>
+            <a:prstDash val="solid"/>
+          </a:ln>
+        </p:spPr>
+        <p:txBody>
+          <a:bodyPr/>
+          <a:lstStyle/>
+          <a:p>
+            <a:endParaRPr lang="en-US"/>
+          </a:p>
+        </p:txBody>
+      </p:sp>
+      <p:sp>
+        <p:nvSpPr>
+          <p:cNvPr id="72" name="Text 70"/>
+          <p:cNvSpPr/>
+          <p:nvPr/>
+        </p:nvSpPr>
+        <p:spPr>
+          <a:xfrm>
+            <a:off x="6352760" y="5376672"/>
+            <a:ext cx="1828800" cy="182880"/>
+          </a:xfrm>
+          <a:prstGeom prst="rect">
+            <a:avLst/>
+          </a:prstGeom>
+          <a:noFill/>
+          <a:ln/>
+        </p:spPr>
+        <p:txBody>
+          <a:bodyPr wrap="square" lIns="0" tIns="0" rIns="0" bIns="0" rtlCol="0" anchor="ctr"/>
+          <a:lstStyle/>
+          <a:p>
+            <a:pPr marL="0" indent="0">
+              <a:buNone/>
+            </a:pPr>
+            <a:r>
+              <a:rPr lang="en-US" sz="700" b="1" kern="0" spc="200" dirty="0">
+                <a:solidFill>
+                  <a:schemeClr val="bg1">
+                    <a:lumMod val="50000"/>
+                  </a:schemeClr>
+                </a:solidFill>
+                <a:latin typeface="Calibri" pitchFamily="34" charset="0"/>
+                <a:ea typeface="Calibri" pitchFamily="34" charset="-122"/>
+                <a:cs typeface="Calibri" pitchFamily="34" charset="-120"/>
+              </a:rPr>
+              <a:t>Artifact</a:t>
+            </a:r>
+            <a:endParaRPr lang="en-US" sz="700" dirty="0">
+              <a:solidFill>
+                <a:schemeClr val="bg1">
+                  <a:lumMod val="50000"/>
+                </a:schemeClr>
+              </a:solidFill>
+            </a:endParaRPr>
+          </a:p>
+        </p:txBody>
+      </p:sp>
+      <p:sp>
+        <p:nvSpPr>
+          <p:cNvPr id="73" name="Text 71"/>
+          <p:cNvSpPr/>
+          <p:nvPr/>
+        </p:nvSpPr>
+        <p:spPr>
+          <a:xfrm>
+            <a:off x="6352760" y="5586984"/>
+            <a:ext cx="4114800" cy="219456"/>
+          </a:xfrm>
+          <a:prstGeom prst="rect">
+            <a:avLst/>
+          </a:prstGeom>
+          <a:noFill/>
+          <a:ln/>
+        </p:spPr>
+        <p:txBody>
+          <a:bodyPr wrap="square" lIns="0" tIns="0" rIns="0" bIns="0" rtlCol="0" anchor="ctr"/>
+          <a:lstStyle/>
+          <a:p>
+            <a:pPr marL="0" indent="0">
+              <a:buNone/>
+            </a:pPr>
+            <a:r>
+              <a:rPr lang="en-US" sz="1200" dirty="0">
+                <a:solidFill>
+                  <a:srgbClr val="0F172A"/>
+                </a:solidFill>
+                <a:latin typeface="Calibri" pitchFamily="34" charset="0"/>
+                <a:ea typeface="Calibri" pitchFamily="34" charset="-122"/>
+                <a:cs typeface="Calibri" pitchFamily="34" charset="-120"/>
+              </a:rPr>
+              <a:t>m3-token-reference.jsx</a:t>
+            </a:r>
+            <a:endParaRPr lang="en-US" sz="1200" dirty="0"/>
+          </a:p>
+        </p:txBody>
+      </p:sp>
+      <p:sp>
+        <p:nvSpPr>
+          <p:cNvPr id="74" name="Text 72"/>
+          <p:cNvSpPr/>
+          <p:nvPr/>
+        </p:nvSpPr>
+        <p:spPr>
+          <a:xfrm>
+            <a:off x="10559000" y="5586984"/>
+            <a:ext cx="1051560" cy="219456"/>
+          </a:xfrm>
+          <a:prstGeom prst="rect">
+            <a:avLst/>
+          </a:prstGeom>
+          <a:noFill/>
+          <a:ln/>
+        </p:spPr>
+        <p:txBody>
+          <a:bodyPr wrap="square" lIns="0" tIns="0" rIns="0" bIns="0" rtlCol="0" anchor="ctr"/>
+          <a:lstStyle/>
+          <a:p>
+            <a:pPr marL="0" indent="0" algn="r">
+              <a:buNone/>
+            </a:pPr>
+            <a:r>
+              <a:rPr lang="en-US" sz="1000" dirty="0">
+                <a:solidFill>
+                  <a:srgbClr val="64748B"/>
+                </a:solidFill>
+                <a:latin typeface="Calibri" pitchFamily="34" charset="0"/>
+                <a:ea typeface="Calibri" pitchFamily="34" charset="-122"/>
+                <a:cs typeface="Calibri" pitchFamily="34" charset="-120"/>
+              </a:rPr>
+              <a:t>M3 reference</a:t>
+            </a:r>
+            <a:endParaRPr lang="en-US" sz="1000" dirty="0"/>
+          </a:p>
+        </p:txBody>
+      </p:sp>
+    </p:spTree>
+  </p:cSld>
+  <p:clrMapOvr>
+    <a:masterClrMapping/>
+  </p:clrMapOvr>
+</p:sld>
+</file>
+
+<file path=ppt/slides/slide21.xml><?xml version="1.0" encoding="utf-8"?>
 <p:sld xmlns:a="http://schemas.openxmlformats.org/drawingml/2006/main" xmlns:r="http://schemas.openxmlformats.org/officeDocument/2006/relationships" xmlns:p="http://schemas.openxmlformats.org/presentationml/2006/main">
   <p:cSld name="Slide 18">
     <p:bg>
@@ -20034,7 +20857,7 @@
                 <a:ea typeface="Calibri" pitchFamily="34" charset="-122"/>
                 <a:cs typeface="Calibri" pitchFamily="34" charset="-120"/>
               </a:rPr>
-              <a:t>3 / 20</a:t>
+              <a:t>3 / 21</a:t>
             </a:r>
             <a:endParaRPr lang="en-US" sz="900" dirty="0"/>
           </a:p>
@@ -20827,7 +21650,7 @@
                 <a:ea typeface="Calibri" pitchFamily="34" charset="-122"/>
                 <a:cs typeface="Calibri" pitchFamily="34" charset="-120"/>
               </a:rPr>
-              <a:t>4 / 20</a:t>
+              <a:t>4 / 21</a:t>
             </a:r>
             <a:endParaRPr lang="en-US" sz="900" dirty="0"/>
           </a:p>
@@ -21560,7 +22383,7 @@
                 <a:ea typeface="Calibri" pitchFamily="34" charset="-122"/>
                 <a:cs typeface="Calibri" pitchFamily="34" charset="-120"/>
               </a:rPr>
-              <a:t>5 / 20</a:t>
+              <a:t>5 / 21</a:t>
             </a:r>
             <a:endParaRPr lang="en-US" sz="900" dirty="0"/>
           </a:p>
@@ -21936,6 +22759,78 @@
               <a:t>The best designers will be those who wield AI as a power tool — not a replacement.</a:t>
             </a:r>
             <a:endParaRPr lang="en-US" sz="1600" dirty="0"/>
+          </a:p>
+        </p:txBody>
+      </p:sp>
+      <p:sp>
+        <p:nvSpPr>
+          <p:cNvPr id="6" name="Shape 5">
+            <a:extLst>
+              <a:ext uri="{FF2B5EF4-FFF2-40B4-BE49-F238E27FC236}">
+                <a16:creationId xmlns:a16="http://schemas.microsoft.com/office/drawing/2014/main" id="{E9F1427C-87D0-0BC3-B552-25EBE2252A20}"/>
+              </a:ext>
+            </a:extLst>
+          </p:cNvPr>
+          <p:cNvSpPr/>
+          <p:nvPr/>
+        </p:nvSpPr>
+        <p:spPr>
+          <a:xfrm>
+            <a:off x="511010" y="1656080"/>
+            <a:ext cx="54864" cy="3246120"/>
+          </a:xfrm>
+          <a:prstGeom prst="rect">
+            <a:avLst/>
+          </a:prstGeom>
+          <a:solidFill>
+            <a:srgbClr val="334155"/>
+          </a:solidFill>
+          <a:ln w="12700">
+            <a:noFill/>
+            <a:prstDash val="solid"/>
+          </a:ln>
+        </p:spPr>
+        <p:txBody>
+          <a:bodyPr/>
+          <a:lstStyle/>
+          <a:p>
+            <a:endParaRPr lang="en-US"/>
+          </a:p>
+        </p:txBody>
+      </p:sp>
+      <p:sp>
+        <p:nvSpPr>
+          <p:cNvPr id="10" name="Shape 5">
+            <a:extLst>
+              <a:ext uri="{FF2B5EF4-FFF2-40B4-BE49-F238E27FC236}">
+                <a16:creationId xmlns:a16="http://schemas.microsoft.com/office/drawing/2014/main" id="{6D8B8EAD-58C7-DED0-4092-B495C0A2BCEC}"/>
+              </a:ext>
+            </a:extLst>
+          </p:cNvPr>
+          <p:cNvSpPr/>
+          <p:nvPr/>
+        </p:nvSpPr>
+        <p:spPr>
+          <a:xfrm>
+            <a:off x="6183110" y="1656080"/>
+            <a:ext cx="54864" cy="3246120"/>
+          </a:xfrm>
+          <a:prstGeom prst="rect">
+            <a:avLst/>
+          </a:prstGeom>
+          <a:solidFill>
+            <a:srgbClr val="334155"/>
+          </a:solidFill>
+          <a:ln w="12700">
+            <a:noFill/>
+            <a:prstDash val="solid"/>
+          </a:ln>
+        </p:spPr>
+        <p:txBody>
+          <a:bodyPr/>
+          <a:lstStyle/>
+          <a:p>
+            <a:endParaRPr lang="en-US"/>
           </a:p>
         </p:txBody>
       </p:sp>
@@ -22003,7 +22898,7 @@
                 <a:ea typeface="Calibri" pitchFamily="34" charset="-122"/>
                 <a:cs typeface="Calibri" pitchFamily="34" charset="-120"/>
               </a:rPr>
-              <a:t>6 / 20</a:t>
+              <a:t>6 / 21</a:t>
             </a:r>
             <a:endParaRPr lang="en-US" sz="900" dirty="0"/>
           </a:p>
@@ -23290,7 +24185,7 @@
                 <a:ea typeface="Calibri" pitchFamily="34" charset="-122"/>
                 <a:cs typeface="Calibri" pitchFamily="34" charset="-120"/>
               </a:rPr>
-              <a:t>7 / 20</a:t>
+              <a:t>7 / 21</a:t>
             </a:r>
             <a:endParaRPr lang="en-US" sz="900" dirty="0"/>
           </a:p>
@@ -25651,7 +26546,7 @@
                 <a:ea typeface="Calibri" pitchFamily="34" charset="-122"/>
                 <a:cs typeface="Calibri" pitchFamily="34" charset="-120"/>
               </a:rPr>
-              <a:t>8 / 20</a:t>
+              <a:t>8 / 21</a:t>
             </a:r>
             <a:endParaRPr lang="en-US" sz="900" dirty="0"/>
           </a:p>
@@ -26407,7 +27302,7 @@
         </p:nvSpPr>
         <p:spPr>
           <a:xfrm>
-            <a:off x="7680960" y="1901952"/>
+            <a:off x="7747866" y="1901952"/>
             <a:ext cx="3657600" cy="256032"/>
           </a:xfrm>
           <a:prstGeom prst="rect">
@@ -26426,7 +27321,7 @@
             <a:r>
               <a:rPr lang="en-US" sz="900" b="1" kern="0" spc="200" dirty="0">
                 <a:solidFill>
-                  <a:schemeClr val="bg1"/>
+                  <a:srgbClr val="14B8A6"/>
                 </a:solidFill>
                 <a:latin typeface="Calibri" pitchFamily="34" charset="0"/>
                 <a:ea typeface="Calibri" pitchFamily="34" charset="-122"/>
@@ -26436,7 +27331,7 @@
             </a:r>
             <a:endParaRPr lang="en-US" sz="900" dirty="0">
               <a:solidFill>
-                <a:schemeClr val="bg1"/>
+                <a:srgbClr val="14B8A6"/>
               </a:solidFill>
             </a:endParaRPr>
           </a:p>
@@ -26450,7 +27345,7 @@
         </p:nvSpPr>
         <p:spPr>
           <a:xfrm>
-            <a:off x="7680960" y="2377440"/>
+            <a:off x="7747866" y="2377440"/>
             <a:ext cx="292608" cy="274320"/>
           </a:xfrm>
           <a:prstGeom prst="rect">
@@ -26478,7 +27373,7 @@
         </p:nvSpPr>
         <p:spPr>
           <a:xfrm>
-            <a:off x="8065008" y="2368296"/>
+            <a:off x="8198820" y="2368296"/>
             <a:ext cx="3246120" cy="256032"/>
           </a:xfrm>
           <a:prstGeom prst="rect">
@@ -26517,7 +27412,7 @@
         </p:nvSpPr>
         <p:spPr>
           <a:xfrm>
-            <a:off x="8065008" y="2482596"/>
+            <a:off x="8198820" y="2482596"/>
             <a:ext cx="3246120" cy="658368"/>
           </a:xfrm>
           <a:prstGeom prst="rect">
@@ -26559,7 +27454,7 @@
         </p:nvSpPr>
         <p:spPr>
           <a:xfrm>
-            <a:off x="7827264" y="2645914"/>
+            <a:off x="7894170" y="2645914"/>
             <a:ext cx="0" cy="822960"/>
           </a:xfrm>
           <a:prstGeom prst="line">
@@ -26589,7 +27484,7 @@
         </p:nvSpPr>
         <p:spPr>
           <a:xfrm>
-            <a:off x="8065008" y="3486263"/>
+            <a:off x="8198820" y="3486263"/>
             <a:ext cx="3246120" cy="256032"/>
           </a:xfrm>
           <a:prstGeom prst="rect">
@@ -26628,7 +27523,7 @@
         </p:nvSpPr>
         <p:spPr>
           <a:xfrm>
-            <a:off x="8065008" y="3610683"/>
+            <a:off x="8198820" y="3610683"/>
             <a:ext cx="3246120" cy="658368"/>
           </a:xfrm>
           <a:prstGeom prst="rect">
@@ -26670,7 +27565,7 @@
         </p:nvSpPr>
         <p:spPr>
           <a:xfrm>
-            <a:off x="7827264" y="3771376"/>
+            <a:off x="7894170" y="3771376"/>
             <a:ext cx="0" cy="812018"/>
           </a:xfrm>
           <a:prstGeom prst="line">
@@ -26700,20 +27595,20 @@
         </p:nvSpPr>
         <p:spPr>
           <a:xfrm>
-            <a:off x="7680960" y="4574250"/>
+            <a:off x="7747866" y="4574250"/>
             <a:ext cx="292608" cy="292608"/>
           </a:xfrm>
           <a:prstGeom prst="ellipse">
             <a:avLst/>
           </a:prstGeom>
           <a:solidFill>
-            <a:schemeClr val="bg1">
+            <a:srgbClr val="14B8A6">
               <a:alpha val="30000"/>
-            </a:schemeClr>
+            </a:srgbClr>
           </a:solidFill>
           <a:ln w="12700">
             <a:solidFill>
-              <a:schemeClr val="bg1"/>
+              <a:srgbClr val="14B8A6"/>
             </a:solidFill>
             <a:prstDash val="solid"/>
           </a:ln>
@@ -26734,7 +27629,7 @@
         </p:nvSpPr>
         <p:spPr>
           <a:xfrm>
-            <a:off x="7680960" y="4583394"/>
+            <a:off x="7747866" y="4583394"/>
             <a:ext cx="292608" cy="274320"/>
           </a:xfrm>
           <a:prstGeom prst="rect">
@@ -26773,7 +27668,7 @@
         </p:nvSpPr>
         <p:spPr>
           <a:xfrm>
-            <a:off x="8065008" y="4574250"/>
+            <a:off x="8198820" y="4574250"/>
             <a:ext cx="3246120" cy="256032"/>
           </a:xfrm>
           <a:prstGeom prst="rect">
@@ -26818,7 +27713,7 @@
         </p:nvSpPr>
         <p:spPr>
           <a:xfrm>
-            <a:off x="7680960" y="5105126"/>
+            <a:off x="7747866" y="5105126"/>
             <a:ext cx="3630168" cy="658368"/>
           </a:xfrm>
           <a:prstGeom prst="rect">
@@ -26863,7 +27758,7 @@
         </p:nvSpPr>
         <p:spPr>
           <a:xfrm>
-            <a:off x="7680960" y="5606171"/>
+            <a:off x="7747866" y="5606171"/>
             <a:ext cx="3703320" cy="402336"/>
           </a:xfrm>
           <a:prstGeom prst="rect">
@@ -26908,20 +27803,20 @@
         </p:nvSpPr>
         <p:spPr>
           <a:xfrm>
-            <a:off x="7683460" y="3467480"/>
+            <a:off x="7750366" y="3467480"/>
             <a:ext cx="292608" cy="292608"/>
           </a:xfrm>
           <a:prstGeom prst="ellipse">
             <a:avLst/>
           </a:prstGeom>
           <a:solidFill>
-            <a:schemeClr val="bg1">
+            <a:srgbClr val="14B8A6">
               <a:alpha val="30000"/>
-            </a:schemeClr>
+            </a:srgbClr>
           </a:solidFill>
           <a:ln w="12700">
             <a:solidFill>
-              <a:schemeClr val="bg1"/>
+              <a:srgbClr val="14B8A6"/>
             </a:solidFill>
             <a:prstDash val="solid"/>
           </a:ln>
@@ -26948,7 +27843,7 @@
         </p:nvSpPr>
         <p:spPr>
           <a:xfrm>
-            <a:off x="7683460" y="3476624"/>
+            <a:off x="7750366" y="3476624"/>
             <a:ext cx="292608" cy="274320"/>
           </a:xfrm>
           <a:prstGeom prst="rect">
@@ -26993,20 +27888,20 @@
         </p:nvSpPr>
         <p:spPr>
           <a:xfrm>
-            <a:off x="7693455" y="2345725"/>
+            <a:off x="7760361" y="2345725"/>
             <a:ext cx="292608" cy="292608"/>
           </a:xfrm>
           <a:prstGeom prst="ellipse">
             <a:avLst/>
           </a:prstGeom>
           <a:solidFill>
-            <a:schemeClr val="bg1">
+            <a:srgbClr val="14B8A6">
               <a:alpha val="30000"/>
-            </a:schemeClr>
+            </a:srgbClr>
           </a:solidFill>
           <a:ln w="12700">
             <a:solidFill>
-              <a:schemeClr val="bg1"/>
+              <a:srgbClr val="14B8A6"/>
             </a:solidFill>
             <a:prstDash val="solid"/>
           </a:ln>
@@ -27033,7 +27928,7 @@
         </p:nvSpPr>
         <p:spPr>
           <a:xfrm>
-            <a:off x="7693455" y="2354869"/>
+            <a:off x="7760361" y="2354869"/>
             <a:ext cx="292608" cy="274320"/>
           </a:xfrm>
           <a:prstGeom prst="rect">
@@ -27061,6 +27956,42 @@
               <a:t>1</a:t>
             </a:r>
             <a:endParaRPr lang="en-US" sz="1200" dirty="0"/>
+          </a:p>
+        </p:txBody>
+      </p:sp>
+      <p:sp>
+        <p:nvSpPr>
+          <p:cNvPr id="22" name="Shape 5">
+            <a:extLst>
+              <a:ext uri="{FF2B5EF4-FFF2-40B4-BE49-F238E27FC236}">
+                <a16:creationId xmlns:a16="http://schemas.microsoft.com/office/drawing/2014/main" id="{1C04D645-CA73-4140-7ADA-34426A1A14BC}"/>
+              </a:ext>
+            </a:extLst>
+          </p:cNvPr>
+          <p:cNvSpPr/>
+          <p:nvPr/>
+        </p:nvSpPr>
+        <p:spPr>
+          <a:xfrm>
+            <a:off x="7507452" y="1737359"/>
+            <a:ext cx="54633" cy="4370831"/>
+          </a:xfrm>
+          <a:prstGeom prst="rect">
+            <a:avLst/>
+          </a:prstGeom>
+          <a:solidFill>
+            <a:srgbClr val="334155"/>
+          </a:solidFill>
+          <a:ln w="12700">
+            <a:noFill/>
+            <a:prstDash val="solid"/>
+          </a:ln>
+        </p:spPr>
+        <p:txBody>
+          <a:bodyPr/>
+          <a:lstStyle/>
+          <a:p>
+            <a:endParaRPr lang="en-US"/>
           </a:p>
         </p:txBody>
       </p:sp>
@@ -27128,7 +28059,7 @@
                 <a:ea typeface="Calibri" pitchFamily="34" charset="-122"/>
                 <a:cs typeface="Calibri" pitchFamily="34" charset="-120"/>
               </a:rPr>
-              <a:t>9 / 20</a:t>
+              <a:t>9 / 21</a:t>
             </a:r>
             <a:endParaRPr lang="en-US" sz="900" dirty="0"/>
           </a:p>
